--- a/03_タンパク質構造の基礎/03_タンパク質構造の基礎.pptx
+++ b/03_タンパク質構造の基礎/03_タンパク質構造の基礎.pptx
@@ -6283,8 +6283,279 @@
         </p:nvSpPr>
         <p:spPr>
           <a:xfrm>
-            <a:off x="594360" y="914400"/>
-            <a:ext cx="6400800" cy="365760"/>
+            <a:off x="822960" y="1417320"/>
+            <a:ext cx="5852160" cy="329184"/>
+          </a:xfrm>
+          <a:prstGeom prst="rect">
+            <a:avLst/>
+          </a:prstGeom>
+          <a:noFill/>
+        </p:spPr>
+        <p:txBody>
+          <a:bodyPr wrap="square" lIns="0" rIns="0" tIns="0" bIns="0" anchor="t">
+            <a:noAutofit/>
+          </a:bodyPr>
+          <a:lstStyle/>
+          <a:p>
+            <a:pPr algn="l">
+              <a:lnSpc>
+                <a:spcPts val="1680"/>
+              </a:lnSpc>
+            </a:pPr>
+            <a:r>
+              <a:rPr sz="1400" b="1" lang="ja-JP" altLang="en-US">
+                <a:solidFill>
+                  <a:srgbClr val="0017C1"/>
+                </a:solidFill>
+                <a:latin typeface="Noto Sans JP"/>
+                <a:ea typeface="Noto Sans JP"/>
+              </a:rPr>
+              <a:t>生命情報工学特論　第03回</a:t>
+            </a:r>
+          </a:p>
+        </p:txBody>
+      </p:sp>
+      <p:sp>
+        <p:nvSpPr>
+          <p:cNvPr id="3" name="TextBox 2"/>
+          <p:cNvSpPr txBox="1"/>
+          <p:nvPr/>
+        </p:nvSpPr>
+        <p:spPr>
+          <a:xfrm>
+            <a:off x="822960" y="1828800"/>
+            <a:ext cx="5852160" cy="1188720"/>
+          </a:xfrm>
+          <a:prstGeom prst="rect">
+            <a:avLst/>
+          </a:prstGeom>
+          <a:noFill/>
+        </p:spPr>
+        <p:txBody>
+          <a:bodyPr wrap="square" lIns="0" rIns="0" tIns="0" bIns="0" anchor="t">
+            <a:noAutofit/>
+          </a:bodyPr>
+          <a:lstStyle/>
+          <a:p>
+            <a:pPr algn="l">
+              <a:lnSpc>
+                <a:spcPts val="4200"/>
+              </a:lnSpc>
+            </a:pPr>
+            <a:r>
+              <a:rPr sz="3400" b="1" lang="ja-JP" altLang="en-US">
+                <a:solidFill>
+                  <a:srgbClr val="1A1A1A"/>
+                </a:solidFill>
+                <a:latin typeface="Noto Sans JP"/>
+                <a:ea typeface="Noto Sans JP"/>
+              </a:rPr>
+              <a:t>タンパク質構造の
+基礎</a:t>
+            </a:r>
+          </a:p>
+        </p:txBody>
+      </p:sp>
+      <p:sp>
+        <p:nvSpPr>
+          <p:cNvPr id="4" name="TextBox 3"/>
+          <p:cNvSpPr txBox="1"/>
+          <p:nvPr/>
+        </p:nvSpPr>
+        <p:spPr>
+          <a:xfrm>
+            <a:off x="822960" y="3273552"/>
+            <a:ext cx="5669280" cy="1280160"/>
+          </a:xfrm>
+          <a:prstGeom prst="rect">
+            <a:avLst/>
+          </a:prstGeom>
+          <a:noFill/>
+        </p:spPr>
+        <p:txBody>
+          <a:bodyPr wrap="square" lIns="0" rIns="0" tIns="0" bIns="0" anchor="t">
+            <a:noAutofit/>
+          </a:bodyPr>
+          <a:lstStyle/>
+          <a:p>
+            <a:pPr algn="l">
+              <a:lnSpc>
+                <a:spcPts val="2790"/>
+              </a:lnSpc>
+            </a:pPr>
+            <a:r>
+              <a:rPr sz="1800" b="0" lang="ja-JP" altLang="en-US">
+                <a:solidFill>
+                  <a:srgbClr val="4D4D4D"/>
+                </a:solidFill>
+                <a:latin typeface="Noto Sans JP"/>
+                <a:ea typeface="Noto Sans JP"/>
+              </a:rPr>
+              <a:t>配列・相互作用・立体構造</a:t>
+            </a:r>
+          </a:p>
+          <a:p>
+            <a:pPr algn="l">
+              <a:lnSpc>
+                <a:spcPts val="2790"/>
+              </a:lnSpc>
+            </a:pPr>
+            <a:r>
+              <a:rPr sz="1800" b="0" lang="ja-JP" altLang="en-US">
+                <a:solidFill>
+                  <a:srgbClr val="4D4D4D"/>
+                </a:solidFill>
+                <a:latin typeface="Noto Sans JP"/>
+                <a:ea typeface="Noto Sans JP"/>
+              </a:rPr>
+              <a:t/>
+            </a:r>
+          </a:p>
+        </p:txBody>
+      </p:sp>
+      <p:cxnSp>
+        <p:nvCxnSpPr>
+          <p:cNvPr id="5" name="Connector 4"/>
+          <p:cNvCxnSpPr/>
+          <p:nvPr/>
+        </p:nvCxnSpPr>
+        <p:spPr>
+          <a:xfrm>
+            <a:off x="822960" y="4892040"/>
+            <a:ext cx="5212080" cy="0"/>
+          </a:xfrm>
+          <a:prstGeom prst="line">
+            <a:avLst/>
+          </a:prstGeom>
+          <a:ln w="12700">
+            <a:solidFill>
+              <a:srgbClr val="CCCCCC"/>
+            </a:solidFill>
+          </a:ln>
+        </p:spPr>
+        <p:style>
+          <a:lnRef idx="2">
+            <a:schemeClr val="accent1"/>
+          </a:lnRef>
+          <a:fillRef idx="0">
+            <a:schemeClr val="accent1"/>
+          </a:fillRef>
+          <a:effectRef idx="1">
+            <a:schemeClr val="accent1"/>
+          </a:effectRef>
+          <a:fontRef idx="minor">
+            <a:schemeClr val="tx1"/>
+          </a:fontRef>
+        </p:style>
+      </p:cxnSp>
+      <p:sp>
+        <p:nvSpPr>
+          <p:cNvPr id="6" name="TextBox 5"/>
+          <p:cNvSpPr txBox="1"/>
+          <p:nvPr/>
+        </p:nvSpPr>
+        <p:spPr>
+          <a:xfrm>
+            <a:off x="822960" y="5029200"/>
+            <a:ext cx="5486400" cy="320040"/>
+          </a:xfrm>
+          <a:prstGeom prst="rect">
+            <a:avLst/>
+          </a:prstGeom>
+          <a:noFill/>
+        </p:spPr>
+        <p:txBody>
+          <a:bodyPr wrap="square" lIns="0" rIns="0" tIns="0" bIns="0" anchor="t">
+            <a:noAutofit/>
+          </a:bodyPr>
+          <a:lstStyle/>
+          <a:p>
+            <a:pPr algn="l">
+              <a:lnSpc>
+                <a:spcPts val="1920"/>
+              </a:lnSpc>
+            </a:pPr>
+            <a:r>
+              <a:rPr sz="1600" b="1" lang="ja-JP" altLang="en-US">
+                <a:solidFill>
+                  <a:srgbClr val="1A1A1A"/>
+                </a:solidFill>
+                <a:latin typeface="Noto Sans JP"/>
+                <a:ea typeface="Noto Sans JP"/>
+              </a:rPr>
+              <a:t>松永 康佑</a:t>
+            </a:r>
+          </a:p>
+        </p:txBody>
+      </p:sp>
+      <p:sp>
+        <p:nvSpPr>
+          <p:cNvPr id="7" name="TextBox 6"/>
+          <p:cNvSpPr txBox="1"/>
+          <p:nvPr/>
+        </p:nvSpPr>
+        <p:spPr>
+          <a:xfrm>
+            <a:off x="822960" y="5394960"/>
+            <a:ext cx="5486400" cy="548640"/>
+          </a:xfrm>
+          <a:prstGeom prst="rect">
+            <a:avLst/>
+          </a:prstGeom>
+          <a:noFill/>
+        </p:spPr>
+        <p:txBody>
+          <a:bodyPr wrap="square" lIns="0" rIns="0" tIns="0" bIns="0" anchor="t">
+            <a:noAutofit/>
+          </a:bodyPr>
+          <a:lstStyle/>
+          <a:p>
+            <a:pPr algn="l">
+              <a:lnSpc>
+                <a:spcPts val="1439"/>
+              </a:lnSpc>
+            </a:pPr>
+            <a:r>
+              <a:rPr sz="1200" b="0" lang="ja-JP" altLang="en-US">
+                <a:solidFill>
+                  <a:srgbClr val="666666"/>
+                </a:solidFill>
+                <a:latin typeface="Noto Sans JP"/>
+                <a:ea typeface="Noto Sans JP"/>
+              </a:rPr>
+              <a:t>埼玉大学 大学院理工学研究科
+理化学研究所 計算科学研究センター ｜ 2026年10月19日</a:t>
+            </a:r>
+          </a:p>
+          <a:p>
+            <a:pPr algn="l">
+              <a:lnSpc>
+                <a:spcPts val="1439"/>
+              </a:lnSpc>
+            </a:pPr>
+            <a:r>
+              <a:rPr sz="1200" b="0" lang="ja-JP" altLang="en-US">
+                <a:solidFill>
+                  <a:srgbClr val="666666"/>
+                </a:solidFill>
+                <a:latin typeface="Noto Sans JP"/>
+                <a:ea typeface="Noto Sans JP"/>
+              </a:rPr>
+              <a:t/>
+            </a:r>
+          </a:p>
+        </p:txBody>
+      </p:sp>
+      <p:sp>
+        <p:nvSpPr>
+          <p:cNvPr id="8" name="TextBox 7"/>
+          <p:cNvSpPr txBox="1"/>
+          <p:nvPr/>
+        </p:nvSpPr>
+        <p:spPr>
+          <a:xfrm>
+            <a:off x="6537960" y="6236208"/>
+            <a:ext cx="5212080" cy="320040"/>
           </a:xfrm>
           <a:prstGeom prst="rect">
             <a:avLst/>
@@ -6303,181 +6574,37 @@
               </a:lnSpc>
             </a:pPr>
             <a:r>
-              <a:rPr sz="2000" b="1" lang="ja-JP" altLang="en-US">
-                <a:solidFill>
-                  <a:srgbClr val="0017C1"/>
-                </a:solidFill>
-                <a:latin typeface="Noto Sans JP"/>
-                <a:ea typeface="Noto Sans JP"/>
-              </a:rPr>
-              <a:t>生命情報工学特論 第03回</a:t>
-            </a:r>
-          </a:p>
-        </p:txBody>
-      </p:sp>
-      <p:sp>
-        <p:nvSpPr>
-          <p:cNvPr id="3" name="TextBox 2"/>
-          <p:cNvSpPr txBox="1"/>
-          <p:nvPr/>
-        </p:nvSpPr>
-        <p:spPr>
-          <a:xfrm>
-            <a:off x="594360" y="1828800"/>
-            <a:ext cx="7315200" cy="822960"/>
-          </a:xfrm>
-          <a:prstGeom prst="rect">
-            <a:avLst/>
-          </a:prstGeom>
-          <a:noFill/>
-        </p:spPr>
-        <p:txBody>
-          <a:bodyPr wrap="square" lIns="0" rIns="0" tIns="0" bIns="0" anchor="t">
-            <a:noAutofit/>
-          </a:bodyPr>
-          <a:lstStyle/>
-          <a:p>
-            <a:pPr algn="l">
-              <a:lnSpc>
-                <a:spcPct val="140000"/>
-              </a:lnSpc>
-            </a:pPr>
-            <a:r>
-              <a:rPr sz="3600" b="1" lang="ja-JP" altLang="en-US">
-                <a:solidFill>
-                  <a:srgbClr val="1A1A1A"/>
-                </a:solidFill>
-                <a:latin typeface="Noto Sans JP"/>
-                <a:ea typeface="Noto Sans JP"/>
-              </a:rPr>
-              <a:t>タンパク質構造の基礎</a:t>
-            </a:r>
-          </a:p>
-        </p:txBody>
-      </p:sp>
-      <p:sp>
-        <p:nvSpPr>
-          <p:cNvPr id="4" name="TextBox 3"/>
-          <p:cNvSpPr txBox="1"/>
-          <p:nvPr/>
-        </p:nvSpPr>
-        <p:spPr>
-          <a:xfrm>
-            <a:off x="594360" y="2971800"/>
-            <a:ext cx="5943600" cy="914400"/>
-          </a:xfrm>
-          <a:prstGeom prst="rect">
-            <a:avLst/>
-          </a:prstGeom>
-          <a:noFill/>
-        </p:spPr>
-        <p:txBody>
-          <a:bodyPr wrap="square" lIns="0" rIns="0" tIns="0" bIns="0" anchor="t">
-            <a:noAutofit/>
-          </a:bodyPr>
-          <a:lstStyle/>
-          <a:p>
-            <a:pPr algn="l">
-              <a:lnSpc>
-                <a:spcPct val="140000"/>
-              </a:lnSpc>
-            </a:pPr>
-            <a:r>
-              <a:rPr sz="2300" b="0" lang="ja-JP" altLang="en-US">
-                <a:solidFill>
-                  <a:srgbClr val="4D4D4D"/>
-                </a:solidFill>
-                <a:latin typeface="Noto Sans JP"/>
-                <a:ea typeface="Noto Sans JP"/>
-              </a:rPr>
-              <a:t>配列・相互作用・立体構造</a:t>
-            </a:r>
-          </a:p>
-        </p:txBody>
-      </p:sp>
-      <p:sp>
-        <p:nvSpPr>
-          <p:cNvPr id="5" name="TextBox 4"/>
-          <p:cNvSpPr txBox="1"/>
-          <p:nvPr/>
-        </p:nvSpPr>
-        <p:spPr>
-          <a:xfrm>
-            <a:off x="594360" y="5303520"/>
-            <a:ext cx="7315200" cy="502920"/>
-          </a:xfrm>
-          <a:prstGeom prst="rect">
-            <a:avLst/>
-          </a:prstGeom>
-          <a:noFill/>
-        </p:spPr>
-        <p:txBody>
-          <a:bodyPr wrap="square" lIns="0" rIns="0" tIns="0" bIns="0" anchor="t">
-            <a:noAutofit/>
-          </a:bodyPr>
-          <a:lstStyle/>
-          <a:p>
-            <a:pPr algn="l">
-              <a:lnSpc>
-                <a:spcPct val="140000"/>
-              </a:lnSpc>
-            </a:pPr>
-            <a:r>
-              <a:rPr sz="1700" b="0" lang="ja-JP" altLang="en-US">
+              <a:rPr sz="1100" b="0" lang="ja-JP" altLang="en-US">
                 <a:solidFill>
                   <a:srgbClr val="333333"/>
                 </a:solidFill>
                 <a:latin typeface="Noto Sans JP"/>
                 <a:ea typeface="Noto Sans JP"/>
               </a:rPr>
-              <a:t>松永 康佑　埼玉大学 大学院理工学研究科</a:t>
+              <a:t>図：ユビキチンのCα座標（PDB: 1UBQ）。配列順に色分け。</a:t>
             </a:r>
           </a:p>
         </p:txBody>
       </p:sp>
       <p:pic>
         <p:nvPicPr>
-          <p:cNvPr id="6" name="Picture 5" descr="logo: saitama"/>
+          <p:cNvPr id="9" name="Picture 8" descr="image.png"/>
           <p:cNvPicPr>
             <a:picLocks noChangeAspect="1"/>
           </p:cNvPicPr>
           <p:nvPr/>
         </p:nvPicPr>
         <p:blipFill>
-          <a:blip r:embed="rId3"/>
+          <a:blip r:embed="rId4"/>
+          <a:srcRect l="26948" r="19675" t="14545" b="20606"/>
           <a:stretch>
             <a:fillRect/>
           </a:stretch>
         </p:blipFill>
         <p:spPr>
           <a:xfrm>
-            <a:off x="10819809" y="5730259"/>
-            <a:ext cx="761980" cy="761980"/>
-          </a:xfrm>
-          <a:prstGeom prst="rect">
-            <a:avLst/>
-          </a:prstGeom>
-        </p:spPr>
-      </p:pic>
-      <p:pic>
-        <p:nvPicPr>
-          <p:cNvPr id="7" name="Picture 6" descr="trace.png"/>
-          <p:cNvPicPr>
-            <a:picLocks noChangeAspect="1"/>
-          </p:cNvPicPr>
-          <p:nvPr/>
-        </p:nvPicPr>
-        <p:blipFill>
-          <a:blip r:embed="rId4"/>
-          <a:srcRect l="26948" t="14545" r="19675" b="20606"/>
-          <a:stretch>
-            <a:fillRect/>
-          </a:stretch>
-        </p:blipFill>
-        <p:spPr>
-          <a:xfrm>
-            <a:off x="7623703" y="1417320"/>
-            <a:ext cx="3863553" cy="4023360"/>
+            <a:off x="6675120" y="960120"/>
+            <a:ext cx="4782312" cy="4983480"/>
           </a:xfrm>
           <a:prstGeom prst="rect">
             <a:avLst/>

--- a/03_タンパク質構造の基礎/03_タンパク質構造の基礎.pptx
+++ b/03_タンパク質構造の基礎/03_タンパク質構造の基礎.pptx
@@ -1199,7 +1199,7 @@
               <a:rPr lang="ja-JP" altLang="en-US">
                 <a:ea typeface="Noto Sans JP"/>
               </a:rPr>
-              <a:t>ヘリックスの答えは十四番目です。十から四つ先を数えます。シートでは、最初の矢印が右向きなら、逆平行の相手は左向きです。ここまでの二つの二次構造は、どちらも主鎖の配置で説明できます。側鎖の違いは、どのような環境と接するか、どの構造を取りやすいかに関わります。これで、リボン図を見たときに、らせんと矢印が何を省略して表しているかが分かるようになります。</a:t>
+              <a:t>ヘリックスでは十番目のカルボニル基と、四つ先の十四番目のエヌエイチが水素結合を作ります。シートでは、最初の矢印が右向きなら、逆平行の相手は左向きです。ここまでの二つの二次構造は、どちらも主鎖の配置で説明できます。側鎖の違いは、どのような環境と接するか、どの構造を取りやすいかに関わります。これで、リボン図を見たときに、らせんと矢印が何を省略して表しているかが分かるようになります。</a:t>
             </a:r>
           </a:p>
         </p:txBody>
@@ -1418,25 +1418,7 @@
               <a:rPr lang="ja-JP" altLang="en-US">
                 <a:ea typeface="Noto Sans JP"/>
               </a:rPr>
-              <a:t>全原子は側鎖の向きや衝突まで評価できますが、水素の付加や命名の違いを処理する必要があります。主鎖N–Cα–C–Oはペプチド面の向きも残します。</a:t>
-            </a:r>
-          </a:p>
-          <a:p/>
-          <a:p>
-            <a:r>
-              <a:rPr lang="ja-JP" altLang="en-US">
-                <a:ea typeface="Noto Sans JP"/>
-              </a:rPr>
-              <a:t>Cαだけなら原子対応が簡単で高速です。一方、同じCα配置から複数の側鎖配置が生じ、ペプチド面や水素結合を一意には決められません。</a:t>
-            </a:r>
-          </a:p>
-          <a:p/>
-          <a:p>
-            <a:r>
-              <a:rPr lang="ja-JP" altLang="en-US">
-                <a:ea typeface="Noto Sans JP"/>
-              </a:rPr>
-              <a:t>表示で省いた原子が、分子から消えたわけではありません。Cαの図で分かる全体の形と、全原子で確かめる側鎖の配置を区別します。</a:t>
+              <a:t>同じユビキチンの残基23から27を、同じ座標と同じ向きで三通りに表示しています。左ではPDBに記録された重原子をすべて表示していますが、水素は収録されていません。中央は主鎖の窒素、アルファ炭素、カルボニル炭素、酸素だけです。右は各残基のアルファ炭素を一点としてつないでいます。表示を簡単にすると全体の形をつかみやすくなりますが、側鎖の向きや水素結合に必要な情報は省かれます。分子そのものが変わったわけではありません。座標の単位も合わせ、必要な原子を選んで比較します。</a:t>
             </a:r>
           </a:p>
         </p:txBody>
@@ -2823,7 +2805,7 @@
               <a:rPr lang="ja-JP" altLang="en-US">
                 <a:ea typeface="Noto Sans JP"/>
               </a:rPr>
-              <a:t>距離の数字を対称に並べれば、必ず三次元の構造になるわけではありません。まず自分自身への距離はゼロで、距離は非負、順序を入れ替えても同じです。さらに三つの点の距離は三角不等式を満たします。例えば2、2、5オングストロームの三辺では、短い二辺を足しても長い辺に届きません。三角不等式だけで多数の点が三次元に置けることまで保証されるわけではなく、より強い条件が必要です。その計算法や距離からの座標の復元は後の構造表現の回に譲ります。</a:t>
+              <a:t>距離の数字を対称に並べれば、必ず三次元の構造になるわけではありません。まず自分自身への距離はゼロで、距離は非負、順序を入れ替えても同じです。さらに三つの点の距離は三角不等式を満たします。例えば2、2、5オングストロームの三辺では、短い二辺を足しても長い辺に届きません。三角不等式だけで多数の点が三次元に置けることまで保証されるわけではなく、より強い条件が必要です。ここでは距離が満たす条件までを扱い、座標復元の計算法は省略します。</a:t>
             </a:r>
           </a:p>
         </p:txBody>
@@ -3188,7 +3170,7 @@
               <a:rPr lang="ja-JP" altLang="en-US">
                 <a:ea typeface="Noto Sans JP"/>
               </a:rPr>
-              <a:t>水素結合の図で、水素を持つ側と、電子を受け入れる相手の位置を見てください。主鎖では、窒素に結び付いた水素と、別の場所のカルボニル酸素がよく組になります。単に正と負が引き合っているという説明だけでは、なぜ特定の向きや距離が好まれるかを説明できません。水とも水素結合を作るので、折りたたみによってタンパク質内部に結合ができたときには、水との結合がどう変わったかも考える必要があります。</a:t>
+              <a:t>水素結合の図で、水素が結合している供与体と、水素結合の相手となる受容体の位置を見てください。主鎖では、窒素に結び付いた水素と、別の場所のカルボニル酸素がよく組になります。単に正と負が引き合っているという説明だけでは、なぜ特定の向きや距離が好まれるかを説明できません。水とも水素結合を作るので、折りたたみによってタンパク質内部に結合ができたときには、水との結合がどう変わったかも考える必要があります。</a:t>
             </a:r>
           </a:p>
         </p:txBody>
@@ -6588,7 +6570,7 @@
       </p:sp>
       <p:pic>
         <p:nvPicPr>
-          <p:cNvPr id="9" name="Picture 8" descr="image.png"/>
+          <p:cNvPr id="9" name="Picture 8" descr="trace.png"/>
           <p:cNvPicPr>
             <a:picLocks noChangeAspect="1"/>
           </p:cNvPicPr>
@@ -6800,27 +6782,27 @@
         </p:nvSpPr>
         <p:spPr>
           <a:xfrm>
-            <a:off x="685800" y="1554480"/>
-            <a:ext cx="10808208" cy="783336"/>
-          </a:xfrm>
-          <a:prstGeom prst="rect">
-            <a:avLst/>
-          </a:prstGeom>
-          <a:noFill/>
-        </p:spPr>
-        <p:txBody>
-          <a:bodyPr wrap="square" lIns="0" rIns="0" tIns="0" bIns="0" anchor="t">
-            <a:noAutofit/>
-          </a:bodyPr>
-          <a:lstStyle/>
-          <a:p>
-            <a:pPr algn="l">
-              <a:lnSpc>
-                <a:spcPts val="2688"/>
-              </a:lnSpc>
-            </a:pPr>
-            <a:r>
-              <a:rPr sz="2100" b="0" lang="ja-JP" altLang="en-US">
+            <a:off x="594360" y="1508760"/>
+            <a:ext cx="5760720" cy="685800"/>
+          </a:xfrm>
+          <a:prstGeom prst="rect">
+            <a:avLst/>
+          </a:prstGeom>
+          <a:noFill/>
+        </p:spPr>
+        <p:txBody>
+          <a:bodyPr wrap="square" lIns="0" rIns="0" tIns="0" bIns="0" anchor="t">
+            <a:noAutofit/>
+          </a:bodyPr>
+          <a:lstStyle/>
+          <a:p>
+            <a:pPr algn="l">
+              <a:lnSpc>
+                <a:spcPts val="2304"/>
+              </a:lnSpc>
+            </a:pPr>
+            <a:r>
+              <a:rPr sz="1800" b="0" lang="ja-JP" altLang="en-US">
                 <a:solidFill>
                   <a:srgbClr val="333333"/>
                 </a:solidFill>
@@ -6840,27 +6822,27 @@
         </p:nvSpPr>
         <p:spPr>
           <a:xfrm>
-            <a:off x="685800" y="2438400"/>
-            <a:ext cx="10808208" cy="783336"/>
-          </a:xfrm>
-          <a:prstGeom prst="rect">
-            <a:avLst/>
-          </a:prstGeom>
-          <a:noFill/>
-        </p:spPr>
-        <p:txBody>
-          <a:bodyPr wrap="square" lIns="0" rIns="0" tIns="0" bIns="0" anchor="t">
-            <a:noAutofit/>
-          </a:bodyPr>
-          <a:lstStyle/>
-          <a:p>
-            <a:pPr algn="l">
-              <a:lnSpc>
-                <a:spcPts val="2688"/>
-              </a:lnSpc>
-            </a:pPr>
-            <a:r>
-              <a:rPr sz="2100" b="0" lang="ja-JP" altLang="en-US">
+            <a:off x="594360" y="2295144"/>
+            <a:ext cx="5760720" cy="685800"/>
+          </a:xfrm>
+          <a:prstGeom prst="rect">
+            <a:avLst/>
+          </a:prstGeom>
+          <a:noFill/>
+        </p:spPr>
+        <p:txBody>
+          <a:bodyPr wrap="square" lIns="0" rIns="0" tIns="0" bIns="0" anchor="t">
+            <a:noAutofit/>
+          </a:bodyPr>
+          <a:lstStyle/>
+          <a:p>
+            <a:pPr algn="l">
+              <a:lnSpc>
+                <a:spcPts val="2304"/>
+              </a:lnSpc>
+            </a:pPr>
+            <a:r>
+              <a:rPr sz="1800" b="0" lang="ja-JP" altLang="en-US">
                 <a:solidFill>
                   <a:srgbClr val="333333"/>
                 </a:solidFill>
@@ -6880,27 +6862,27 @@
         </p:nvSpPr>
         <p:spPr>
           <a:xfrm>
-            <a:off x="685800" y="3322320"/>
-            <a:ext cx="10808208" cy="783336"/>
-          </a:xfrm>
-          <a:prstGeom prst="rect">
-            <a:avLst/>
-          </a:prstGeom>
-          <a:noFill/>
-        </p:spPr>
-        <p:txBody>
-          <a:bodyPr wrap="square" lIns="0" rIns="0" tIns="0" bIns="0" anchor="t">
-            <a:noAutofit/>
-          </a:bodyPr>
-          <a:lstStyle/>
-          <a:p>
-            <a:pPr algn="l">
-              <a:lnSpc>
-                <a:spcPts val="2688"/>
-              </a:lnSpc>
-            </a:pPr>
-            <a:r>
-              <a:rPr sz="2100" b="0" lang="ja-JP" altLang="en-US">
+            <a:off x="594360" y="3081527"/>
+            <a:ext cx="5760720" cy="685800"/>
+          </a:xfrm>
+          <a:prstGeom prst="rect">
+            <a:avLst/>
+          </a:prstGeom>
+          <a:noFill/>
+        </p:spPr>
+        <p:txBody>
+          <a:bodyPr wrap="square" lIns="0" rIns="0" tIns="0" bIns="0" anchor="t">
+            <a:noAutofit/>
+          </a:bodyPr>
+          <a:lstStyle/>
+          <a:p>
+            <a:pPr algn="l">
+              <a:lnSpc>
+                <a:spcPts val="2304"/>
+              </a:lnSpc>
+            </a:pPr>
+            <a:r>
+              <a:rPr sz="1800" b="0" lang="ja-JP" altLang="en-US">
                 <a:solidFill>
                   <a:srgbClr val="333333"/>
                 </a:solidFill>
@@ -6908,6 +6890,71 @@
                 <a:ea typeface="Noto Sans JP"/>
               </a:rPr>
               <a:t>これは傾向であり、各残基の位置は周囲の原子や水との相互作用によって変わる。</a:t>
+            </a:r>
+          </a:p>
+        </p:txBody>
+      </p:sp>
+      <p:pic>
+        <p:nvPicPr>
+          <p:cNvPr id="9" name="Picture 8" descr="review_ile_lys.png"/>
+          <p:cNvPicPr>
+            <a:picLocks noChangeAspect="1"/>
+          </p:cNvPicPr>
+          <p:nvPr/>
+        </p:nvPicPr>
+        <p:blipFill>
+          <a:blip r:embed="rId3"/>
+          <a:srcRect/>
+          <a:stretch>
+            <a:fillRect/>
+          </a:stretch>
+        </p:blipFill>
+        <p:spPr>
+          <a:xfrm>
+            <a:off x="6611112" y="2069592"/>
+            <a:ext cx="4956048" cy="3304032"/>
+          </a:xfrm>
+          <a:prstGeom prst="rect">
+            <a:avLst/>
+          </a:prstGeom>
+        </p:spPr>
+      </p:pic>
+      <p:sp>
+        <p:nvSpPr>
+          <p:cNvPr id="10" name="TextBox 9"/>
+          <p:cNvSpPr txBox="1"/>
+          <p:nvPr/>
+        </p:nvSpPr>
+        <p:spPr>
+          <a:xfrm>
+            <a:off x="502920" y="6217920"/>
+            <a:ext cx="11064240" cy="182880"/>
+          </a:xfrm>
+          <a:prstGeom prst="rect">
+            <a:avLst/>
+          </a:prstGeom>
+          <a:noFill/>
+        </p:spPr>
+        <p:txBody>
+          <a:bodyPr wrap="square" lIns="0" rIns="0" tIns="0" bIns="0" anchor="t">
+            <a:noAutofit/>
+          </a:bodyPr>
+          <a:lstStyle/>
+          <a:p>
+            <a:pPr algn="l">
+              <a:lnSpc>
+                <a:spcPct val="100000"/>
+              </a:lnSpc>
+            </a:pPr>
+            <a:r>
+              <a:rPr sz="919" b="0" lang="ja-JP" altLang="en-US">
+                <a:solidFill>
+                  <a:srgbClr val="666666"/>
+                </a:solidFill>
+                <a:latin typeface="Noto Sans JP"/>
+                <a:ea typeface="Noto Sans JP"/>
+              </a:rPr>
+              <a:t>説明用の模式図。原子の大きさや距離は縮尺どおりではない。</a:t>
             </a:r>
           </a:p>
         </p:txBody>
@@ -7013,7 +7060,7 @@
                 <a:latin typeface="Noto Sans JP"/>
                 <a:ea typeface="Noto Sans JP"/>
               </a:rPr>
-              <a:t>埋もれることにも条件がある</a:t>
+              <a:t>内部にある極性基にも相互作用の相手が必要</a:t>
             </a:r>
           </a:p>
         </p:txBody>
@@ -7101,27 +7148,27 @@
         </p:nvSpPr>
         <p:spPr>
           <a:xfrm>
-            <a:off x="685800" y="1554480"/>
-            <a:ext cx="10808208" cy="441959"/>
-          </a:xfrm>
-          <a:prstGeom prst="rect">
-            <a:avLst/>
-          </a:prstGeom>
-          <a:noFill/>
-        </p:spPr>
-        <p:txBody>
-          <a:bodyPr wrap="square" lIns="0" rIns="0" tIns="0" bIns="0" anchor="t">
-            <a:noAutofit/>
-          </a:bodyPr>
-          <a:lstStyle/>
-          <a:p>
-            <a:pPr algn="l">
-              <a:lnSpc>
-                <a:spcPts val="2688"/>
-              </a:lnSpc>
-            </a:pPr>
-            <a:r>
-              <a:rPr sz="2100" b="0" lang="ja-JP" altLang="en-US">
+            <a:off x="594360" y="1508760"/>
+            <a:ext cx="5760720" cy="685800"/>
+          </a:xfrm>
+          <a:prstGeom prst="rect">
+            <a:avLst/>
+          </a:prstGeom>
+          <a:noFill/>
+        </p:spPr>
+        <p:txBody>
+          <a:bodyPr wrap="square" lIns="0" rIns="0" tIns="0" bIns="0" anchor="t">
+            <a:noAutofit/>
+          </a:bodyPr>
+          <a:lstStyle/>
+          <a:p>
+            <a:pPr algn="l">
+              <a:lnSpc>
+                <a:spcPts val="2304"/>
+              </a:lnSpc>
+            </a:pPr>
+            <a:r>
+              <a:rPr sz="1800" b="0" lang="ja-JP" altLang="en-US">
                 <a:solidFill>
                   <a:srgbClr val="333333"/>
                 </a:solidFill>
@@ -7141,27 +7188,27 @@
         </p:nvSpPr>
         <p:spPr>
           <a:xfrm>
-            <a:off x="685800" y="2097023"/>
-            <a:ext cx="10808208" cy="441959"/>
-          </a:xfrm>
-          <a:prstGeom prst="rect">
-            <a:avLst/>
-          </a:prstGeom>
-          <a:noFill/>
-        </p:spPr>
-        <p:txBody>
-          <a:bodyPr wrap="square" lIns="0" rIns="0" tIns="0" bIns="0" anchor="t">
-            <a:noAutofit/>
-          </a:bodyPr>
-          <a:lstStyle/>
-          <a:p>
-            <a:pPr algn="l">
-              <a:lnSpc>
-                <a:spcPts val="2688"/>
-              </a:lnSpc>
-            </a:pPr>
-            <a:r>
-              <a:rPr sz="2100" b="0" lang="ja-JP" altLang="en-US">
+            <a:off x="594360" y="2295144"/>
+            <a:ext cx="5760720" cy="685800"/>
+          </a:xfrm>
+          <a:prstGeom prst="rect">
+            <a:avLst/>
+          </a:prstGeom>
+          <a:noFill/>
+        </p:spPr>
+        <p:txBody>
+          <a:bodyPr wrap="square" lIns="0" rIns="0" tIns="0" bIns="0" anchor="t">
+            <a:noAutofit/>
+          </a:bodyPr>
+          <a:lstStyle/>
+          <a:p>
+            <a:pPr algn="l">
+              <a:lnSpc>
+                <a:spcPts val="2304"/>
+              </a:lnSpc>
+            </a:pPr>
+            <a:r>
+              <a:rPr sz="1800" b="0" lang="ja-JP" altLang="en-US">
                 <a:solidFill>
                   <a:srgbClr val="333333"/>
                 </a:solidFill>
@@ -7181,27 +7228,27 @@
         </p:nvSpPr>
         <p:spPr>
           <a:xfrm>
-            <a:off x="685800" y="2639567"/>
-            <a:ext cx="10808208" cy="441959"/>
-          </a:xfrm>
-          <a:prstGeom prst="rect">
-            <a:avLst/>
-          </a:prstGeom>
-          <a:noFill/>
-        </p:spPr>
-        <p:txBody>
-          <a:bodyPr wrap="square" lIns="0" rIns="0" tIns="0" bIns="0" anchor="t">
-            <a:noAutofit/>
-          </a:bodyPr>
-          <a:lstStyle/>
-          <a:p>
-            <a:pPr algn="l">
-              <a:lnSpc>
-                <a:spcPts val="2688"/>
-              </a:lnSpc>
-            </a:pPr>
-            <a:r>
-              <a:rPr sz="2100" b="0" lang="ja-JP" altLang="en-US">
+            <a:off x="594360" y="3081527"/>
+            <a:ext cx="5760720" cy="685800"/>
+          </a:xfrm>
+          <a:prstGeom prst="rect">
+            <a:avLst/>
+          </a:prstGeom>
+          <a:noFill/>
+        </p:spPr>
+        <p:txBody>
+          <a:bodyPr wrap="square" lIns="0" rIns="0" tIns="0" bIns="0" anchor="t">
+            <a:noAutofit/>
+          </a:bodyPr>
+          <a:lstStyle/>
+          <a:p>
+            <a:pPr algn="l">
+              <a:lnSpc>
+                <a:spcPts val="2304"/>
+              </a:lnSpc>
+            </a:pPr>
+            <a:r>
+              <a:rPr sz="1800" b="0" lang="ja-JP" altLang="en-US">
                 <a:solidFill>
                   <a:srgbClr val="333333"/>
                 </a:solidFill>
@@ -7221,27 +7268,27 @@
         </p:nvSpPr>
         <p:spPr>
           <a:xfrm>
-            <a:off x="685800" y="3182111"/>
-            <a:ext cx="10808208" cy="783336"/>
-          </a:xfrm>
-          <a:prstGeom prst="rect">
-            <a:avLst/>
-          </a:prstGeom>
-          <a:noFill/>
-        </p:spPr>
-        <p:txBody>
-          <a:bodyPr wrap="square" lIns="0" rIns="0" tIns="0" bIns="0" anchor="t">
-            <a:noAutofit/>
-          </a:bodyPr>
-          <a:lstStyle/>
-          <a:p>
-            <a:pPr algn="l">
-              <a:lnSpc>
-                <a:spcPts val="2688"/>
-              </a:lnSpc>
-            </a:pPr>
-            <a:r>
-              <a:rPr sz="2100" b="0" lang="ja-JP" altLang="en-US">
+            <a:off x="594360" y="3867911"/>
+            <a:ext cx="5760720" cy="978408"/>
+          </a:xfrm>
+          <a:prstGeom prst="rect">
+            <a:avLst/>
+          </a:prstGeom>
+          <a:noFill/>
+        </p:spPr>
+        <p:txBody>
+          <a:bodyPr wrap="square" lIns="0" rIns="0" tIns="0" bIns="0" anchor="t">
+            <a:noAutofit/>
+          </a:bodyPr>
+          <a:lstStyle/>
+          <a:p>
+            <a:pPr algn="l">
+              <a:lnSpc>
+                <a:spcPts val="2304"/>
+              </a:lnSpc>
+            </a:pPr>
+            <a:r>
+              <a:rPr sz="1800" b="0" lang="ja-JP" altLang="en-US">
                 <a:solidFill>
                   <a:srgbClr val="333333"/>
                 </a:solidFill>
@@ -7261,27 +7308,27 @@
         </p:nvSpPr>
         <p:spPr>
           <a:xfrm>
-            <a:off x="685800" y="4066031"/>
-            <a:ext cx="10808208" cy="783336"/>
-          </a:xfrm>
-          <a:prstGeom prst="rect">
-            <a:avLst/>
-          </a:prstGeom>
-          <a:noFill/>
-        </p:spPr>
-        <p:txBody>
-          <a:bodyPr wrap="square" lIns="0" rIns="0" tIns="0" bIns="0" anchor="t">
-            <a:noAutofit/>
-          </a:bodyPr>
-          <a:lstStyle/>
-          <a:p>
-            <a:pPr algn="l">
-              <a:lnSpc>
-                <a:spcPts val="2688"/>
-              </a:lnSpc>
-            </a:pPr>
-            <a:r>
-              <a:rPr sz="2100" b="0" lang="ja-JP" altLang="en-US">
+            <a:off x="594360" y="4946904"/>
+            <a:ext cx="5760720" cy="978408"/>
+          </a:xfrm>
+          <a:prstGeom prst="rect">
+            <a:avLst/>
+          </a:prstGeom>
+          <a:noFill/>
+        </p:spPr>
+        <p:txBody>
+          <a:bodyPr wrap="square" lIns="0" rIns="0" tIns="0" bIns="0" anchor="t">
+            <a:noAutofit/>
+          </a:bodyPr>
+          <a:lstStyle/>
+          <a:p>
+            <a:pPr algn="l">
+              <a:lnSpc>
+                <a:spcPts val="2304"/>
+              </a:lnSpc>
+            </a:pPr>
+            <a:r>
+              <a:rPr sz="1800" b="0" lang="ja-JP" altLang="en-US">
                 <a:solidFill>
                   <a:srgbClr val="333333"/>
                 </a:solidFill>
@@ -7289,6 +7336,71 @@
                 <a:ea typeface="Noto Sans JP"/>
               </a:rPr>
               <a:t>「どこに置くか」は相手の残基・水・脂質との関係で決まる。アミノ酸の分類だけから各残基の位置を一意には決められない。</a:t>
+            </a:r>
+          </a:p>
+        </p:txBody>
+      </p:sp>
+      <p:pic>
+        <p:nvPicPr>
+          <p:cNvPr id="11" name="Picture 10" descr="review_buried.png"/>
+          <p:cNvPicPr>
+            <a:picLocks noChangeAspect="1"/>
+          </p:cNvPicPr>
+          <p:nvPr/>
+        </p:nvPicPr>
+        <p:blipFill>
+          <a:blip r:embed="rId3"/>
+          <a:srcRect/>
+          <a:stretch>
+            <a:fillRect/>
+          </a:stretch>
+        </p:blipFill>
+        <p:spPr>
+          <a:xfrm>
+            <a:off x="6611112" y="2069592"/>
+            <a:ext cx="4956048" cy="3304032"/>
+          </a:xfrm>
+          <a:prstGeom prst="rect">
+            <a:avLst/>
+          </a:prstGeom>
+        </p:spPr>
+      </p:pic>
+      <p:sp>
+        <p:nvSpPr>
+          <p:cNvPr id="12" name="TextBox 11"/>
+          <p:cNvSpPr txBox="1"/>
+          <p:nvPr/>
+        </p:nvSpPr>
+        <p:spPr>
+          <a:xfrm>
+            <a:off x="502920" y="6217920"/>
+            <a:ext cx="11064240" cy="182880"/>
+          </a:xfrm>
+          <a:prstGeom prst="rect">
+            <a:avLst/>
+          </a:prstGeom>
+          <a:noFill/>
+        </p:spPr>
+        <p:txBody>
+          <a:bodyPr wrap="square" lIns="0" rIns="0" tIns="0" bIns="0" anchor="t">
+            <a:noAutofit/>
+          </a:bodyPr>
+          <a:lstStyle/>
+          <a:p>
+            <a:pPr algn="l">
+              <a:lnSpc>
+                <a:spcPct val="100000"/>
+              </a:lnSpc>
+            </a:pPr>
+            <a:r>
+              <a:rPr sz="919" b="0" lang="ja-JP" altLang="en-US">
+                <a:solidFill>
+                  <a:srgbClr val="666666"/>
+                </a:solidFill>
+                <a:latin typeface="Noto Sans JP"/>
+                <a:ea typeface="Noto Sans JP"/>
+              </a:rPr>
+              <a:t>説明用の模式図。原子の大きさや距離は縮尺どおりではない。</a:t>
             </a:r>
           </a:p>
         </p:txBody>
@@ -7482,27 +7594,27 @@
         </p:nvSpPr>
         <p:spPr>
           <a:xfrm>
-            <a:off x="685800" y="1554480"/>
-            <a:ext cx="10808208" cy="441959"/>
-          </a:xfrm>
-          <a:prstGeom prst="rect">
-            <a:avLst/>
-          </a:prstGeom>
-          <a:noFill/>
-        </p:spPr>
-        <p:txBody>
-          <a:bodyPr wrap="square" lIns="0" rIns="0" tIns="0" bIns="0" anchor="t">
-            <a:noAutofit/>
-          </a:bodyPr>
-          <a:lstStyle/>
-          <a:p>
-            <a:pPr algn="l">
-              <a:lnSpc>
-                <a:spcPts val="2688"/>
-              </a:lnSpc>
-            </a:pPr>
-            <a:r>
-              <a:rPr sz="2100" b="0" lang="ja-JP" altLang="en-US">
+            <a:off x="594360" y="1508760"/>
+            <a:ext cx="5760720" cy="685800"/>
+          </a:xfrm>
+          <a:prstGeom prst="rect">
+            <a:avLst/>
+          </a:prstGeom>
+          <a:noFill/>
+        </p:spPr>
+        <p:txBody>
+          <a:bodyPr wrap="square" lIns="0" rIns="0" tIns="0" bIns="0" anchor="t">
+            <a:noAutofit/>
+          </a:bodyPr>
+          <a:lstStyle/>
+          <a:p>
+            <a:pPr algn="l">
+              <a:lnSpc>
+                <a:spcPts val="2304"/>
+              </a:lnSpc>
+            </a:pPr>
+            <a:r>
+              <a:rPr sz="1800" b="0" lang="ja-JP" altLang="en-US">
                 <a:solidFill>
                   <a:srgbClr val="333333"/>
                 </a:solidFill>
@@ -7522,27 +7634,27 @@
         </p:nvSpPr>
         <p:spPr>
           <a:xfrm>
-            <a:off x="685800" y="2097023"/>
-            <a:ext cx="10808208" cy="441959"/>
-          </a:xfrm>
-          <a:prstGeom prst="rect">
-            <a:avLst/>
-          </a:prstGeom>
-          <a:noFill/>
-        </p:spPr>
-        <p:txBody>
-          <a:bodyPr wrap="square" lIns="0" rIns="0" tIns="0" bIns="0" anchor="t">
-            <a:noAutofit/>
-          </a:bodyPr>
-          <a:lstStyle/>
-          <a:p>
-            <a:pPr algn="l">
-              <a:lnSpc>
-                <a:spcPts val="2688"/>
-              </a:lnSpc>
-            </a:pPr>
-            <a:r>
-              <a:rPr sz="2100" b="0" lang="ja-JP" altLang="en-US">
+            <a:off x="594360" y="2295144"/>
+            <a:ext cx="5760720" cy="685800"/>
+          </a:xfrm>
+          <a:prstGeom prst="rect">
+            <a:avLst/>
+          </a:prstGeom>
+          <a:noFill/>
+        </p:spPr>
+        <p:txBody>
+          <a:bodyPr wrap="square" lIns="0" rIns="0" tIns="0" bIns="0" anchor="t">
+            <a:noAutofit/>
+          </a:bodyPr>
+          <a:lstStyle/>
+          <a:p>
+            <a:pPr algn="l">
+              <a:lnSpc>
+                <a:spcPts val="2304"/>
+              </a:lnSpc>
+            </a:pPr>
+            <a:r>
+              <a:rPr sz="1800" b="0" lang="ja-JP" altLang="en-US">
                 <a:solidFill>
                   <a:srgbClr val="333333"/>
                 </a:solidFill>
@@ -7562,27 +7674,27 @@
         </p:nvSpPr>
         <p:spPr>
           <a:xfrm>
-            <a:off x="685800" y="2639567"/>
-            <a:ext cx="10808208" cy="441959"/>
-          </a:xfrm>
-          <a:prstGeom prst="rect">
-            <a:avLst/>
-          </a:prstGeom>
-          <a:noFill/>
-        </p:spPr>
-        <p:txBody>
-          <a:bodyPr wrap="square" lIns="0" rIns="0" tIns="0" bIns="0" anchor="t">
-            <a:noAutofit/>
-          </a:bodyPr>
-          <a:lstStyle/>
-          <a:p>
-            <a:pPr algn="l">
-              <a:lnSpc>
-                <a:spcPts val="2688"/>
-              </a:lnSpc>
-            </a:pPr>
-            <a:r>
-              <a:rPr sz="2100" b="0" lang="ja-JP" altLang="en-US">
+            <a:off x="594360" y="3081527"/>
+            <a:ext cx="5760720" cy="685800"/>
+          </a:xfrm>
+          <a:prstGeom prst="rect">
+            <a:avLst/>
+          </a:prstGeom>
+          <a:noFill/>
+        </p:spPr>
+        <p:txBody>
+          <a:bodyPr wrap="square" lIns="0" rIns="0" tIns="0" bIns="0" anchor="t">
+            <a:noAutofit/>
+          </a:bodyPr>
+          <a:lstStyle/>
+          <a:p>
+            <a:pPr algn="l">
+              <a:lnSpc>
+                <a:spcPts val="2304"/>
+              </a:lnSpc>
+            </a:pPr>
+            <a:r>
+              <a:rPr sz="1800" b="0" lang="ja-JP" altLang="en-US">
                 <a:solidFill>
                   <a:srgbClr val="333333"/>
                 </a:solidFill>
@@ -7602,27 +7714,27 @@
         </p:nvSpPr>
         <p:spPr>
           <a:xfrm>
-            <a:off x="685800" y="3182111"/>
-            <a:ext cx="10808208" cy="783336"/>
-          </a:xfrm>
-          <a:prstGeom prst="rect">
-            <a:avLst/>
-          </a:prstGeom>
-          <a:noFill/>
-        </p:spPr>
-        <p:txBody>
-          <a:bodyPr wrap="square" lIns="0" rIns="0" tIns="0" bIns="0" anchor="t">
-            <a:noAutofit/>
-          </a:bodyPr>
-          <a:lstStyle/>
-          <a:p>
-            <a:pPr algn="l">
-              <a:lnSpc>
-                <a:spcPts val="2688"/>
-              </a:lnSpc>
-            </a:pPr>
-            <a:r>
-              <a:rPr sz="2100" b="0" lang="ja-JP" altLang="en-US">
+            <a:off x="594360" y="3867911"/>
+            <a:ext cx="5760720" cy="685800"/>
+          </a:xfrm>
+          <a:prstGeom prst="rect">
+            <a:avLst/>
+          </a:prstGeom>
+          <a:noFill/>
+        </p:spPr>
+        <p:txBody>
+          <a:bodyPr wrap="square" lIns="0" rIns="0" tIns="0" bIns="0" anchor="t">
+            <a:noAutofit/>
+          </a:bodyPr>
+          <a:lstStyle/>
+          <a:p>
+            <a:pPr algn="l">
+              <a:lnSpc>
+                <a:spcPts val="2304"/>
+              </a:lnSpc>
+            </a:pPr>
+            <a:r>
+              <a:rPr sz="1800" b="0" lang="ja-JP" altLang="en-US">
                 <a:solidFill>
                   <a:srgbClr val="333333"/>
                 </a:solidFill>
@@ -7642,27 +7754,27 @@
         </p:nvSpPr>
         <p:spPr>
           <a:xfrm>
-            <a:off x="685800" y="4066031"/>
-            <a:ext cx="10808208" cy="783336"/>
-          </a:xfrm>
-          <a:prstGeom prst="rect">
-            <a:avLst/>
-          </a:prstGeom>
-          <a:noFill/>
-        </p:spPr>
-        <p:txBody>
-          <a:bodyPr wrap="square" lIns="0" rIns="0" tIns="0" bIns="0" anchor="t">
-            <a:noAutofit/>
-          </a:bodyPr>
-          <a:lstStyle/>
-          <a:p>
-            <a:pPr algn="l">
-              <a:lnSpc>
-                <a:spcPts val="2688"/>
-              </a:lnSpc>
-            </a:pPr>
-            <a:r>
-              <a:rPr sz="2100" b="0" lang="ja-JP" altLang="en-US">
+            <a:off x="594360" y="4654296"/>
+            <a:ext cx="5760720" cy="978408"/>
+          </a:xfrm>
+          <a:prstGeom prst="rect">
+            <a:avLst/>
+          </a:prstGeom>
+          <a:noFill/>
+        </p:spPr>
+        <p:txBody>
+          <a:bodyPr wrap="square" lIns="0" rIns="0" tIns="0" bIns="0" anchor="t">
+            <a:noAutofit/>
+          </a:bodyPr>
+          <a:lstStyle/>
+          <a:p>
+            <a:pPr algn="l">
+              <a:lnSpc>
+                <a:spcPts val="2304"/>
+              </a:lnSpc>
+            </a:pPr>
+            <a:r>
+              <a:rPr sz="1800" b="0" lang="ja-JP" altLang="en-US">
                 <a:solidFill>
                   <a:srgbClr val="333333"/>
                 </a:solidFill>
@@ -7670,6 +7782,71 @@
                 <a:ea typeface="Noto Sans JP"/>
               </a:rPr>
               <a:t>ループはヘリックスやシートをつなぐ部分であり、構造がないという意味ではない。分子の認識や構造変化にも関わる。</a:t>
+            </a:r>
+          </a:p>
+        </p:txBody>
+      </p:sp>
+      <p:pic>
+        <p:nvPicPr>
+          <p:cNvPr id="11" name="Picture 10" descr="review_secondary.png"/>
+          <p:cNvPicPr>
+            <a:picLocks noChangeAspect="1"/>
+          </p:cNvPicPr>
+          <p:nvPr/>
+        </p:nvPicPr>
+        <p:blipFill>
+          <a:blip r:embed="rId3"/>
+          <a:srcRect/>
+          <a:stretch>
+            <a:fillRect/>
+          </a:stretch>
+        </p:blipFill>
+        <p:spPr>
+          <a:xfrm>
+            <a:off x="6611112" y="2069592"/>
+            <a:ext cx="4956048" cy="3304032"/>
+          </a:xfrm>
+          <a:prstGeom prst="rect">
+            <a:avLst/>
+          </a:prstGeom>
+        </p:spPr>
+      </p:pic>
+      <p:sp>
+        <p:nvSpPr>
+          <p:cNvPr id="12" name="TextBox 11"/>
+          <p:cNvSpPr txBox="1"/>
+          <p:nvPr/>
+        </p:nvSpPr>
+        <p:spPr>
+          <a:xfrm>
+            <a:off x="502920" y="6217920"/>
+            <a:ext cx="11064240" cy="182880"/>
+          </a:xfrm>
+          <a:prstGeom prst="rect">
+            <a:avLst/>
+          </a:prstGeom>
+          <a:noFill/>
+        </p:spPr>
+        <p:txBody>
+          <a:bodyPr wrap="square" lIns="0" rIns="0" tIns="0" bIns="0" anchor="t">
+            <a:noAutofit/>
+          </a:bodyPr>
+          <a:lstStyle/>
+          <a:p>
+            <a:pPr algn="l">
+              <a:lnSpc>
+                <a:spcPct val="100000"/>
+              </a:lnSpc>
+            </a:pPr>
+            <a:r>
+              <a:rPr sz="919" b="0" lang="ja-JP" altLang="en-US">
+                <a:solidFill>
+                  <a:srgbClr val="666666"/>
+                </a:solidFill>
+                <a:latin typeface="Noto Sans JP"/>
+                <a:ea typeface="Noto Sans JP"/>
+              </a:rPr>
+              <a:t>説明用の模式図。原子の大きさや距離は縮尺どおりではない。</a:t>
             </a:r>
           </a:p>
         </p:txBody>
@@ -9427,27 +9604,27 @@
         </p:nvSpPr>
         <p:spPr>
           <a:xfrm>
-            <a:off x="685800" y="1554480"/>
-            <a:ext cx="10808208" cy="783336"/>
-          </a:xfrm>
-          <a:prstGeom prst="rect">
-            <a:avLst/>
-          </a:prstGeom>
-          <a:noFill/>
-        </p:spPr>
-        <p:txBody>
-          <a:bodyPr wrap="square" lIns="0" rIns="0" tIns="0" bIns="0" anchor="t">
-            <a:noAutofit/>
-          </a:bodyPr>
-          <a:lstStyle/>
-          <a:p>
-            <a:pPr algn="l">
-              <a:lnSpc>
-                <a:spcPts val="2688"/>
-              </a:lnSpc>
-            </a:pPr>
-            <a:r>
-              <a:rPr sz="2100" b="0" lang="ja-JP" altLang="en-US">
+            <a:off x="594360" y="1508760"/>
+            <a:ext cx="5760720" cy="978408"/>
+          </a:xfrm>
+          <a:prstGeom prst="rect">
+            <a:avLst/>
+          </a:prstGeom>
+          <a:noFill/>
+        </p:spPr>
+        <p:txBody>
+          <a:bodyPr wrap="square" lIns="0" rIns="0" tIns="0" bIns="0" anchor="t">
+            <a:noAutofit/>
+          </a:bodyPr>
+          <a:lstStyle/>
+          <a:p>
+            <a:pPr algn="l">
+              <a:lnSpc>
+                <a:spcPts val="2304"/>
+              </a:lnSpc>
+            </a:pPr>
+            <a:r>
+              <a:rPr sz="1800" b="0" lang="ja-JP" altLang="en-US">
                 <a:solidFill>
                   <a:srgbClr val="333333"/>
                 </a:solidFill>
@@ -9467,27 +9644,27 @@
         </p:nvSpPr>
         <p:spPr>
           <a:xfrm>
-            <a:off x="685800" y="2438400"/>
-            <a:ext cx="10808208" cy="783336"/>
-          </a:xfrm>
-          <a:prstGeom prst="rect">
-            <a:avLst/>
-          </a:prstGeom>
-          <a:noFill/>
-        </p:spPr>
-        <p:txBody>
-          <a:bodyPr wrap="square" lIns="0" rIns="0" tIns="0" bIns="0" anchor="t">
-            <a:noAutofit/>
-          </a:bodyPr>
-          <a:lstStyle/>
-          <a:p>
-            <a:pPr algn="l">
-              <a:lnSpc>
-                <a:spcPts val="2688"/>
-              </a:lnSpc>
-            </a:pPr>
-            <a:r>
-              <a:rPr sz="2100" b="0" lang="ja-JP" altLang="en-US">
+            <a:off x="594360" y="2587752"/>
+            <a:ext cx="5760720" cy="978408"/>
+          </a:xfrm>
+          <a:prstGeom prst="rect">
+            <a:avLst/>
+          </a:prstGeom>
+          <a:noFill/>
+        </p:spPr>
+        <p:txBody>
+          <a:bodyPr wrap="square" lIns="0" rIns="0" tIns="0" bIns="0" anchor="t">
+            <a:noAutofit/>
+          </a:bodyPr>
+          <a:lstStyle/>
+          <a:p>
+            <a:pPr algn="l">
+              <a:lnSpc>
+                <a:spcPts val="2304"/>
+              </a:lnSpc>
+            </a:pPr>
+            <a:r>
+              <a:rPr sz="1800" b="0" lang="ja-JP" altLang="en-US">
                 <a:solidFill>
                   <a:srgbClr val="333333"/>
                 </a:solidFill>
@@ -9507,27 +9684,27 @@
         </p:nvSpPr>
         <p:spPr>
           <a:xfrm>
-            <a:off x="685800" y="3322320"/>
-            <a:ext cx="10808208" cy="783336"/>
-          </a:xfrm>
-          <a:prstGeom prst="rect">
-            <a:avLst/>
-          </a:prstGeom>
-          <a:noFill/>
-        </p:spPr>
-        <p:txBody>
-          <a:bodyPr wrap="square" lIns="0" rIns="0" tIns="0" bIns="0" anchor="t">
-            <a:noAutofit/>
-          </a:bodyPr>
-          <a:lstStyle/>
-          <a:p>
-            <a:pPr algn="l">
-              <a:lnSpc>
-                <a:spcPts val="2688"/>
-              </a:lnSpc>
-            </a:pPr>
-            <a:r>
-              <a:rPr sz="2100" b="0" lang="ja-JP" altLang="en-US">
+            <a:off x="594360" y="3666744"/>
+            <a:ext cx="5760720" cy="685800"/>
+          </a:xfrm>
+          <a:prstGeom prst="rect">
+            <a:avLst/>
+          </a:prstGeom>
+          <a:noFill/>
+        </p:spPr>
+        <p:txBody>
+          <a:bodyPr wrap="square" lIns="0" rIns="0" tIns="0" bIns="0" anchor="t">
+            <a:noAutofit/>
+          </a:bodyPr>
+          <a:lstStyle/>
+          <a:p>
+            <a:pPr algn="l">
+              <a:lnSpc>
+                <a:spcPts val="2304"/>
+              </a:lnSpc>
+            </a:pPr>
+            <a:r>
+              <a:rPr sz="1800" b="0" lang="ja-JP" altLang="en-US">
                 <a:solidFill>
                   <a:srgbClr val="333333"/>
                 </a:solidFill>
@@ -9535,6 +9712,71 @@
                 <a:ea typeface="Noto Sans JP"/>
               </a:rPr>
               <a:t>どちらの二次構造でも、基本となる水素結合は主鎖の C=O と N–H の間にできる。</a:t>
+            </a:r>
+          </a:p>
+        </p:txBody>
+      </p:sp>
+      <p:pic>
+        <p:nvPicPr>
+          <p:cNvPr id="9" name="Picture 8" descr="review_hbond_index.png"/>
+          <p:cNvPicPr>
+            <a:picLocks noChangeAspect="1"/>
+          </p:cNvPicPr>
+          <p:nvPr/>
+        </p:nvPicPr>
+        <p:blipFill>
+          <a:blip r:embed="rId3"/>
+          <a:srcRect/>
+          <a:stretch>
+            <a:fillRect/>
+          </a:stretch>
+        </p:blipFill>
+        <p:spPr>
+          <a:xfrm>
+            <a:off x="6611112" y="2069592"/>
+            <a:ext cx="4956048" cy="3304032"/>
+          </a:xfrm>
+          <a:prstGeom prst="rect">
+            <a:avLst/>
+          </a:prstGeom>
+        </p:spPr>
+      </p:pic>
+      <p:sp>
+        <p:nvSpPr>
+          <p:cNvPr id="10" name="TextBox 9"/>
+          <p:cNvSpPr txBox="1"/>
+          <p:nvPr/>
+        </p:nvSpPr>
+        <p:spPr>
+          <a:xfrm>
+            <a:off x="502920" y="6217920"/>
+            <a:ext cx="11064240" cy="182880"/>
+          </a:xfrm>
+          <a:prstGeom prst="rect">
+            <a:avLst/>
+          </a:prstGeom>
+          <a:noFill/>
+        </p:spPr>
+        <p:txBody>
+          <a:bodyPr wrap="square" lIns="0" rIns="0" tIns="0" bIns="0" anchor="t">
+            <a:noAutofit/>
+          </a:bodyPr>
+          <a:lstStyle/>
+          <a:p>
+            <a:pPr algn="l">
+              <a:lnSpc>
+                <a:spcPct val="100000"/>
+              </a:lnSpc>
+            </a:pPr>
+            <a:r>
+              <a:rPr sz="919" b="0" lang="ja-JP" altLang="en-US">
+                <a:solidFill>
+                  <a:srgbClr val="666666"/>
+                </a:solidFill>
+                <a:latin typeface="Noto Sans JP"/>
+                <a:ea typeface="Noto Sans JP"/>
+              </a:rPr>
+              <a:t>説明用の模式図。原子の大きさや距離は縮尺どおりではない。</a:t>
             </a:r>
           </a:p>
         </p:txBody>
@@ -9640,7 +9882,7 @@
                 <a:latin typeface="Noto Sans JP"/>
                 <a:ea typeface="Noto Sans JP"/>
               </a:rPr>
-              <a:t>主鎖の形を番号で説明できる</a:t>
+              <a:t>残基番号と空間的な距離は異なる</a:t>
             </a:r>
           </a:p>
         </p:txBody>
@@ -9728,27 +9970,27 @@
         </p:nvSpPr>
         <p:spPr>
           <a:xfrm>
-            <a:off x="685800" y="1554480"/>
-            <a:ext cx="10808208" cy="441959"/>
-          </a:xfrm>
-          <a:prstGeom prst="rect">
-            <a:avLst/>
-          </a:prstGeom>
-          <a:noFill/>
-        </p:spPr>
-        <p:txBody>
-          <a:bodyPr wrap="square" lIns="0" rIns="0" tIns="0" bIns="0" anchor="t">
-            <a:noAutofit/>
-          </a:bodyPr>
-          <a:lstStyle/>
-          <a:p>
-            <a:pPr algn="l">
-              <a:lnSpc>
-                <a:spcPts val="2688"/>
-              </a:lnSpc>
-            </a:pPr>
-            <a:r>
-              <a:rPr sz="2100" b="0" lang="ja-JP" altLang="en-US">
+            <a:off x="594360" y="1508760"/>
+            <a:ext cx="5760720" cy="685800"/>
+          </a:xfrm>
+          <a:prstGeom prst="rect">
+            <a:avLst/>
+          </a:prstGeom>
+          <a:noFill/>
+        </p:spPr>
+        <p:txBody>
+          <a:bodyPr wrap="square" lIns="0" rIns="0" tIns="0" bIns="0" anchor="t">
+            <a:noAutofit/>
+          </a:bodyPr>
+          <a:lstStyle/>
+          <a:p>
+            <a:pPr algn="l">
+              <a:lnSpc>
+                <a:spcPts val="2304"/>
+              </a:lnSpc>
+            </a:pPr>
+            <a:r>
+              <a:rPr sz="1800" b="0" lang="ja-JP" altLang="en-US">
                 <a:solidFill>
                   <a:srgbClr val="333333"/>
                 </a:solidFill>
@@ -9768,34 +10010,34 @@
         </p:nvSpPr>
         <p:spPr>
           <a:xfrm>
-            <a:off x="685800" y="2097023"/>
-            <a:ext cx="10808208" cy="441959"/>
-          </a:xfrm>
-          <a:prstGeom prst="rect">
-            <a:avLst/>
-          </a:prstGeom>
-          <a:noFill/>
-        </p:spPr>
-        <p:txBody>
-          <a:bodyPr wrap="square" lIns="0" rIns="0" tIns="0" bIns="0" anchor="t">
-            <a:noAutofit/>
-          </a:bodyPr>
-          <a:lstStyle/>
-          <a:p>
-            <a:pPr algn="l">
-              <a:lnSpc>
-                <a:spcPts val="2688"/>
-              </a:lnSpc>
-            </a:pPr>
-            <a:r>
-              <a:rPr sz="2100" b="0" lang="ja-JP" altLang="en-US">
+            <a:off x="594360" y="2295144"/>
+            <a:ext cx="5760720" cy="685800"/>
+          </a:xfrm>
+          <a:prstGeom prst="rect">
+            <a:avLst/>
+          </a:prstGeom>
+          <a:noFill/>
+        </p:spPr>
+        <p:txBody>
+          <a:bodyPr wrap="square" lIns="0" rIns="0" tIns="0" bIns="0" anchor="t">
+            <a:noAutofit/>
+          </a:bodyPr>
+          <a:lstStyle/>
+          <a:p>
+            <a:pPr algn="l">
+              <a:lnSpc>
+                <a:spcPts val="2304"/>
+              </a:lnSpc>
+            </a:pPr>
+            <a:r>
+              <a:rPr sz="1800" b="0" lang="ja-JP" altLang="en-US">
                 <a:solidFill>
                   <a:srgbClr val="333333"/>
                 </a:solidFill>
                 <a:latin typeface="Noto Sans JP"/>
                 <a:ea typeface="Noto Sans JP"/>
               </a:rPr>
-              <a:t>逆平行 β シート：隣の矢印は左向き。</a:t>
+              <a:t>逆平行 β シート：隣り合うストランドの N→C の向きが逆。</a:t>
             </a:r>
           </a:p>
         </p:txBody>
@@ -9808,27 +10050,27 @@
         </p:nvSpPr>
         <p:spPr>
           <a:xfrm>
-            <a:off x="685800" y="2639567"/>
-            <a:ext cx="10808208" cy="441959"/>
-          </a:xfrm>
-          <a:prstGeom prst="rect">
-            <a:avLst/>
-          </a:prstGeom>
-          <a:noFill/>
-        </p:spPr>
-        <p:txBody>
-          <a:bodyPr wrap="square" lIns="0" rIns="0" tIns="0" bIns="0" anchor="t">
-            <a:noAutofit/>
-          </a:bodyPr>
-          <a:lstStyle/>
-          <a:p>
-            <a:pPr algn="l">
-              <a:lnSpc>
-                <a:spcPts val="2688"/>
-              </a:lnSpc>
-            </a:pPr>
-            <a:r>
-              <a:rPr sz="2100" b="0" lang="ja-JP" altLang="en-US">
+            <a:off x="594360" y="3081527"/>
+            <a:ext cx="5760720" cy="685800"/>
+          </a:xfrm>
+          <a:prstGeom prst="rect">
+            <a:avLst/>
+          </a:prstGeom>
+          <a:noFill/>
+        </p:spPr>
+        <p:txBody>
+          <a:bodyPr wrap="square" lIns="0" rIns="0" tIns="0" bIns="0" anchor="t">
+            <a:noAutofit/>
+          </a:bodyPr>
+          <a:lstStyle/>
+          <a:p>
+            <a:pPr algn="l">
+              <a:lnSpc>
+                <a:spcPts val="2304"/>
+              </a:lnSpc>
+            </a:pPr>
+            <a:r>
+              <a:rPr sz="1800" b="0" lang="ja-JP" altLang="en-US">
                 <a:solidFill>
                   <a:srgbClr val="333333"/>
                 </a:solidFill>
@@ -9848,27 +10090,27 @@
         </p:nvSpPr>
         <p:spPr>
           <a:xfrm>
-            <a:off x="685800" y="3182111"/>
-            <a:ext cx="10808208" cy="783336"/>
-          </a:xfrm>
-          <a:prstGeom prst="rect">
-            <a:avLst/>
-          </a:prstGeom>
-          <a:noFill/>
-        </p:spPr>
-        <p:txBody>
-          <a:bodyPr wrap="square" lIns="0" rIns="0" tIns="0" bIns="0" anchor="t">
-            <a:noAutofit/>
-          </a:bodyPr>
-          <a:lstStyle/>
-          <a:p>
-            <a:pPr algn="l">
-              <a:lnSpc>
-                <a:spcPts val="2688"/>
-              </a:lnSpc>
-            </a:pPr>
-            <a:r>
-              <a:rPr sz="2100" b="0" lang="ja-JP" altLang="en-US">
+            <a:off x="594360" y="3867911"/>
+            <a:ext cx="5760720" cy="978408"/>
+          </a:xfrm>
+          <a:prstGeom prst="rect">
+            <a:avLst/>
+          </a:prstGeom>
+          <a:noFill/>
+        </p:spPr>
+        <p:txBody>
+          <a:bodyPr wrap="square" lIns="0" rIns="0" tIns="0" bIns="0" anchor="t">
+            <a:noAutofit/>
+          </a:bodyPr>
+          <a:lstStyle/>
+          <a:p>
+            <a:pPr algn="l">
+              <a:lnSpc>
+                <a:spcPts val="2304"/>
+              </a:lnSpc>
+            </a:pPr>
+            <a:r>
+              <a:rPr sz="1800" b="0" lang="ja-JP" altLang="en-US">
                 <a:solidFill>
                   <a:srgbClr val="333333"/>
                 </a:solidFill>
@@ -9888,27 +10130,27 @@
         </p:nvSpPr>
         <p:spPr>
           <a:xfrm>
-            <a:off x="685800" y="4066031"/>
-            <a:ext cx="10808208" cy="783336"/>
-          </a:xfrm>
-          <a:prstGeom prst="rect">
-            <a:avLst/>
-          </a:prstGeom>
-          <a:noFill/>
-        </p:spPr>
-        <p:txBody>
-          <a:bodyPr wrap="square" lIns="0" rIns="0" tIns="0" bIns="0" anchor="t">
-            <a:noAutofit/>
-          </a:bodyPr>
-          <a:lstStyle/>
-          <a:p>
-            <a:pPr algn="l">
-              <a:lnSpc>
-                <a:spcPts val="2688"/>
-              </a:lnSpc>
-            </a:pPr>
-            <a:r>
-              <a:rPr sz="2100" b="0" lang="ja-JP" altLang="en-US">
+            <a:off x="594360" y="4946904"/>
+            <a:ext cx="5760720" cy="978408"/>
+          </a:xfrm>
+          <a:prstGeom prst="rect">
+            <a:avLst/>
+          </a:prstGeom>
+          <a:noFill/>
+        </p:spPr>
+        <p:txBody>
+          <a:bodyPr wrap="square" lIns="0" rIns="0" tIns="0" bIns="0" anchor="t">
+            <a:noAutofit/>
+          </a:bodyPr>
+          <a:lstStyle/>
+          <a:p>
+            <a:pPr algn="l">
+              <a:lnSpc>
+                <a:spcPts val="2304"/>
+              </a:lnSpc>
+            </a:pPr>
+            <a:r>
+              <a:rPr sz="1800" b="0" lang="ja-JP" altLang="en-US">
                 <a:solidFill>
                   <a:srgbClr val="333333"/>
                 </a:solidFill>
@@ -9916,6 +10158,71 @@
                 <a:ea typeface="Noto Sans JP"/>
               </a:rPr>
               <a:t>β シートの矢印は各ストランドの N→C の向き。平行・逆平行は隣同士の矢印で判断し、紙面の上下や左右では決まらない。</a:t>
+            </a:r>
+          </a:p>
+        </p:txBody>
+      </p:sp>
+      <p:pic>
+        <p:nvPicPr>
+          <p:cNvPr id="11" name="Picture 10" descr="review_direction.png"/>
+          <p:cNvPicPr>
+            <a:picLocks noChangeAspect="1"/>
+          </p:cNvPicPr>
+          <p:nvPr/>
+        </p:nvPicPr>
+        <p:blipFill>
+          <a:blip r:embed="rId3"/>
+          <a:srcRect/>
+          <a:stretch>
+            <a:fillRect/>
+          </a:stretch>
+        </p:blipFill>
+        <p:spPr>
+          <a:xfrm>
+            <a:off x="6611112" y="2069592"/>
+            <a:ext cx="4956048" cy="3304032"/>
+          </a:xfrm>
+          <a:prstGeom prst="rect">
+            <a:avLst/>
+          </a:prstGeom>
+        </p:spPr>
+      </p:pic>
+      <p:sp>
+        <p:nvSpPr>
+          <p:cNvPr id="12" name="TextBox 11"/>
+          <p:cNvSpPr txBox="1"/>
+          <p:nvPr/>
+        </p:nvSpPr>
+        <p:spPr>
+          <a:xfrm>
+            <a:off x="502920" y="6217920"/>
+            <a:ext cx="11064240" cy="182880"/>
+          </a:xfrm>
+          <a:prstGeom prst="rect">
+            <a:avLst/>
+          </a:prstGeom>
+          <a:noFill/>
+        </p:spPr>
+        <p:txBody>
+          <a:bodyPr wrap="square" lIns="0" rIns="0" tIns="0" bIns="0" anchor="t">
+            <a:noAutofit/>
+          </a:bodyPr>
+          <a:lstStyle/>
+          <a:p>
+            <a:pPr algn="l">
+              <a:lnSpc>
+                <a:spcPct val="100000"/>
+              </a:lnSpc>
+            </a:pPr>
+            <a:r>
+              <a:rPr sz="919" b="0" lang="ja-JP" altLang="en-US">
+                <a:solidFill>
+                  <a:srgbClr val="666666"/>
+                </a:solidFill>
+                <a:latin typeface="Noto Sans JP"/>
+                <a:ea typeface="Noto Sans JP"/>
+              </a:rPr>
+              <a:t>説明用の模式図。原子の大きさや距離は縮尺どおりではない。</a:t>
             </a:r>
           </a:p>
         </p:txBody>
@@ -10467,7 +10774,7 @@
                 <a:latin typeface="Noto Sans JP"/>
                 <a:ea typeface="Noto Sans JP"/>
               </a:rPr>
-              <a:t>配列が折りたたまれて立体構造になる</a:t>
+              <a:t>アミノ酸の鎖が折りたたまれて立体構造になる</a:t>
             </a:r>
           </a:p>
         </p:txBody>
@@ -10873,7 +11180,7 @@
                 <a:latin typeface="Noto Sans JP"/>
                 <a:ea typeface="Noto Sans JP"/>
               </a:rPr>
-              <a:t>01 構造を何で表すか</a:t>
+              <a:t>構造の表現</a:t>
             </a:r>
           </a:p>
         </p:txBody>
@@ -10913,7 +11220,7 @@
                 <a:latin typeface="Noto Sans JP"/>
                 <a:ea typeface="Noto Sans JP"/>
               </a:rPr>
-              <a:t>全原子・主鎖・Cαは異なる解像度</a:t>
+              <a:t>全原子・主鎖・Cαで残る情報が異なる</a:t>
             </a:r>
           </a:p>
         </p:txBody>
@@ -10995,14 +11302,14 @@
       </p:sp>
       <p:pic>
         <p:nvPicPr>
-          <p:cNvPr id="6" name="Picture 5" descr="nmr.png"/>
+          <p:cNvPr id="6" name="Picture 5" descr="review_representation.png"/>
           <p:cNvPicPr>
             <a:picLocks noChangeAspect="1"/>
           </p:cNvPicPr>
           <p:nvPr/>
         </p:nvPicPr>
         <p:blipFill>
-          <a:blip r:embed="rId3"/>
+          <a:blip r:embed="rId5"/>
           <a:srcRect/>
           <a:stretch>
             <a:fillRect/>
@@ -11010,8 +11317,8 @@
         </p:blipFill>
         <p:spPr>
           <a:xfrm>
-            <a:off x="6872008" y="1389888"/>
-            <a:ext cx="4050207" cy="4389120"/>
+            <a:off x="729996" y="1399032"/>
+            <a:ext cx="10728960" cy="2816352"/>
           </a:xfrm>
           <a:prstGeom prst="rect">
             <a:avLst/>
@@ -11026,34 +11333,34 @@
         </p:nvSpPr>
         <p:spPr>
           <a:xfrm>
-            <a:off x="594360" y="1723643"/>
-            <a:ext cx="5349240" cy="938784"/>
-          </a:xfrm>
-          <a:prstGeom prst="rect">
-            <a:avLst/>
-          </a:prstGeom>
-          <a:noFill/>
-        </p:spPr>
-        <p:txBody>
-          <a:bodyPr wrap="square" lIns="0" rIns="0" tIns="0" bIns="0" anchor="t">
-            <a:noAutofit/>
-          </a:bodyPr>
-          <a:lstStyle/>
-          <a:p>
-            <a:pPr algn="l">
-              <a:lnSpc>
-                <a:spcPts val="2368"/>
-              </a:lnSpc>
-            </a:pPr>
-            <a:r>
-              <a:rPr sz="1600" b="0" lang="ja-JP" altLang="en-US">
+            <a:off x="594360" y="4416552"/>
+            <a:ext cx="5349240" cy="783336"/>
+          </a:xfrm>
+          <a:prstGeom prst="rect">
+            <a:avLst/>
+          </a:prstGeom>
+          <a:noFill/>
+        </p:spPr>
+        <p:txBody>
+          <a:bodyPr wrap="square" lIns="0" rIns="0" tIns="0" bIns="0" anchor="t">
+            <a:noAutofit/>
+          </a:bodyPr>
+          <a:lstStyle/>
+          <a:p>
+            <a:pPr algn="l">
+              <a:lnSpc>
+                <a:spcPts val="1792"/>
+              </a:lnSpc>
+            </a:pPr>
+            <a:r>
+              <a:rPr sz="1400" b="0" lang="ja-JP" altLang="en-US">
                 <a:solidFill>
                   <a:srgbClr val="333333"/>
                 </a:solidFill>
                 <a:latin typeface="Noto Sans JP"/>
                 <a:ea typeface="Noto Sans JP"/>
               </a:rPr>
-              <a:t>全原子は側鎖の向きや衝突まで評価できますが、水素の付加や命名の違いを処理する必要があります。主鎖N–Cα–C–Oはペプチド面の向きも残します。</a:t>
+              <a:t>全原子では側鎖の向きや原子の衝突まで評価できる。ただし、このPDBには水素原子が収録されていない。必要に応じて水素を付加し、原子名も対応させる。</a:t>
             </a:r>
           </a:p>
         </p:txBody>
@@ -11066,102 +11373,416 @@
         </p:nvSpPr>
         <p:spPr>
           <a:xfrm>
-            <a:off x="594360" y="2772155"/>
-            <a:ext cx="5349240" cy="938784"/>
-          </a:xfrm>
-          <a:prstGeom prst="rect">
-            <a:avLst/>
-          </a:prstGeom>
-          <a:noFill/>
-        </p:spPr>
-        <p:txBody>
-          <a:bodyPr wrap="square" lIns="0" rIns="0" tIns="0" bIns="0" anchor="t">
-            <a:noAutofit/>
-          </a:bodyPr>
-          <a:lstStyle/>
-          <a:p>
-            <a:pPr algn="l">
-              <a:lnSpc>
-                <a:spcPts val="2368"/>
-              </a:lnSpc>
-            </a:pPr>
-            <a:r>
-              <a:rPr sz="1600" b="0" lang="ja-JP" altLang="en-US">
+            <a:off x="6217920" y="4416552"/>
+            <a:ext cx="5349240" cy="1010920"/>
+          </a:xfrm>
+          <a:prstGeom prst="rect">
+            <a:avLst/>
+          </a:prstGeom>
+          <a:noFill/>
+        </p:spPr>
+        <p:txBody>
+          <a:bodyPr wrap="square" lIns="0" rIns="0" tIns="0" bIns="0" anchor="t">
+            <a:noAutofit/>
+          </a:bodyPr>
+          <a:lstStyle/>
+          <a:p>
+            <a:pPr algn="l">
+              <a:lnSpc>
+                <a:spcPts val="1792"/>
+              </a:lnSpc>
+            </a:pPr>
+            <a:r>
+              <a:rPr sz="1400" b="0" lang="ja-JP" altLang="en-US">
                 <a:solidFill>
                   <a:srgbClr val="333333"/>
                 </a:solidFill>
                 <a:latin typeface="Noto Sans JP"/>
                 <a:ea typeface="Noto Sans JP"/>
               </a:rPr>
-              <a:t>Cαだけなら原子対応が簡単で高速です。一方、同じCα配置から複数の側鎖配置が生じ、ペプチド面や水素結合を一意には決められません。</a:t>
-            </a:r>
-          </a:p>
-        </p:txBody>
-      </p:sp>
-      <p:sp>
-        <p:nvSpPr>
-          <p:cNvPr id="9" name="TextBox 8"/>
-          <p:cNvSpPr txBox="1"/>
-          <p:nvPr/>
-        </p:nvSpPr>
-        <p:spPr>
-          <a:xfrm>
-            <a:off x="594360" y="3820667"/>
-            <a:ext cx="5349240" cy="938784"/>
-          </a:xfrm>
-          <a:prstGeom prst="rect">
-            <a:avLst/>
-          </a:prstGeom>
-          <a:noFill/>
-        </p:spPr>
-        <p:txBody>
-          <a:bodyPr wrap="square" lIns="0" rIns="0" tIns="0" bIns="0" anchor="t">
-            <a:noAutofit/>
-          </a:bodyPr>
-          <a:lstStyle/>
-          <a:p>
-            <a:pPr algn="l">
-              <a:lnSpc>
-                <a:spcPts val="2368"/>
-              </a:lnSpc>
-            </a:pPr>
-            <a:r>
-              <a:rPr sz="1600" b="0" lang="ja-JP" altLang="en-US">
-                <a:solidFill>
-                  <a:srgbClr val="333333"/>
-                </a:solidFill>
-                <a:latin typeface="Noto Sans JP"/>
-                <a:ea typeface="Noto Sans JP"/>
-              </a:rPr>
-              <a:t>表示で省いた原子が、分子から消えたわけではありません。Cαの図で分かる全体の形と、全原子で確かめる側鎖の配置を区別します。</a:t>
-            </a:r>
-          </a:p>
-        </p:txBody>
-      </p:sp>
-      <p:pic>
-        <p:nvPicPr>
-          <p:cNvPr id="10" name="Picture 9" descr="d_{ij}=\|x_i-x_j\|_2,\qquad 1\ {\rm nm}=10\ {\mathring{\mathrm{A}}}"/>
-          <p:cNvPicPr>
-            <a:picLocks noChangeAspect="1"/>
-          </p:cNvPicPr>
-          <p:nvPr/>
-        </p:nvPicPr>
-        <p:blipFill>
-          <a:blip r:embed="rId4"/>
-          <a:stretch>
-            <a:fillRect/>
-          </a:stretch>
-        </p:blipFill>
-        <p:spPr>
-          <a:xfrm>
-            <a:off x="1369911" y="5323707"/>
-            <a:ext cx="3798136" cy="334529"/>
-          </a:xfrm>
-          <a:prstGeom prst="rect">
-            <a:avLst/>
-          </a:prstGeom>
-        </p:spPr>
-      </p:pic>
+              <a:t>主鎖 N–Cα–C–O はペプチド面の向きを残す。Cαだけなら対応を取りやすいが、側鎖の配置や水素結合は一意に決まらない。 図は1UBQの残基23–27を同じ向きで表示したもの。表示から省いた原子が、分子から消えたわけではない。</a:t>
+            </a:r>
+          </a:p>
+        </p:txBody>
+      </p:sp>
+      <mc:AlternateContent xmlns:mc="http://schemas.openxmlformats.org/markup-compatibility/2006">
+        <mc:Choice xmlns:a14="http://schemas.microsoft.com/office/drawing/2010/main" Requires="a14">
+          <p:sp>
+            <p:nvSpPr>
+              <p:cNvPr id="9" name="TextBox 8"/>
+              <p:cNvSpPr txBox="1"/>
+              <p:nvPr/>
+            </p:nvSpPr>
+            <p:spPr>
+              <a:xfrm>
+                <a:off x="457200" y="5687568"/>
+                <a:ext cx="11277295" cy="365760"/>
+              </a:xfrm>
+              <a:prstGeom prst="rect">
+                <a:avLst/>
+              </a:prstGeom>
+              <a:noFill/>
+            </p:spPr>
+            <p:txBody>
+              <a:bodyPr wrap="none" lIns="0" rIns="0" tIns="0" bIns="0" anchor="ctr">
+                <a:noAutofit/>
+              </a:bodyPr>
+              <a:lstStyle/>
+              <a:p>
+                <a:pPr algn="ctr"/>
+                <a14:m>
+                  <m:oMathPara xmlns:m="http://schemas.openxmlformats.org/officeDocument/2006/math">
+                    <m:oMathParaPr>
+                      <m:jc m:val="center"/>
+                    </m:oMathParaPr>
+                    <m:oMath>
+                      <m:box>
+                        <m:e>
+                          <m:sSub>
+                            <m:e>
+                              <m:r>
+                                <m:rPr/>
+                                <a:rPr lang="en-US" sz="1900" i="1">
+                                  <a:solidFill>
+                                    <a:srgbClr val="1A1A1A"/>
+                                  </a:solidFill>
+                                  <a:latin typeface="Cambria Math" panose="02040503050406030204" pitchFamily="18" charset="0"/>
+                                  <a:ea typeface="Cambria Math"/>
+                                </a:rPr>
+                                <m:t>d</m:t>
+                              </m:r>
+                            </m:e>
+                            <m:sub>
+                              <m:box>
+                                <m:e>
+                                  <m:r>
+                                    <m:rPr/>
+                                    <a:rPr lang="en-US" sz="1900" i="1">
+                                      <a:solidFill>
+                                        <a:srgbClr val="1A1A1A"/>
+                                      </a:solidFill>
+                                      <a:latin typeface="Cambria Math" panose="02040503050406030204" pitchFamily="18" charset="0"/>
+                                      <a:ea typeface="Cambria Math"/>
+                                    </a:rPr>
+                                    <m:t>i</m:t>
+                                  </m:r>
+                                  <m:r>
+                                    <m:rPr/>
+                                    <a:rPr lang="en-US" sz="1900" i="1">
+                                      <a:solidFill>
+                                        <a:srgbClr val="1A1A1A"/>
+                                      </a:solidFill>
+                                      <a:latin typeface="Cambria Math" panose="02040503050406030204" pitchFamily="18" charset="0"/>
+                                      <a:ea typeface="Cambria Math"/>
+                                    </a:rPr>
+                                    <m:t>j</m:t>
+                                  </m:r>
+                                </m:e>
+                              </m:box>
+                            </m:sub>
+                          </m:sSub>
+                          <m:r>
+                            <m:rPr>
+                              <m:sty m:val="p"/>
+                            </m:rPr>
+                            <a:rPr lang="en-US" sz="1900" i="0">
+                              <a:solidFill>
+                                <a:srgbClr val="1A1A1A"/>
+                              </a:solidFill>
+                              <a:latin typeface="Cambria Math" panose="02040503050406030204" pitchFamily="18" charset="0"/>
+                              <a:ea typeface="Cambria Math"/>
+                            </a:rPr>
+                            <m:t>=</m:t>
+                          </m:r>
+                          <m:r>
+                            <m:rPr>
+                              <m:sty m:val="p"/>
+                            </m:rPr>
+                            <a:rPr lang="en-US" sz="1900" i="0">
+                              <a:solidFill>
+                                <a:srgbClr val="1A1A1A"/>
+                              </a:solidFill>
+                              <a:latin typeface="Cambria Math" panose="02040503050406030204" pitchFamily="18" charset="0"/>
+                              <a:ea typeface="Cambria Math"/>
+                            </a:rPr>
+                            <m:t>‖</m:t>
+                          </m:r>
+                          <m:sSub>
+                            <m:e>
+                              <m:r>
+                                <m:rPr/>
+                                <a:rPr lang="en-US" sz="1900" i="1">
+                                  <a:solidFill>
+                                    <a:srgbClr val="1A1A1A"/>
+                                  </a:solidFill>
+                                  <a:latin typeface="Cambria Math" panose="02040503050406030204" pitchFamily="18" charset="0"/>
+                                  <a:ea typeface="Cambria Math"/>
+                                </a:rPr>
+                                <m:t>x</m:t>
+                              </m:r>
+                            </m:e>
+                            <m:sub>
+                              <m:r>
+                                <m:rPr/>
+                                <a:rPr lang="en-US" sz="1900" i="1">
+                                  <a:solidFill>
+                                    <a:srgbClr val="1A1A1A"/>
+                                  </a:solidFill>
+                                  <a:latin typeface="Cambria Math" panose="02040503050406030204" pitchFamily="18" charset="0"/>
+                                  <a:ea typeface="Cambria Math"/>
+                                </a:rPr>
+                                <m:t>i</m:t>
+                              </m:r>
+                            </m:sub>
+                          </m:sSub>
+                          <m:r>
+                            <m:rPr>
+                              <m:sty m:val="p"/>
+                            </m:rPr>
+                            <a:rPr lang="en-US" sz="1900" i="0">
+                              <a:solidFill>
+                                <a:srgbClr val="1A1A1A"/>
+                              </a:solidFill>
+                              <a:latin typeface="Cambria Math" panose="02040503050406030204" pitchFamily="18" charset="0"/>
+                              <a:ea typeface="Cambria Math"/>
+                            </a:rPr>
+                            <m:t>−</m:t>
+                          </m:r>
+                          <m:sSub>
+                            <m:e>
+                              <m:r>
+                                <m:rPr/>
+                                <a:rPr lang="en-US" sz="1900" i="1">
+                                  <a:solidFill>
+                                    <a:srgbClr val="1A1A1A"/>
+                                  </a:solidFill>
+                                  <a:latin typeface="Cambria Math" panose="02040503050406030204" pitchFamily="18" charset="0"/>
+                                  <a:ea typeface="Cambria Math"/>
+                                </a:rPr>
+                                <m:t>x</m:t>
+                              </m:r>
+                            </m:e>
+                            <m:sub>
+                              <m:r>
+                                <m:rPr/>
+                                <a:rPr lang="en-US" sz="1900" i="1">
+                                  <a:solidFill>
+                                    <a:srgbClr val="1A1A1A"/>
+                                  </a:solidFill>
+                                  <a:latin typeface="Cambria Math" panose="02040503050406030204" pitchFamily="18" charset="0"/>
+                                  <a:ea typeface="Cambria Math"/>
+                                </a:rPr>
+                                <m:t>j</m:t>
+                              </m:r>
+                            </m:sub>
+                          </m:sSub>
+                          <m:sSub>
+                            <m:e>
+                              <m:r>
+                                <m:rPr>
+                                  <m:sty m:val="p"/>
+                                </m:rPr>
+                                <a:rPr lang="en-US" sz="1900" i="0">
+                                  <a:solidFill>
+                                    <a:srgbClr val="1A1A1A"/>
+                                  </a:solidFill>
+                                  <a:latin typeface="Cambria Math" panose="02040503050406030204" pitchFamily="18" charset="0"/>
+                                  <a:ea typeface="Cambria Math"/>
+                                </a:rPr>
+                                <m:t>‖</m:t>
+                              </m:r>
+                            </m:e>
+                            <m:sub>
+                              <m:r>
+                                <m:rPr>
+                                  <m:sty m:val="p"/>
+                                </m:rPr>
+                                <a:rPr lang="en-US" sz="1900" i="0">
+                                  <a:solidFill>
+                                    <a:srgbClr val="1A1A1A"/>
+                                  </a:solidFill>
+                                  <a:latin typeface="Cambria Math" panose="02040503050406030204" pitchFamily="18" charset="0"/>
+                                  <a:ea typeface="Cambria Math"/>
+                                </a:rPr>
+                                <m:t>2</m:t>
+                              </m:r>
+                            </m:sub>
+                          </m:sSub>
+                          <m:r>
+                            <m:rPr>
+                              <m:sty m:val="p"/>
+                            </m:rPr>
+                            <a:rPr lang="en-US" sz="1900" i="0">
+                              <a:solidFill>
+                                <a:srgbClr val="1A1A1A"/>
+                              </a:solidFill>
+                              <a:latin typeface="Cambria Math" panose="02040503050406030204" pitchFamily="18" charset="0"/>
+                              <a:ea typeface="Cambria Math"/>
+                            </a:rPr>
+                            <m:t>,</m:t>
+                          </m:r>
+                          <m:r>
+                            <m:rPr>
+                              <m:sty m:val="p"/>
+                            </m:rPr>
+                            <a:rPr lang="en-US" sz="1900" i="0">
+                              <a:solidFill>
+                                <a:srgbClr val="1A1A1A"/>
+                              </a:solidFill>
+                              <a:latin typeface="Cambria Math" panose="02040503050406030204" pitchFamily="18" charset="0"/>
+                              <a:ea typeface="Cambria Math"/>
+                            </a:rPr>
+                            <m:t> </m:t>
+                          </m:r>
+                          <m:r>
+                            <m:rPr>
+                              <m:sty m:val="p"/>
+                            </m:rPr>
+                            <a:rPr lang="en-US" sz="1900" i="0">
+                              <a:solidFill>
+                                <a:srgbClr val="1A1A1A"/>
+                              </a:solidFill>
+                              <a:latin typeface="Cambria Math" panose="02040503050406030204" pitchFamily="18" charset="0"/>
+                              <a:ea typeface="Cambria Math"/>
+                            </a:rPr>
+                            <m:t>1</m:t>
+                          </m:r>
+                          <m:r>
+                            <m:rPr>
+                              <m:sty m:val="p"/>
+                            </m:rPr>
+                            <a:rPr lang="en-US" sz="1900" i="0">
+                              <a:solidFill>
+                                <a:srgbClr val="1A1A1A"/>
+                              </a:solidFill>
+                              <a:latin typeface="Cambria Math" panose="02040503050406030204" pitchFamily="18" charset="0"/>
+                              <a:ea typeface="Cambria Math"/>
+                            </a:rPr>
+                            <m:t> </m:t>
+                          </m:r>
+                          <m:box>
+                            <m:e>
+                              <m:r>
+                                <m:rPr>
+                                  <m:sty m:val="p"/>
+                                </m:rPr>
+                                <a:rPr lang="en-US" sz="1900" i="0">
+                                  <a:solidFill>
+                                    <a:srgbClr val="1A1A1A"/>
+                                  </a:solidFill>
+                                  <a:latin typeface="Cambria Math" panose="02040503050406030204" pitchFamily="18" charset="0"/>
+                                  <a:ea typeface="Cambria Math"/>
+                                </a:rPr>
+                                <m:t>n</m:t>
+                              </m:r>
+                              <m:r>
+                                <m:rPr>
+                                  <m:sty m:val="p"/>
+                                </m:rPr>
+                                <a:rPr lang="en-US" sz="1900" i="0">
+                                  <a:solidFill>
+                                    <a:srgbClr val="1A1A1A"/>
+                                  </a:solidFill>
+                                  <a:latin typeface="Cambria Math" panose="02040503050406030204" pitchFamily="18" charset="0"/>
+                                  <a:ea typeface="Cambria Math"/>
+                                </a:rPr>
+                                <m:t>m</m:t>
+                              </m:r>
+                            </m:e>
+                          </m:box>
+                          <m:r>
+                            <m:rPr>
+                              <m:sty m:val="p"/>
+                            </m:rPr>
+                            <a:rPr lang="en-US" sz="1900" i="0">
+                              <a:solidFill>
+                                <a:srgbClr val="1A1A1A"/>
+                              </a:solidFill>
+                              <a:latin typeface="Cambria Math" panose="02040503050406030204" pitchFamily="18" charset="0"/>
+                              <a:ea typeface="Cambria Math"/>
+                            </a:rPr>
+                            <m:t>=</m:t>
+                          </m:r>
+                          <m:r>
+                            <m:rPr>
+                              <m:sty m:val="p"/>
+                            </m:rPr>
+                            <a:rPr lang="en-US" sz="1900" i="0">
+                              <a:solidFill>
+                                <a:srgbClr val="1A1A1A"/>
+                              </a:solidFill>
+                              <a:latin typeface="Cambria Math" panose="02040503050406030204" pitchFamily="18" charset="0"/>
+                              <a:ea typeface="Cambria Math"/>
+                            </a:rPr>
+                            <m:t>10</m:t>
+                          </m:r>
+                          <m:r>
+                            <m:rPr>
+                              <m:sty m:val="p"/>
+                            </m:rPr>
+                            <a:rPr lang="en-US" sz="1900" i="0">
+                              <a:solidFill>
+                                <a:srgbClr val="1A1A1A"/>
+                              </a:solidFill>
+                              <a:latin typeface="Cambria Math" panose="02040503050406030204" pitchFamily="18" charset="0"/>
+                              <a:ea typeface="Cambria Math"/>
+                            </a:rPr>
+                            <m:t> </m:t>
+                          </m:r>
+                          <m:box>
+                            <m:e>
+                              <m:r>
+                                <m:rPr>
+                                  <m:sty m:val="p"/>
+                                </m:rPr>
+                                <a:rPr lang="en-US" sz="1900" i="0">
+                                  <a:solidFill>
+                                    <a:srgbClr val="1A1A1A"/>
+                                  </a:solidFill>
+                                  <a:latin typeface="Cambria Math" panose="02040503050406030204" pitchFamily="18" charset="0"/>
+                                  <a:ea typeface="Cambria Math"/>
+                                </a:rPr>
+                                <m:t>Å</m:t>
+                              </m:r>
+                            </m:e>
+                          </m:box>
+                        </m:e>
+                      </m:box>
+                    </m:oMath>
+                  </m:oMathPara>
+                </a14:m>
+                <a:endParaRPr lang="en-US" sz="1900"/>
+              </a:p>
+            </p:txBody>
+          </p:sp>
+        </mc:Choice>
+        <mc:Fallback>
+          <p:pic>
+            <p:nvPicPr>
+              <p:cNvPr id="10" name="Picture 9" descr="d_{ij}=\|x_i-x_j\|_2,\qquad 1\,\mathrm{nm}=10\,\mathrm{Å}"/>
+              <p:cNvPicPr>
+                <a:picLocks noChangeAspect="1"/>
+              </p:cNvPicPr>
+              <p:nvPr/>
+            </p:nvPicPr>
+            <p:blipFill>
+              <a:blip r:embed="rId6"/>
+              <a:stretch>
+                <a:fillRect/>
+              </a:stretch>
+            </p:blipFill>
+            <p:spPr>
+              <a:xfrm>
+                <a:off x="4431639" y="5687568"/>
+                <a:ext cx="3328416" cy="365760"/>
+              </a:xfrm>
+              <a:prstGeom prst="rect">
+                <a:avLst/>
+              </a:prstGeom>
+            </p:spPr>
+          </p:pic>
+        </mc:Fallback>
+      </mc:AlternateContent>
       <p:sp>
         <p:nvSpPr>
           <p:cNvPr id="11" name="TextBox 10"/>
@@ -11170,8 +11791,8 @@
         </p:nvSpPr>
         <p:spPr>
           <a:xfrm>
-            <a:off x="594360" y="6199632"/>
-            <a:ext cx="10972800" cy="201168"/>
+            <a:off x="502920" y="6217920"/>
+            <a:ext cx="11064240" cy="182880"/>
           </a:xfrm>
           <a:prstGeom prst="rect">
             <a:avLst/>
@@ -11190,14 +11811,14 @@
               </a:lnSpc>
             </a:pPr>
             <a:r>
-              <a:rPr sz="850" b="0" lang="ja-JP" altLang="en-US">
+              <a:rPr sz="919" b="0" lang="ja-JP" altLang="en-US">
                 <a:solidFill>
                   <a:srgbClr val="666666"/>
                 </a:solidFill>
                 <a:latin typeface="Noto Sans JP"/>
                 <a:ea typeface="Noto Sans JP"/>
               </a:rPr>
-              <a:t>出典：RCSB PDB / wwPDB</a:t>
+              <a:t>PDB 1UBQ 鎖A：同じ残基23–27、同じ座標・視点・縮尺で原子選択だけを変更。</a:t>
             </a:r>
           </a:p>
         </p:txBody>
@@ -11303,7 +11924,7 @@
                 <a:latin typeface="Noto Sans JP"/>
                 <a:ea typeface="Noto Sans JP"/>
               </a:rPr>
-              <a:t>疎水性コアだけでは説明しきれない</a:t>
+              <a:t>折りたたみの安定性には鎖と水の両方が関わる</a:t>
             </a:r>
           </a:p>
         </p:txBody>
@@ -11391,27 +12012,27 @@
         </p:nvSpPr>
         <p:spPr>
           <a:xfrm>
-            <a:off x="685800" y="1554480"/>
-            <a:ext cx="10808208" cy="441959"/>
-          </a:xfrm>
-          <a:prstGeom prst="rect">
-            <a:avLst/>
-          </a:prstGeom>
-          <a:noFill/>
-        </p:spPr>
-        <p:txBody>
-          <a:bodyPr wrap="square" lIns="0" rIns="0" tIns="0" bIns="0" anchor="t">
-            <a:noAutofit/>
-          </a:bodyPr>
-          <a:lstStyle/>
-          <a:p>
-            <a:pPr algn="l">
-              <a:lnSpc>
-                <a:spcPts val="2688"/>
-              </a:lnSpc>
-            </a:pPr>
-            <a:r>
-              <a:rPr sz="2100" b="0" lang="ja-JP" altLang="en-US">
+            <a:off x="594360" y="1508760"/>
+            <a:ext cx="5760720" cy="685800"/>
+          </a:xfrm>
+          <a:prstGeom prst="rect">
+            <a:avLst/>
+          </a:prstGeom>
+          <a:noFill/>
+        </p:spPr>
+        <p:txBody>
+          <a:bodyPr wrap="square" lIns="0" rIns="0" tIns="0" bIns="0" anchor="t">
+            <a:noAutofit/>
+          </a:bodyPr>
+          <a:lstStyle/>
+          <a:p>
+            <a:pPr algn="l">
+              <a:lnSpc>
+                <a:spcPts val="2304"/>
+              </a:lnSpc>
+            </a:pPr>
+            <a:r>
+              <a:rPr sz="1800" b="0" lang="ja-JP" altLang="en-US">
                 <a:solidFill>
                   <a:srgbClr val="333333"/>
                 </a:solidFill>
@@ -11431,27 +12052,27 @@
         </p:nvSpPr>
         <p:spPr>
           <a:xfrm>
-            <a:off x="685800" y="2097023"/>
-            <a:ext cx="10808208" cy="441959"/>
-          </a:xfrm>
-          <a:prstGeom prst="rect">
-            <a:avLst/>
-          </a:prstGeom>
-          <a:noFill/>
-        </p:spPr>
-        <p:txBody>
-          <a:bodyPr wrap="square" lIns="0" rIns="0" tIns="0" bIns="0" anchor="t">
-            <a:noAutofit/>
-          </a:bodyPr>
-          <a:lstStyle/>
-          <a:p>
-            <a:pPr algn="l">
-              <a:lnSpc>
-                <a:spcPts val="2688"/>
-              </a:lnSpc>
-            </a:pPr>
-            <a:r>
-              <a:rPr sz="2100" b="0" lang="ja-JP" altLang="en-US">
+            <a:off x="594360" y="2295144"/>
+            <a:ext cx="5760720" cy="685800"/>
+          </a:xfrm>
+          <a:prstGeom prst="rect">
+            <a:avLst/>
+          </a:prstGeom>
+          <a:noFill/>
+        </p:spPr>
+        <p:txBody>
+          <a:bodyPr wrap="square" lIns="0" rIns="0" tIns="0" bIns="0" anchor="t">
+            <a:noAutofit/>
+          </a:bodyPr>
+          <a:lstStyle/>
+          <a:p>
+            <a:pPr algn="l">
+              <a:lnSpc>
+                <a:spcPts val="2304"/>
+              </a:lnSpc>
+            </a:pPr>
+            <a:r>
+              <a:rPr sz="1800" b="0" lang="ja-JP" altLang="en-US">
                 <a:solidFill>
                   <a:srgbClr val="333333"/>
                 </a:solidFill>
@@ -11471,34 +12092,34 @@
         </p:nvSpPr>
         <p:spPr>
           <a:xfrm>
-            <a:off x="685800" y="2639567"/>
-            <a:ext cx="10808208" cy="441959"/>
-          </a:xfrm>
-          <a:prstGeom prst="rect">
-            <a:avLst/>
-          </a:prstGeom>
-          <a:noFill/>
-        </p:spPr>
-        <p:txBody>
-          <a:bodyPr wrap="square" lIns="0" rIns="0" tIns="0" bIns="0" anchor="t">
-            <a:noAutofit/>
-          </a:bodyPr>
-          <a:lstStyle/>
-          <a:p>
-            <a:pPr algn="l">
-              <a:lnSpc>
-                <a:spcPts val="2688"/>
-              </a:lnSpc>
-            </a:pPr>
-            <a:r>
-              <a:rPr sz="2100" b="0" lang="ja-JP" altLang="en-US">
+            <a:off x="594360" y="3081527"/>
+            <a:ext cx="5760720" cy="685800"/>
+          </a:xfrm>
+          <a:prstGeom prst="rect">
+            <a:avLst/>
+          </a:prstGeom>
+          <a:noFill/>
+        </p:spPr>
+        <p:txBody>
+          <a:bodyPr wrap="square" lIns="0" rIns="0" tIns="0" bIns="0" anchor="t">
+            <a:noAutofit/>
+          </a:bodyPr>
+          <a:lstStyle/>
+          <a:p>
+            <a:pPr algn="l">
+              <a:lnSpc>
+                <a:spcPts val="2304"/>
+              </a:lnSpc>
+            </a:pPr>
+            <a:r>
+              <a:rPr sz="1800" b="0" lang="ja-JP" altLang="en-US">
                 <a:solidFill>
                   <a:srgbClr val="333333"/>
                 </a:solidFill>
                 <a:latin typeface="Noto Sans JP"/>
                 <a:ea typeface="Noto Sans JP"/>
               </a:rPr>
-              <a:t>折りたたみでは、鎖と水のエントロピーも変わる。</a:t>
+              <a:t>折りたたみでは、鎖と水が取り得る状態の数も変わる。この広がりを表す量がエントロピー。</a:t>
             </a:r>
           </a:p>
         </p:txBody>
@@ -11511,27 +12132,27 @@
         </p:nvSpPr>
         <p:spPr>
           <a:xfrm>
-            <a:off x="685800" y="3182111"/>
-            <a:ext cx="10808208" cy="783336"/>
-          </a:xfrm>
-          <a:prstGeom prst="rect">
-            <a:avLst/>
-          </a:prstGeom>
-          <a:noFill/>
-        </p:spPr>
-        <p:txBody>
-          <a:bodyPr wrap="square" lIns="0" rIns="0" tIns="0" bIns="0" anchor="t">
-            <a:noAutofit/>
-          </a:bodyPr>
-          <a:lstStyle/>
-          <a:p>
-            <a:pPr algn="l">
-              <a:lnSpc>
-                <a:spcPts val="2688"/>
-              </a:lnSpc>
-            </a:pPr>
-            <a:r>
-              <a:rPr sz="2100" b="0" lang="ja-JP" altLang="en-US">
+            <a:off x="594360" y="3867911"/>
+            <a:ext cx="5760720" cy="978408"/>
+          </a:xfrm>
+          <a:prstGeom prst="rect">
+            <a:avLst/>
+          </a:prstGeom>
+          <a:noFill/>
+        </p:spPr>
+        <p:txBody>
+          <a:bodyPr wrap="square" lIns="0" rIns="0" tIns="0" bIns="0" anchor="t">
+            <a:noAutofit/>
+          </a:bodyPr>
+          <a:lstStyle/>
+          <a:p>
+            <a:pPr algn="l">
+              <a:lnSpc>
+                <a:spcPts val="2304"/>
+              </a:lnSpc>
+            </a:pPr>
+            <a:r>
+              <a:rPr sz="1800" b="0" lang="ja-JP" altLang="en-US">
                 <a:solidFill>
                   <a:srgbClr val="333333"/>
                 </a:solidFill>
@@ -11551,27 +12172,27 @@
         </p:nvSpPr>
         <p:spPr>
           <a:xfrm>
-            <a:off x="685800" y="4066031"/>
-            <a:ext cx="10808208" cy="783336"/>
-          </a:xfrm>
-          <a:prstGeom prst="rect">
-            <a:avLst/>
-          </a:prstGeom>
-          <a:noFill/>
-        </p:spPr>
-        <p:txBody>
-          <a:bodyPr wrap="square" lIns="0" rIns="0" tIns="0" bIns="0" anchor="t">
-            <a:noAutofit/>
-          </a:bodyPr>
-          <a:lstStyle/>
-          <a:p>
-            <a:pPr algn="l">
-              <a:lnSpc>
-                <a:spcPts val="2688"/>
-              </a:lnSpc>
-            </a:pPr>
-            <a:r>
-              <a:rPr sz="2100" b="0" lang="ja-JP" altLang="en-US">
+            <a:off x="594360" y="4946904"/>
+            <a:ext cx="5760720" cy="978408"/>
+          </a:xfrm>
+          <a:prstGeom prst="rect">
+            <a:avLst/>
+          </a:prstGeom>
+          <a:noFill/>
+        </p:spPr>
+        <p:txBody>
+          <a:bodyPr wrap="square" lIns="0" rIns="0" tIns="0" bIns="0" anchor="t">
+            <a:noAutofit/>
+          </a:bodyPr>
+          <a:lstStyle/>
+          <a:p>
+            <a:pPr algn="l">
+              <a:lnSpc>
+                <a:spcPts val="2304"/>
+              </a:lnSpc>
+            </a:pPr>
+            <a:r>
+              <a:rPr sz="1800" b="0" lang="ja-JP" altLang="en-US">
                 <a:solidFill>
                   <a:srgbClr val="333333"/>
                 </a:solidFill>
@@ -11579,6 +12200,71 @@
                 <a:ea typeface="Noto Sans JP"/>
               </a:rPr>
               <a:t>折りたたむと鎖が取り得る配置は減る一方、水の配置も変わる。エネルギーの低下と、取り得る状態の数の両方が関わる。</a:t>
+            </a:r>
+          </a:p>
+        </p:txBody>
+      </p:sp>
+      <p:pic>
+        <p:nvPicPr>
+          <p:cNvPr id="11" name="Picture 10" descr="review_stability.png"/>
+          <p:cNvPicPr>
+            <a:picLocks noChangeAspect="1"/>
+          </p:cNvPicPr>
+          <p:nvPr/>
+        </p:nvPicPr>
+        <p:blipFill>
+          <a:blip r:embed="rId3"/>
+          <a:srcRect/>
+          <a:stretch>
+            <a:fillRect/>
+          </a:stretch>
+        </p:blipFill>
+        <p:spPr>
+          <a:xfrm>
+            <a:off x="6611112" y="2069592"/>
+            <a:ext cx="4956048" cy="3304032"/>
+          </a:xfrm>
+          <a:prstGeom prst="rect">
+            <a:avLst/>
+          </a:prstGeom>
+        </p:spPr>
+      </p:pic>
+      <p:sp>
+        <p:nvSpPr>
+          <p:cNvPr id="12" name="TextBox 11"/>
+          <p:cNvSpPr txBox="1"/>
+          <p:nvPr/>
+        </p:nvSpPr>
+        <p:spPr>
+          <a:xfrm>
+            <a:off x="502920" y="6217920"/>
+            <a:ext cx="11064240" cy="182880"/>
+          </a:xfrm>
+          <a:prstGeom prst="rect">
+            <a:avLst/>
+          </a:prstGeom>
+          <a:noFill/>
+        </p:spPr>
+        <p:txBody>
+          <a:bodyPr wrap="square" lIns="0" rIns="0" tIns="0" bIns="0" anchor="t">
+            <a:noAutofit/>
+          </a:bodyPr>
+          <a:lstStyle/>
+          <a:p>
+            <a:pPr algn="l">
+              <a:lnSpc>
+                <a:spcPct val="100000"/>
+              </a:lnSpc>
+            </a:pPr>
+            <a:r>
+              <a:rPr sz="919" b="0" lang="ja-JP" altLang="en-US">
+                <a:solidFill>
+                  <a:srgbClr val="666666"/>
+                </a:solidFill>
+                <a:latin typeface="Noto Sans JP"/>
+                <a:ea typeface="Noto Sans JP"/>
+              </a:rPr>
+              <a:t>説明用の模式図。原子の大きさや距離は縮尺どおりではない。</a:t>
             </a:r>
           </a:p>
         </p:txBody>
@@ -11798,6 +12484,46 @@
         <p:spPr>
           <a:xfrm>
             <a:off x="594360" y="4690872"/>
+            <a:ext cx="5349240" cy="1108456"/>
+          </a:xfrm>
+          <a:prstGeom prst="rect">
+            <a:avLst/>
+          </a:prstGeom>
+          <a:noFill/>
+        </p:spPr>
+        <p:txBody>
+          <a:bodyPr wrap="square" lIns="0" rIns="0" tIns="0" bIns="0" anchor="t">
+            <a:noAutofit/>
+          </a:bodyPr>
+          <a:lstStyle/>
+          <a:p>
+            <a:pPr algn="l">
+              <a:lnSpc>
+                <a:spcPts val="1984"/>
+              </a:lnSpc>
+            </a:pPr>
+            <a:r>
+              <a:rPr sz="1550" b="0" lang="ja-JP" altLang="en-US">
+                <a:solidFill>
+                  <a:srgbClr val="333333"/>
+                </a:solidFill>
+                <a:latin typeface="Noto Sans JP"/>
+                <a:ea typeface="Noto Sans JP"/>
+              </a:rPr>
+              <a:t>鎖：ペプチド結合で連続した単位。 ドメイン：比較的まとまった構造を作る部分。1 本の鎖に複数あり得る。 複数の鎖の集合は四次構造。ドメイン数と鎖数を混同しない。</a:t>
+            </a:r>
+          </a:p>
+        </p:txBody>
+      </p:sp>
+      <p:sp>
+        <p:nvSpPr>
+          <p:cNvPr id="8" name="TextBox 7"/>
+          <p:cNvSpPr txBox="1"/>
+          <p:nvPr/>
+        </p:nvSpPr>
+        <p:spPr>
+          <a:xfrm>
+            <a:off x="6217920" y="4690872"/>
             <a:ext cx="5349240" cy="856488"/>
           </a:xfrm>
           <a:prstGeom prst="rect">
@@ -11824,47 +12550,7 @@
                 <a:latin typeface="Noto Sans JP"/>
                 <a:ea typeface="Noto Sans JP"/>
               </a:rPr>
-              <a:t>鎖：ペプチド結合で連続した単位。 ドメイン：比較的まとまった構造を作る部分。1 本の鎖に複数あり得る。</a:t>
-            </a:r>
-          </a:p>
-        </p:txBody>
-      </p:sp>
-      <p:sp>
-        <p:nvSpPr>
-          <p:cNvPr id="8" name="TextBox 7"/>
-          <p:cNvSpPr txBox="1"/>
-          <p:nvPr/>
-        </p:nvSpPr>
-        <p:spPr>
-          <a:xfrm>
-            <a:off x="6217920" y="4690872"/>
-            <a:ext cx="5349240" cy="1108456"/>
-          </a:xfrm>
-          <a:prstGeom prst="rect">
-            <a:avLst/>
-          </a:prstGeom>
-          <a:noFill/>
-        </p:spPr>
-        <p:txBody>
-          <a:bodyPr wrap="square" lIns="0" rIns="0" tIns="0" bIns="0" anchor="t">
-            <a:noAutofit/>
-          </a:bodyPr>
-          <a:lstStyle/>
-          <a:p>
-            <a:pPr algn="l">
-              <a:lnSpc>
-                <a:spcPts val="1984"/>
-              </a:lnSpc>
-            </a:pPr>
-            <a:r>
-              <a:rPr sz="1550" b="0" lang="ja-JP" altLang="en-US">
-                <a:solidFill>
-                  <a:srgbClr val="333333"/>
-                </a:solidFill>
-                <a:latin typeface="Noto Sans JP"/>
-                <a:ea typeface="Noto Sans JP"/>
-              </a:rPr>
-              <a:t>複数の鎖の集合は四次構造。ドメイン数と鎖数を混同しない。 図の SH1・SH2・SH3 は異なる働きを担うドメインの例。ここで3個の図があることを、そのまま3本鎖の複合体と読まない。</a:t>
+              <a:t>図の SH1・SH2・SH3 は異なる働きを担うドメインの例。ここで3個の図があることを、そのまま3本鎖の複合体と読まない。</a:t>
             </a:r>
           </a:p>
         </p:txBody>
@@ -12150,7 +12836,7 @@
                 <a:latin typeface="Noto Sans JP"/>
                 <a:ea typeface="Noto Sans JP"/>
               </a:rPr>
-              <a:t>成人ヘモグロビンは、α 鎖 2 本と β 鎖 2 本からなる。</a:t>
+              <a:t>成人の主要なヘモグロビン（HbA）は、α 鎖 2 本と β 鎖 2 本からなる。</a:t>
             </a:r>
           </a:p>
         </p:txBody>
@@ -12416,7 +13102,7 @@
                 <a:latin typeface="Noto Sans JP"/>
                 <a:ea typeface="Noto Sans JP"/>
               </a:rPr>
-              <a:t>01 構造を何で表すか</a:t>
+              <a:t>構造の表現</a:t>
             </a:r>
           </a:p>
         </p:txBody>
@@ -12456,7 +13142,7 @@
                 <a:latin typeface="Noto Sans JP"/>
                 <a:ea typeface="Noto Sans JP"/>
               </a:rPr>
-              <a:t>距離行列は回転と並進を取り除く</a:t>
+              <a:t>距離は分子全体を回転・並進しても変わらない</a:t>
             </a:r>
           </a:p>
         </p:txBody>
@@ -12536,99 +13222,35 @@
           </a:p>
         </p:txBody>
       </p:sp>
-      <p:pic>
-        <p:nvPicPr>
-          <p:cNvPr id="7" name="Picture 6" descr="\|(Rx_i+t)-(Rx_j+t)\|^2=(x_i-x_j)^TR^TR(x_i-x_j)=d_{ij}^2"/>
-          <p:cNvPicPr>
-            <a:picLocks noChangeAspect="1"/>
-          </p:cNvPicPr>
-          <p:nvPr/>
-        </p:nvPicPr>
-        <p:blipFill>
-          <a:blip r:embed="rId3"/>
-          <a:stretch>
-            <a:fillRect/>
-          </a:stretch>
-        </p:blipFill>
-        <p:spPr>
-          <a:xfrm>
-            <a:off x="3067389" y="3035808"/>
-            <a:ext cx="6054172" cy="354927"/>
-          </a:xfrm>
-          <a:prstGeom prst="rect">
-            <a:avLst/>
-          </a:prstGeom>
-        </p:spPr>
-      </p:pic>
-      <p:sp>
-        <p:nvSpPr>
-          <p:cNvPr id="14" name="TextBox 13"/>
-          <p:cNvSpPr txBox="1"/>
-          <p:nvPr/>
-        </p:nvSpPr>
-        <p:spPr>
-          <a:xfrm>
-            <a:off x="594360" y="6199632"/>
-            <a:ext cx="10972800" cy="201168"/>
-          </a:xfrm>
-          <a:prstGeom prst="rect">
-            <a:avLst/>
-          </a:prstGeom>
-          <a:noFill/>
-        </p:spPr>
-        <p:txBody>
-          <a:bodyPr wrap="square" lIns="0" rIns="0" tIns="0" bIns="0" anchor="t">
-            <a:noAutofit/>
-          </a:bodyPr>
-          <a:lstStyle/>
-          <a:p>
-            <a:pPr algn="l">
-              <a:lnSpc>
-                <a:spcPct val="100000"/>
-              </a:lnSpc>
-            </a:pPr>
-            <a:r>
-              <a:rPr sz="850" b="0" lang="ja-JP" altLang="en-US">
-                <a:solidFill>
-                  <a:srgbClr val="666666"/>
-                </a:solidFill>
-                <a:latin typeface="Noto Sans JP"/>
-                <a:ea typeface="Noto Sans JP"/>
-              </a:rPr>
-              <a:t>出典：Mariani et al. (2013)</a:t>
-            </a:r>
-          </a:p>
-        </p:txBody>
-      </p:sp>
-      <p:sp>
-        <p:nvSpPr>
-          <p:cNvPr id="15" name="TextBox 14"/>
+      <p:sp>
+        <p:nvSpPr>
+          <p:cNvPr id="6" name="TextBox 5"/>
           <p:cNvSpPr txBox="1"/>
           <p:nvPr/>
         </p:nvSpPr>
         <p:spPr>
           <a:xfrm>
             <a:off x="594360" y="1389888"/>
-            <a:ext cx="11000232" cy="368808"/>
-          </a:xfrm>
-          <a:prstGeom prst="rect">
-            <a:avLst/>
-          </a:prstGeom>
-          <a:noFill/>
-        </p:spPr>
-        <p:txBody>
-          <a:bodyPr wrap="square" lIns="0" rIns="0" tIns="0" bIns="0" anchor="t">
-            <a:noAutofit/>
-          </a:bodyPr>
-          <a:lstStyle/>
-          <a:p>
-            <a:pPr algn="l">
-              <a:lnSpc>
-                <a:spcPts val="2112"/>
-              </a:lnSpc>
-            </a:pPr>
-            <a:r>
-              <a:rPr sz="1650" b="0" i="1">
+            <a:ext cx="7132320" cy="653288"/>
+          </a:xfrm>
+          <a:prstGeom prst="rect">
+            <a:avLst/>
+          </a:prstGeom>
+          <a:noFill/>
+        </p:spPr>
+        <p:txBody>
+          <a:bodyPr wrap="square" lIns="0" rIns="0" tIns="0" bIns="0" anchor="t">
+            <a:noAutofit/>
+          </a:bodyPr>
+          <a:lstStyle/>
+          <a:p>
+            <a:pPr algn="l">
+              <a:lnSpc>
+                <a:spcPts val="2176"/>
+              </a:lnSpc>
+            </a:pPr>
+            <a:r>
+              <a:rPr sz="1700" b="0" i="1">
                 <a:solidFill>
                   <a:srgbClr val="333333"/>
                 </a:solidFill>
@@ -12638,7 +13260,7 @@
               <a:t>x</a:t>
             </a:r>
             <a:r>
-              <a:rPr sz="1650" b="0" i="1" baseline="-25000">
+              <a:rPr sz="1700" b="0" i="1" baseline="-25000">
                 <a:solidFill>
                   <a:srgbClr val="333333"/>
                 </a:solidFill>
@@ -12648,7 +13270,7 @@
               <a:t>i</a:t>
             </a:r>
             <a:r>
-              <a:rPr sz="1650" b="0" i="0">
+              <a:rPr sz="1700" b="0" i="0">
                 <a:solidFill>
                   <a:srgbClr val="333333"/>
                 </a:solidFill>
@@ -12658,7 +13280,7 @@
               <a:t>,</a:t>
             </a:r>
             <a:r>
-              <a:rPr sz="1650" b="0" i="1">
+              <a:rPr sz="1700" b="0" i="1">
                 <a:solidFill>
                   <a:srgbClr val="333333"/>
                 </a:solidFill>
@@ -12668,7 +13290,7 @@
               <a:t>x</a:t>
             </a:r>
             <a:r>
-              <a:rPr sz="1650" b="0" i="1" baseline="-25000">
+              <a:rPr sz="1700" b="0" i="1" baseline="-25000">
                 <a:solidFill>
                   <a:srgbClr val="333333"/>
                 </a:solidFill>
@@ -12678,7 +13300,7 @@
               <a:t>j</a:t>
             </a:r>
             <a:r>
-              <a:rPr sz="1650" b="0" lang="ja-JP" altLang="en-US">
+              <a:rPr sz="1700" b="0" lang="ja-JP" altLang="en-US">
                 <a:solidFill>
                   <a:srgbClr val="333333"/>
                 </a:solidFill>
@@ -12688,7 +13310,7 @@
               <a:t> は残基 </a:t>
             </a:r>
             <a:r>
-              <a:rPr sz="1650" b="0" i="1">
+              <a:rPr sz="1700" b="0" i="1">
                 <a:solidFill>
                   <a:srgbClr val="333333"/>
                 </a:solidFill>
@@ -12698,7 +13320,7 @@
               <a:t>i</a:t>
             </a:r>
             <a:r>
-              <a:rPr sz="1650" b="0" i="0">
+              <a:rPr sz="1700" b="0" i="0">
                 <a:solidFill>
                   <a:srgbClr val="333333"/>
                 </a:solidFill>
@@ -12708,7 +13330,7 @@
               <a:t>,</a:t>
             </a:r>
             <a:r>
-              <a:rPr sz="1650" b="0" i="1">
+              <a:rPr sz="1700" b="0" i="1">
                 <a:solidFill>
                   <a:srgbClr val="333333"/>
                 </a:solidFill>
@@ -12718,7 +13340,7 @@
               <a:t>j</a:t>
             </a:r>
             <a:r>
-              <a:rPr sz="1650" b="0" lang="ja-JP" altLang="en-US">
+              <a:rPr sz="1700" b="0" lang="ja-JP" altLang="en-US">
                 <a:solidFill>
                   <a:srgbClr val="333333"/>
                 </a:solidFill>
@@ -12728,7 +13350,7 @@
               <a:t> の代表点の3次元座標。ここでは同じ鎖の Cα を選ぶ。</a:t>
             </a:r>
             <a:r>
-              <a:rPr sz="1650" b="0" i="1">
+              <a:rPr sz="1700" b="0" i="1">
                 <a:solidFill>
                   <a:srgbClr val="333333"/>
                 </a:solidFill>
@@ -12738,7 +13360,7 @@
               <a:t>d</a:t>
             </a:r>
             <a:r>
-              <a:rPr sz="1650" b="0" i="1" baseline="-25000">
+              <a:rPr sz="1700" b="0" i="1" baseline="-25000">
                 <a:solidFill>
                   <a:srgbClr val="333333"/>
                 </a:solidFill>
@@ -12748,7 +13370,7 @@
               <a:t>ij</a:t>
             </a:r>
             <a:r>
-              <a:rPr sz="1650" b="0" lang="ja-JP" altLang="en-US">
+              <a:rPr sz="1700" b="0" lang="ja-JP" altLang="en-US">
                 <a:solidFill>
                   <a:srgbClr val="333333"/>
                 </a:solidFill>
@@ -12764,14 +13386,1105 @@
         <mc:Choice xmlns:a14="http://schemas.microsoft.com/office/drawing/2010/main" Requires="a14">
           <p:sp>
             <p:nvSpPr>
-              <p:cNvPr id="16" name="TextBox 15"/>
+              <p:cNvPr id="7" name="TextBox 6"/>
               <p:cNvSpPr txBox="1"/>
               <p:nvPr/>
             </p:nvSpPr>
             <p:spPr>
               <a:xfrm>
-                <a:off x="457200" y="2002536"/>
-                <a:ext cx="11277295" cy="396240"/>
+                <a:off x="3203448" y="2231136"/>
+                <a:ext cx="2059960" cy="368808"/>
+              </a:xfrm>
+              <a:prstGeom prst="rect">
+                <a:avLst/>
+              </a:prstGeom>
+              <a:noFill/>
+            </p:spPr>
+            <p:txBody>
+              <a:bodyPr wrap="none" lIns="0" rIns="0" tIns="0" bIns="0" anchor="ctr">
+                <a:noAutofit/>
+              </a:bodyPr>
+              <a:lstStyle/>
+              <a:p>
+                <a:pPr algn="l"/>
+                <a14:m>
+                  <m:oMathPara xmlns:m="http://schemas.openxmlformats.org/officeDocument/2006/math">
+                    <m:oMathParaPr>
+                      <m:jc m:val="left"/>
+                    </m:oMathParaPr>
+                    <m:oMath>
+                      <m:box>
+                        <m:e>
+                          <m:sSub>
+                            <m:e>
+                              <m:r>
+                                <m:rPr/>
+                                <a:rPr lang="en-US" sz="2300" i="1">
+                                  <a:solidFill>
+                                    <a:srgbClr val="1A1A1A"/>
+                                  </a:solidFill>
+                                  <a:latin typeface="Cambria Math" panose="02040503050406030204" pitchFamily="18" charset="0"/>
+                                  <a:ea typeface="Cambria Math"/>
+                                </a:rPr>
+                                <m:t>d</m:t>
+                              </m:r>
+                            </m:e>
+                            <m:sub>
+                              <m:box>
+                                <m:e>
+                                  <m:r>
+                                    <m:rPr/>
+                                    <a:rPr lang="en-US" sz="2300" i="1">
+                                      <a:solidFill>
+                                        <a:srgbClr val="1A1A1A"/>
+                                      </a:solidFill>
+                                      <a:latin typeface="Cambria Math" panose="02040503050406030204" pitchFamily="18" charset="0"/>
+                                      <a:ea typeface="Cambria Math"/>
+                                    </a:rPr>
+                                    <m:t>i</m:t>
+                                  </m:r>
+                                  <m:r>
+                                    <m:rPr/>
+                                    <a:rPr lang="en-US" sz="2300" i="1">
+                                      <a:solidFill>
+                                        <a:srgbClr val="1A1A1A"/>
+                                      </a:solidFill>
+                                      <a:latin typeface="Cambria Math" panose="02040503050406030204" pitchFamily="18" charset="0"/>
+                                      <a:ea typeface="Cambria Math"/>
+                                    </a:rPr>
+                                    <m:t>j</m:t>
+                                  </m:r>
+                                </m:e>
+                              </m:box>
+                            </m:sub>
+                          </m:sSub>
+                          <m:r>
+                            <m:rPr>
+                              <m:sty m:val="p"/>
+                            </m:rPr>
+                            <a:rPr lang="en-US" sz="2300" i="0">
+                              <a:solidFill>
+                                <a:srgbClr val="1A1A1A"/>
+                              </a:solidFill>
+                              <a:latin typeface="Cambria Math" panose="02040503050406030204" pitchFamily="18" charset="0"/>
+                              <a:ea typeface="Cambria Math"/>
+                            </a:rPr>
+                            <m:t>=</m:t>
+                          </m:r>
+                          <m:r>
+                            <m:rPr>
+                              <m:sty m:val="p"/>
+                            </m:rPr>
+                            <a:rPr lang="en-US" sz="2300" i="0">
+                              <a:solidFill>
+                                <a:srgbClr val="1A1A1A"/>
+                              </a:solidFill>
+                              <a:latin typeface="Cambria Math" panose="02040503050406030204" pitchFamily="18" charset="0"/>
+                              <a:ea typeface="Cambria Math"/>
+                            </a:rPr>
+                            <m:t>‖</m:t>
+                          </m:r>
+                          <m:sSub>
+                            <m:e>
+                              <m:r>
+                                <m:rPr/>
+                                <a:rPr lang="en-US" sz="2300" i="1">
+                                  <a:solidFill>
+                                    <a:srgbClr val="1A1A1A"/>
+                                  </a:solidFill>
+                                  <a:latin typeface="Cambria Math" panose="02040503050406030204" pitchFamily="18" charset="0"/>
+                                  <a:ea typeface="Cambria Math"/>
+                                </a:rPr>
+                                <m:t>x</m:t>
+                              </m:r>
+                            </m:e>
+                            <m:sub>
+                              <m:r>
+                                <m:rPr/>
+                                <a:rPr lang="en-US" sz="2300" i="1">
+                                  <a:solidFill>
+                                    <a:srgbClr val="1A1A1A"/>
+                                  </a:solidFill>
+                                  <a:latin typeface="Cambria Math" panose="02040503050406030204" pitchFamily="18" charset="0"/>
+                                  <a:ea typeface="Cambria Math"/>
+                                </a:rPr>
+                                <m:t>i</m:t>
+                              </m:r>
+                            </m:sub>
+                          </m:sSub>
+                          <m:r>
+                            <m:rPr>
+                              <m:sty m:val="p"/>
+                            </m:rPr>
+                            <a:rPr lang="en-US" sz="2300" i="0">
+                              <a:solidFill>
+                                <a:srgbClr val="1A1A1A"/>
+                              </a:solidFill>
+                              <a:latin typeface="Cambria Math" panose="02040503050406030204" pitchFamily="18" charset="0"/>
+                              <a:ea typeface="Cambria Math"/>
+                            </a:rPr>
+                            <m:t>−</m:t>
+                          </m:r>
+                          <m:sSub>
+                            <m:e>
+                              <m:r>
+                                <m:rPr/>
+                                <a:rPr lang="en-US" sz="2300" i="1">
+                                  <a:solidFill>
+                                    <a:srgbClr val="1A1A1A"/>
+                                  </a:solidFill>
+                                  <a:latin typeface="Cambria Math" panose="02040503050406030204" pitchFamily="18" charset="0"/>
+                                  <a:ea typeface="Cambria Math"/>
+                                </a:rPr>
+                                <m:t>x</m:t>
+                              </m:r>
+                            </m:e>
+                            <m:sub>
+                              <m:r>
+                                <m:rPr/>
+                                <a:rPr lang="en-US" sz="2300" i="1">
+                                  <a:solidFill>
+                                    <a:srgbClr val="1A1A1A"/>
+                                  </a:solidFill>
+                                  <a:latin typeface="Cambria Math" panose="02040503050406030204" pitchFamily="18" charset="0"/>
+                                  <a:ea typeface="Cambria Math"/>
+                                </a:rPr>
+                                <m:t>j</m:t>
+                              </m:r>
+                            </m:sub>
+                          </m:sSub>
+                          <m:sSub>
+                            <m:e>
+                              <m:r>
+                                <m:rPr>
+                                  <m:sty m:val="p"/>
+                                </m:rPr>
+                                <a:rPr lang="en-US" sz="2300" i="0">
+                                  <a:solidFill>
+                                    <a:srgbClr val="1A1A1A"/>
+                                  </a:solidFill>
+                                  <a:latin typeface="Cambria Math" panose="02040503050406030204" pitchFamily="18" charset="0"/>
+                                  <a:ea typeface="Cambria Math"/>
+                                </a:rPr>
+                                <m:t>‖</m:t>
+                              </m:r>
+                            </m:e>
+                            <m:sub>
+                              <m:r>
+                                <m:rPr>
+                                  <m:sty m:val="p"/>
+                                </m:rPr>
+                                <a:rPr lang="en-US" sz="2300" i="0">
+                                  <a:solidFill>
+                                    <a:srgbClr val="1A1A1A"/>
+                                  </a:solidFill>
+                                  <a:latin typeface="Cambria Math" panose="02040503050406030204" pitchFamily="18" charset="0"/>
+                                  <a:ea typeface="Cambria Math"/>
+                                </a:rPr>
+                                <m:t>2</m:t>
+                              </m:r>
+                            </m:sub>
+                          </m:sSub>
+                        </m:e>
+                      </m:box>
+                    </m:oMath>
+                  </m:oMathPara>
+                </a14:m>
+                <a:endParaRPr lang="en-US" sz="2300"/>
+              </a:p>
+            </p:txBody>
+          </p:sp>
+        </mc:Choice>
+        <mc:Fallback>
+          <p:pic>
+            <p:nvPicPr>
+              <p:cNvPr id="8" name="Picture 7" descr="d_{ij}=\|x_i-x_j\|_2"/>
+              <p:cNvPicPr>
+                <a:picLocks noChangeAspect="1"/>
+              </p:cNvPicPr>
+              <p:nvPr/>
+            </p:nvPicPr>
+            <p:blipFill>
+              <a:blip r:embed="rId8"/>
+              <a:stretch>
+                <a:fillRect/>
+              </a:stretch>
+            </p:blipFill>
+            <p:spPr>
+              <a:xfrm>
+                <a:off x="3203448" y="2231136"/>
+                <a:ext cx="1822704" cy="368808"/>
+              </a:xfrm>
+              <a:prstGeom prst="rect">
+                <a:avLst/>
+              </a:prstGeom>
+            </p:spPr>
+          </p:pic>
+        </mc:Fallback>
+      </mc:AlternateContent>
+      <p:pic>
+        <p:nvPicPr>
+          <p:cNvPr id="9" name="Picture 8" descr="review_invariance.png"/>
+          <p:cNvPicPr>
+            <a:picLocks noChangeAspect="1"/>
+          </p:cNvPicPr>
+          <p:nvPr/>
+        </p:nvPicPr>
+        <p:blipFill>
+          <a:blip r:embed="rId9"/>
+          <a:srcRect/>
+          <a:stretch>
+            <a:fillRect/>
+          </a:stretch>
+        </p:blipFill>
+        <p:spPr>
+          <a:xfrm>
+            <a:off x="8432292" y="1371600"/>
+            <a:ext cx="2548128" cy="1389888"/>
+          </a:xfrm>
+          <a:prstGeom prst="rect">
+            <a:avLst/>
+          </a:prstGeom>
+        </p:spPr>
+      </p:pic>
+      <p:sp>
+        <p:nvSpPr>
+          <p:cNvPr id="10" name="TextBox 9"/>
+          <p:cNvSpPr txBox="1"/>
+          <p:nvPr/>
+        </p:nvSpPr>
+        <p:spPr>
+          <a:xfrm>
+            <a:off x="594360" y="2871216"/>
+            <a:ext cx="11000232" cy="360680"/>
+          </a:xfrm>
+          <a:prstGeom prst="rect">
+            <a:avLst/>
+          </a:prstGeom>
+          <a:noFill/>
+        </p:spPr>
+        <p:txBody>
+          <a:bodyPr wrap="square" lIns="0" rIns="0" tIns="0" bIns="0" anchor="t">
+            <a:noAutofit/>
+          </a:bodyPr>
+          <a:lstStyle/>
+          <a:p>
+            <a:pPr algn="l">
+              <a:lnSpc>
+                <a:spcPts val="2048"/>
+              </a:lnSpc>
+            </a:pPr>
+            <a:r>
+              <a:rPr sz="1600" b="0" i="1">
+                <a:solidFill>
+                  <a:srgbClr val="333333"/>
+                </a:solidFill>
+                <a:latin typeface="Cambria Math"/>
+                <a:ea typeface="Noto Sans JP"/>
+              </a:rPr>
+              <a:t>R</a:t>
+            </a:r>
+            <a:r>
+              <a:rPr sz="1600" b="0" lang="ja-JP" altLang="en-US">
+                <a:solidFill>
+                  <a:srgbClr val="333333"/>
+                </a:solidFill>
+                <a:latin typeface="Noto Sans JP"/>
+                <a:ea typeface="Noto Sans JP"/>
+              </a:rPr>
+              <a:t> は回転行列（</a:t>
+            </a:r>
+            <a:r>
+              <a:rPr sz="1600" b="0" i="1">
+                <a:solidFill>
+                  <a:srgbClr val="333333"/>
+                </a:solidFill>
+                <a:latin typeface="Cambria Math"/>
+                <a:ea typeface="Noto Sans JP"/>
+              </a:rPr>
+              <a:t>R</a:t>
+            </a:r>
+            <a:r>
+              <a:rPr sz="1600" b="0" i="1" baseline="30000">
+                <a:solidFill>
+                  <a:srgbClr val="333333"/>
+                </a:solidFill>
+                <a:latin typeface="Cambria Math"/>
+                <a:ea typeface="Noto Sans JP"/>
+              </a:rPr>
+              <a:t>T</a:t>
+            </a:r>
+            <a:r>
+              <a:rPr sz="1600" b="0" i="1">
+                <a:solidFill>
+                  <a:srgbClr val="333333"/>
+                </a:solidFill>
+                <a:latin typeface="Cambria Math"/>
+                <a:ea typeface="Noto Sans JP"/>
+              </a:rPr>
+              <a:t>R</a:t>
+            </a:r>
+            <a:r>
+              <a:rPr sz="1600" b="0" i="0">
+                <a:solidFill>
+                  <a:srgbClr val="333333"/>
+                </a:solidFill>
+                <a:latin typeface="Cambria Math"/>
+                <a:ea typeface="Noto Sans JP"/>
+              </a:rPr>
+              <a:t>=</a:t>
+            </a:r>
+            <a:r>
+              <a:rPr sz="1600" b="0" i="1">
+                <a:solidFill>
+                  <a:srgbClr val="333333"/>
+                </a:solidFill>
+                <a:latin typeface="Cambria Math"/>
+                <a:ea typeface="Noto Sans JP"/>
+              </a:rPr>
+              <a:t>I</a:t>
+            </a:r>
+            <a:r>
+              <a:rPr sz="1600" b="0" lang="ja-JP" altLang="en-US">
+                <a:solidFill>
+                  <a:srgbClr val="333333"/>
+                </a:solidFill>
+                <a:latin typeface="Noto Sans JP"/>
+                <a:ea typeface="Noto Sans JP"/>
+              </a:rPr>
+              <a:t>）、</a:t>
+            </a:r>
+            <a:r>
+              <a:rPr sz="1600" b="0" i="1">
+                <a:solidFill>
+                  <a:srgbClr val="333333"/>
+                </a:solidFill>
+                <a:latin typeface="Cambria Math"/>
+                <a:ea typeface="Noto Sans JP"/>
+              </a:rPr>
+              <a:t>t</a:t>
+            </a:r>
+            <a:r>
+              <a:rPr sz="1600" b="0" lang="ja-JP" altLang="en-US">
+                <a:solidFill>
+                  <a:srgbClr val="333333"/>
+                </a:solidFill>
+                <a:latin typeface="Noto Sans JP"/>
+                <a:ea typeface="Noto Sans JP"/>
+              </a:rPr>
+              <a:t> は並進ベクトル。差を取ると </a:t>
+            </a:r>
+            <a:r>
+              <a:rPr sz="1600" b="0" i="1">
+                <a:solidFill>
+                  <a:srgbClr val="333333"/>
+                </a:solidFill>
+                <a:latin typeface="Cambria Math"/>
+                <a:ea typeface="Noto Sans JP"/>
+              </a:rPr>
+              <a:t>t</a:t>
+            </a:r>
+            <a:r>
+              <a:rPr sz="1600" b="0" lang="ja-JP" altLang="en-US">
+                <a:solidFill>
+                  <a:srgbClr val="333333"/>
+                </a:solidFill>
+                <a:latin typeface="Noto Sans JP"/>
+                <a:ea typeface="Noto Sans JP"/>
+              </a:rPr>
+              <a:t> が消え、回転も距離を変えない。</a:t>
+            </a:r>
+          </a:p>
+        </p:txBody>
+      </p:sp>
+      <mc:AlternateContent xmlns:mc="http://schemas.openxmlformats.org/markup-compatibility/2006">
+        <mc:Choice xmlns:a14="http://schemas.microsoft.com/office/drawing/2010/main" Requires="a14">
+          <p:sp>
+            <p:nvSpPr>
+              <p:cNvPr id="11" name="TextBox 10"/>
+              <p:cNvSpPr txBox="1"/>
+              <p:nvPr/>
+            </p:nvSpPr>
+            <p:spPr>
+              <a:xfrm>
+                <a:off x="457200" y="3447288"/>
+                <a:ext cx="11277295" cy="423672"/>
+              </a:xfrm>
+              <a:prstGeom prst="rect">
+                <a:avLst/>
+              </a:prstGeom>
+              <a:noFill/>
+            </p:spPr>
+            <p:txBody>
+              <a:bodyPr wrap="none" lIns="0" rIns="0" tIns="0" bIns="0" anchor="ctr">
+                <a:noAutofit/>
+              </a:bodyPr>
+              <a:lstStyle/>
+              <a:p>
+                <a:pPr algn="ctr"/>
+                <a14:m>
+                  <m:oMathPara xmlns:m="http://schemas.openxmlformats.org/officeDocument/2006/math">
+                    <m:oMathParaPr>
+                      <m:jc m:val="center"/>
+                    </m:oMathParaPr>
+                    <m:oMath>
+                      <m:box>
+                        <m:e>
+                          <m:r>
+                            <m:rPr>
+                              <m:sty m:val="p"/>
+                            </m:rPr>
+                            <a:rPr lang="en-US" sz="2100" i="0">
+                              <a:solidFill>
+                                <a:srgbClr val="1A1A1A"/>
+                              </a:solidFill>
+                              <a:latin typeface="Cambria Math" panose="02040503050406030204" pitchFamily="18" charset="0"/>
+                              <a:ea typeface="Cambria Math"/>
+                            </a:rPr>
+                            <m:t>‖</m:t>
+                          </m:r>
+                          <m:r>
+                            <m:rPr>
+                              <m:sty m:val="p"/>
+                            </m:rPr>
+                            <a:rPr lang="en-US" sz="2100" i="0">
+                              <a:solidFill>
+                                <a:srgbClr val="1A1A1A"/>
+                              </a:solidFill>
+                              <a:latin typeface="Cambria Math" panose="02040503050406030204" pitchFamily="18" charset="0"/>
+                              <a:ea typeface="Cambria Math"/>
+                            </a:rPr>
+                            <m:t>(</m:t>
+                          </m:r>
+                          <m:r>
+                            <m:rPr/>
+                            <a:rPr lang="en-US" sz="2100" i="1">
+                              <a:solidFill>
+                                <a:srgbClr val="1A1A1A"/>
+                              </a:solidFill>
+                              <a:latin typeface="Cambria Math" panose="02040503050406030204" pitchFamily="18" charset="0"/>
+                              <a:ea typeface="Cambria Math"/>
+                            </a:rPr>
+                            <m:t>R</m:t>
+                          </m:r>
+                          <m:sSub>
+                            <m:e>
+                              <m:r>
+                                <m:rPr/>
+                                <a:rPr lang="en-US" sz="2100" i="1">
+                                  <a:solidFill>
+                                    <a:srgbClr val="1A1A1A"/>
+                                  </a:solidFill>
+                                  <a:latin typeface="Cambria Math" panose="02040503050406030204" pitchFamily="18" charset="0"/>
+                                  <a:ea typeface="Cambria Math"/>
+                                </a:rPr>
+                                <m:t>x</m:t>
+                              </m:r>
+                            </m:e>
+                            <m:sub>
+                              <m:r>
+                                <m:rPr/>
+                                <a:rPr lang="en-US" sz="2100" i="1">
+                                  <a:solidFill>
+                                    <a:srgbClr val="1A1A1A"/>
+                                  </a:solidFill>
+                                  <a:latin typeface="Cambria Math" panose="02040503050406030204" pitchFamily="18" charset="0"/>
+                                  <a:ea typeface="Cambria Math"/>
+                                </a:rPr>
+                                <m:t>i</m:t>
+                              </m:r>
+                            </m:sub>
+                          </m:sSub>
+                          <m:r>
+                            <m:rPr>
+                              <m:sty m:val="p"/>
+                            </m:rPr>
+                            <a:rPr lang="en-US" sz="2100" i="0">
+                              <a:solidFill>
+                                <a:srgbClr val="1A1A1A"/>
+                              </a:solidFill>
+                              <a:latin typeface="Cambria Math" panose="02040503050406030204" pitchFamily="18" charset="0"/>
+                              <a:ea typeface="Cambria Math"/>
+                            </a:rPr>
+                            <m:t>+</m:t>
+                          </m:r>
+                          <m:r>
+                            <m:rPr/>
+                            <a:rPr lang="en-US" sz="2100" i="1">
+                              <a:solidFill>
+                                <a:srgbClr val="1A1A1A"/>
+                              </a:solidFill>
+                              <a:latin typeface="Cambria Math" panose="02040503050406030204" pitchFamily="18" charset="0"/>
+                              <a:ea typeface="Cambria Math"/>
+                            </a:rPr>
+                            <m:t>t</m:t>
+                          </m:r>
+                          <m:r>
+                            <m:rPr>
+                              <m:sty m:val="p"/>
+                            </m:rPr>
+                            <a:rPr lang="en-US" sz="2100" i="0">
+                              <a:solidFill>
+                                <a:srgbClr val="1A1A1A"/>
+                              </a:solidFill>
+                              <a:latin typeface="Cambria Math" panose="02040503050406030204" pitchFamily="18" charset="0"/>
+                              <a:ea typeface="Cambria Math"/>
+                            </a:rPr>
+                            <m:t>)</m:t>
+                          </m:r>
+                          <m:r>
+                            <m:rPr>
+                              <m:sty m:val="p"/>
+                            </m:rPr>
+                            <a:rPr lang="en-US" sz="2100" i="0">
+                              <a:solidFill>
+                                <a:srgbClr val="1A1A1A"/>
+                              </a:solidFill>
+                              <a:latin typeface="Cambria Math" panose="02040503050406030204" pitchFamily="18" charset="0"/>
+                              <a:ea typeface="Cambria Math"/>
+                            </a:rPr>
+                            <m:t>−</m:t>
+                          </m:r>
+                          <m:r>
+                            <m:rPr>
+                              <m:sty m:val="p"/>
+                            </m:rPr>
+                            <a:rPr lang="en-US" sz="2100" i="0">
+                              <a:solidFill>
+                                <a:srgbClr val="1A1A1A"/>
+                              </a:solidFill>
+                              <a:latin typeface="Cambria Math" panose="02040503050406030204" pitchFamily="18" charset="0"/>
+                              <a:ea typeface="Cambria Math"/>
+                            </a:rPr>
+                            <m:t>(</m:t>
+                          </m:r>
+                          <m:r>
+                            <m:rPr/>
+                            <a:rPr lang="en-US" sz="2100" i="1">
+                              <a:solidFill>
+                                <a:srgbClr val="1A1A1A"/>
+                              </a:solidFill>
+                              <a:latin typeface="Cambria Math" panose="02040503050406030204" pitchFamily="18" charset="0"/>
+                              <a:ea typeface="Cambria Math"/>
+                            </a:rPr>
+                            <m:t>R</m:t>
+                          </m:r>
+                          <m:sSub>
+                            <m:e>
+                              <m:r>
+                                <m:rPr/>
+                                <a:rPr lang="en-US" sz="2100" i="1">
+                                  <a:solidFill>
+                                    <a:srgbClr val="1A1A1A"/>
+                                  </a:solidFill>
+                                  <a:latin typeface="Cambria Math" panose="02040503050406030204" pitchFamily="18" charset="0"/>
+                                  <a:ea typeface="Cambria Math"/>
+                                </a:rPr>
+                                <m:t>x</m:t>
+                              </m:r>
+                            </m:e>
+                            <m:sub>
+                              <m:r>
+                                <m:rPr/>
+                                <a:rPr lang="en-US" sz="2100" i="1">
+                                  <a:solidFill>
+                                    <a:srgbClr val="1A1A1A"/>
+                                  </a:solidFill>
+                                  <a:latin typeface="Cambria Math" panose="02040503050406030204" pitchFamily="18" charset="0"/>
+                                  <a:ea typeface="Cambria Math"/>
+                                </a:rPr>
+                                <m:t>j</m:t>
+                              </m:r>
+                            </m:sub>
+                          </m:sSub>
+                          <m:r>
+                            <m:rPr>
+                              <m:sty m:val="p"/>
+                            </m:rPr>
+                            <a:rPr lang="en-US" sz="2100" i="0">
+                              <a:solidFill>
+                                <a:srgbClr val="1A1A1A"/>
+                              </a:solidFill>
+                              <a:latin typeface="Cambria Math" panose="02040503050406030204" pitchFamily="18" charset="0"/>
+                              <a:ea typeface="Cambria Math"/>
+                            </a:rPr>
+                            <m:t>+</m:t>
+                          </m:r>
+                          <m:r>
+                            <m:rPr/>
+                            <a:rPr lang="en-US" sz="2100" i="1">
+                              <a:solidFill>
+                                <a:srgbClr val="1A1A1A"/>
+                              </a:solidFill>
+                              <a:latin typeface="Cambria Math" panose="02040503050406030204" pitchFamily="18" charset="0"/>
+                              <a:ea typeface="Cambria Math"/>
+                            </a:rPr>
+                            <m:t>t</m:t>
+                          </m:r>
+                          <m:r>
+                            <m:rPr>
+                              <m:sty m:val="p"/>
+                            </m:rPr>
+                            <a:rPr lang="en-US" sz="2100" i="0">
+                              <a:solidFill>
+                                <a:srgbClr val="1A1A1A"/>
+                              </a:solidFill>
+                              <a:latin typeface="Cambria Math" panose="02040503050406030204" pitchFamily="18" charset="0"/>
+                              <a:ea typeface="Cambria Math"/>
+                            </a:rPr>
+                            <m:t>)</m:t>
+                          </m:r>
+                          <m:sSup>
+                            <m:e>
+                              <m:r>
+                                <m:rPr>
+                                  <m:sty m:val="p"/>
+                                </m:rPr>
+                                <a:rPr lang="en-US" sz="2100" i="0">
+                                  <a:solidFill>
+                                    <a:srgbClr val="1A1A1A"/>
+                                  </a:solidFill>
+                                  <a:latin typeface="Cambria Math" panose="02040503050406030204" pitchFamily="18" charset="0"/>
+                                  <a:ea typeface="Cambria Math"/>
+                                </a:rPr>
+                                <m:t>‖</m:t>
+                              </m:r>
+                            </m:e>
+                            <m:sup>
+                              <m:r>
+                                <m:rPr>
+                                  <m:sty m:val="p"/>
+                                </m:rPr>
+                                <a:rPr lang="en-US" sz="2100" i="0">
+                                  <a:solidFill>
+                                    <a:srgbClr val="1A1A1A"/>
+                                  </a:solidFill>
+                                  <a:latin typeface="Cambria Math" panose="02040503050406030204" pitchFamily="18" charset="0"/>
+                                  <a:ea typeface="Cambria Math"/>
+                                </a:rPr>
+                                <m:t>2</m:t>
+                              </m:r>
+                            </m:sup>
+                          </m:sSup>
+                          <m:r>
+                            <m:rPr>
+                              <m:sty m:val="p"/>
+                            </m:rPr>
+                            <a:rPr lang="en-US" sz="2100" i="0">
+                              <a:solidFill>
+                                <a:srgbClr val="1A1A1A"/>
+                              </a:solidFill>
+                              <a:latin typeface="Cambria Math" panose="02040503050406030204" pitchFamily="18" charset="0"/>
+                              <a:ea typeface="Cambria Math"/>
+                            </a:rPr>
+                            <m:t>=</m:t>
+                          </m:r>
+                          <m:r>
+                            <m:rPr>
+                              <m:sty m:val="p"/>
+                            </m:rPr>
+                            <a:rPr lang="en-US" sz="2100" i="0">
+                              <a:solidFill>
+                                <a:srgbClr val="1A1A1A"/>
+                              </a:solidFill>
+                              <a:latin typeface="Cambria Math" panose="02040503050406030204" pitchFamily="18" charset="0"/>
+                              <a:ea typeface="Cambria Math"/>
+                            </a:rPr>
+                            <m:t>(</m:t>
+                          </m:r>
+                          <m:sSub>
+                            <m:e>
+                              <m:r>
+                                <m:rPr/>
+                                <a:rPr lang="en-US" sz="2100" i="1">
+                                  <a:solidFill>
+                                    <a:srgbClr val="1A1A1A"/>
+                                  </a:solidFill>
+                                  <a:latin typeface="Cambria Math" panose="02040503050406030204" pitchFamily="18" charset="0"/>
+                                  <a:ea typeface="Cambria Math"/>
+                                </a:rPr>
+                                <m:t>x</m:t>
+                              </m:r>
+                            </m:e>
+                            <m:sub>
+                              <m:r>
+                                <m:rPr/>
+                                <a:rPr lang="en-US" sz="2100" i="1">
+                                  <a:solidFill>
+                                    <a:srgbClr val="1A1A1A"/>
+                                  </a:solidFill>
+                                  <a:latin typeface="Cambria Math" panose="02040503050406030204" pitchFamily="18" charset="0"/>
+                                  <a:ea typeface="Cambria Math"/>
+                                </a:rPr>
+                                <m:t>i</m:t>
+                              </m:r>
+                            </m:sub>
+                          </m:sSub>
+                          <m:r>
+                            <m:rPr>
+                              <m:sty m:val="p"/>
+                            </m:rPr>
+                            <a:rPr lang="en-US" sz="2100" i="0">
+                              <a:solidFill>
+                                <a:srgbClr val="1A1A1A"/>
+                              </a:solidFill>
+                              <a:latin typeface="Cambria Math" panose="02040503050406030204" pitchFamily="18" charset="0"/>
+                              <a:ea typeface="Cambria Math"/>
+                            </a:rPr>
+                            <m:t>−</m:t>
+                          </m:r>
+                          <m:sSub>
+                            <m:e>
+                              <m:r>
+                                <m:rPr/>
+                                <a:rPr lang="en-US" sz="2100" i="1">
+                                  <a:solidFill>
+                                    <a:srgbClr val="1A1A1A"/>
+                                  </a:solidFill>
+                                  <a:latin typeface="Cambria Math" panose="02040503050406030204" pitchFamily="18" charset="0"/>
+                                  <a:ea typeface="Cambria Math"/>
+                                </a:rPr>
+                                <m:t>x</m:t>
+                              </m:r>
+                            </m:e>
+                            <m:sub>
+                              <m:r>
+                                <m:rPr/>
+                                <a:rPr lang="en-US" sz="2100" i="1">
+                                  <a:solidFill>
+                                    <a:srgbClr val="1A1A1A"/>
+                                  </a:solidFill>
+                                  <a:latin typeface="Cambria Math" panose="02040503050406030204" pitchFamily="18" charset="0"/>
+                                  <a:ea typeface="Cambria Math"/>
+                                </a:rPr>
+                                <m:t>j</m:t>
+                              </m:r>
+                            </m:sub>
+                          </m:sSub>
+                          <m:sSup>
+                            <m:e>
+                              <m:r>
+                                <m:rPr>
+                                  <m:sty m:val="p"/>
+                                </m:rPr>
+                                <a:rPr lang="en-US" sz="2100" i="0">
+                                  <a:solidFill>
+                                    <a:srgbClr val="1A1A1A"/>
+                                  </a:solidFill>
+                                  <a:latin typeface="Cambria Math" panose="02040503050406030204" pitchFamily="18" charset="0"/>
+                                  <a:ea typeface="Cambria Math"/>
+                                </a:rPr>
+                                <m:t>)</m:t>
+                              </m:r>
+                            </m:e>
+                            <m:sup>
+                              <m:r>
+                                <m:rPr/>
+                                <a:rPr lang="en-US" sz="2100" i="1">
+                                  <a:solidFill>
+                                    <a:srgbClr val="1A1A1A"/>
+                                  </a:solidFill>
+                                  <a:latin typeface="Cambria Math" panose="02040503050406030204" pitchFamily="18" charset="0"/>
+                                  <a:ea typeface="Cambria Math"/>
+                                </a:rPr>
+                                <m:t>T</m:t>
+                              </m:r>
+                            </m:sup>
+                          </m:sSup>
+                          <m:sSup>
+                            <m:e>
+                              <m:r>
+                                <m:rPr/>
+                                <a:rPr lang="en-US" sz="2100" i="1">
+                                  <a:solidFill>
+                                    <a:srgbClr val="1A1A1A"/>
+                                  </a:solidFill>
+                                  <a:latin typeface="Cambria Math" panose="02040503050406030204" pitchFamily="18" charset="0"/>
+                                  <a:ea typeface="Cambria Math"/>
+                                </a:rPr>
+                                <m:t>R</m:t>
+                              </m:r>
+                            </m:e>
+                            <m:sup>
+                              <m:r>
+                                <m:rPr/>
+                                <a:rPr lang="en-US" sz="2100" i="1">
+                                  <a:solidFill>
+                                    <a:srgbClr val="1A1A1A"/>
+                                  </a:solidFill>
+                                  <a:latin typeface="Cambria Math" panose="02040503050406030204" pitchFamily="18" charset="0"/>
+                                  <a:ea typeface="Cambria Math"/>
+                                </a:rPr>
+                                <m:t>T</m:t>
+                              </m:r>
+                            </m:sup>
+                          </m:sSup>
+                          <m:r>
+                            <m:rPr/>
+                            <a:rPr lang="en-US" sz="2100" i="1">
+                              <a:solidFill>
+                                <a:srgbClr val="1A1A1A"/>
+                              </a:solidFill>
+                              <a:latin typeface="Cambria Math" panose="02040503050406030204" pitchFamily="18" charset="0"/>
+                              <a:ea typeface="Cambria Math"/>
+                            </a:rPr>
+                            <m:t>R</m:t>
+                          </m:r>
+                          <m:r>
+                            <m:rPr>
+                              <m:sty m:val="p"/>
+                            </m:rPr>
+                            <a:rPr lang="en-US" sz="2100" i="0">
+                              <a:solidFill>
+                                <a:srgbClr val="1A1A1A"/>
+                              </a:solidFill>
+                              <a:latin typeface="Cambria Math" panose="02040503050406030204" pitchFamily="18" charset="0"/>
+                              <a:ea typeface="Cambria Math"/>
+                            </a:rPr>
+                            <m:t>(</m:t>
+                          </m:r>
+                          <m:sSub>
+                            <m:e>
+                              <m:r>
+                                <m:rPr/>
+                                <a:rPr lang="en-US" sz="2100" i="1">
+                                  <a:solidFill>
+                                    <a:srgbClr val="1A1A1A"/>
+                                  </a:solidFill>
+                                  <a:latin typeface="Cambria Math" panose="02040503050406030204" pitchFamily="18" charset="0"/>
+                                  <a:ea typeface="Cambria Math"/>
+                                </a:rPr>
+                                <m:t>x</m:t>
+                              </m:r>
+                            </m:e>
+                            <m:sub>
+                              <m:r>
+                                <m:rPr/>
+                                <a:rPr lang="en-US" sz="2100" i="1">
+                                  <a:solidFill>
+                                    <a:srgbClr val="1A1A1A"/>
+                                  </a:solidFill>
+                                  <a:latin typeface="Cambria Math" panose="02040503050406030204" pitchFamily="18" charset="0"/>
+                                  <a:ea typeface="Cambria Math"/>
+                                </a:rPr>
+                                <m:t>i</m:t>
+                              </m:r>
+                            </m:sub>
+                          </m:sSub>
+                          <m:r>
+                            <m:rPr>
+                              <m:sty m:val="p"/>
+                            </m:rPr>
+                            <a:rPr lang="en-US" sz="2100" i="0">
+                              <a:solidFill>
+                                <a:srgbClr val="1A1A1A"/>
+                              </a:solidFill>
+                              <a:latin typeface="Cambria Math" panose="02040503050406030204" pitchFamily="18" charset="0"/>
+                              <a:ea typeface="Cambria Math"/>
+                            </a:rPr>
+                            <m:t>−</m:t>
+                          </m:r>
+                          <m:sSub>
+                            <m:e>
+                              <m:r>
+                                <m:rPr/>
+                                <a:rPr lang="en-US" sz="2100" i="1">
+                                  <a:solidFill>
+                                    <a:srgbClr val="1A1A1A"/>
+                                  </a:solidFill>
+                                  <a:latin typeface="Cambria Math" panose="02040503050406030204" pitchFamily="18" charset="0"/>
+                                  <a:ea typeface="Cambria Math"/>
+                                </a:rPr>
+                                <m:t>x</m:t>
+                              </m:r>
+                            </m:e>
+                            <m:sub>
+                              <m:r>
+                                <m:rPr/>
+                                <a:rPr lang="en-US" sz="2100" i="1">
+                                  <a:solidFill>
+                                    <a:srgbClr val="1A1A1A"/>
+                                  </a:solidFill>
+                                  <a:latin typeface="Cambria Math" panose="02040503050406030204" pitchFamily="18" charset="0"/>
+                                  <a:ea typeface="Cambria Math"/>
+                                </a:rPr>
+                                <m:t>j</m:t>
+                              </m:r>
+                            </m:sub>
+                          </m:sSub>
+                          <m:r>
+                            <m:rPr>
+                              <m:sty m:val="p"/>
+                            </m:rPr>
+                            <a:rPr lang="en-US" sz="2100" i="0">
+                              <a:solidFill>
+                                <a:srgbClr val="1A1A1A"/>
+                              </a:solidFill>
+                              <a:latin typeface="Cambria Math" panose="02040503050406030204" pitchFamily="18" charset="0"/>
+                              <a:ea typeface="Cambria Math"/>
+                            </a:rPr>
+                            <m:t>)</m:t>
+                          </m:r>
+                          <m:r>
+                            <m:rPr>
+                              <m:sty m:val="p"/>
+                            </m:rPr>
+                            <a:rPr lang="en-US" sz="2100" i="0">
+                              <a:solidFill>
+                                <a:srgbClr val="1A1A1A"/>
+                              </a:solidFill>
+                              <a:latin typeface="Cambria Math" panose="02040503050406030204" pitchFamily="18" charset="0"/>
+                              <a:ea typeface="Cambria Math"/>
+                            </a:rPr>
+                            <m:t>=</m:t>
+                          </m:r>
+                          <m:sSubSup>
+                            <m:e>
+                              <m:r>
+                                <m:rPr/>
+                                <a:rPr lang="en-US" sz="2100" i="1">
+                                  <a:solidFill>
+                                    <a:srgbClr val="1A1A1A"/>
+                                  </a:solidFill>
+                                  <a:latin typeface="Cambria Math" panose="02040503050406030204" pitchFamily="18" charset="0"/>
+                                  <a:ea typeface="Cambria Math"/>
+                                </a:rPr>
+                                <m:t>d</m:t>
+                              </m:r>
+                            </m:e>
+                            <m:sub>
+                              <m:box>
+                                <m:e>
+                                  <m:r>
+                                    <m:rPr/>
+                                    <a:rPr lang="en-US" sz="2100" i="1">
+                                      <a:solidFill>
+                                        <a:srgbClr val="1A1A1A"/>
+                                      </a:solidFill>
+                                      <a:latin typeface="Cambria Math" panose="02040503050406030204" pitchFamily="18" charset="0"/>
+                                      <a:ea typeface="Cambria Math"/>
+                                    </a:rPr>
+                                    <m:t>i</m:t>
+                                  </m:r>
+                                  <m:r>
+                                    <m:rPr/>
+                                    <a:rPr lang="en-US" sz="2100" i="1">
+                                      <a:solidFill>
+                                        <a:srgbClr val="1A1A1A"/>
+                                      </a:solidFill>
+                                      <a:latin typeface="Cambria Math" panose="02040503050406030204" pitchFamily="18" charset="0"/>
+                                      <a:ea typeface="Cambria Math"/>
+                                    </a:rPr>
+                                    <m:t>j</m:t>
+                                  </m:r>
+                                </m:e>
+                              </m:box>
+                            </m:sub>
+                            <m:sup>
+                              <m:r>
+                                <m:rPr>
+                                  <m:sty m:val="p"/>
+                                </m:rPr>
+                                <a:rPr lang="en-US" sz="2100" i="0">
+                                  <a:solidFill>
+                                    <a:srgbClr val="1A1A1A"/>
+                                  </a:solidFill>
+                                  <a:latin typeface="Cambria Math" panose="02040503050406030204" pitchFamily="18" charset="0"/>
+                                  <a:ea typeface="Cambria Math"/>
+                                </a:rPr>
+                                <m:t>2</m:t>
+                              </m:r>
+                            </m:sup>
+                          </m:sSubSup>
+                        </m:e>
+                      </m:box>
+                    </m:oMath>
+                  </m:oMathPara>
+                </a14:m>
+                <a:endParaRPr lang="en-US" sz="2100"/>
+              </a:p>
+            </p:txBody>
+          </p:sp>
+        </mc:Choice>
+        <mc:Fallback>
+          <p:pic>
+            <p:nvPicPr>
+              <p:cNvPr id="12" name="Picture 11" descr="\|(Rx_i+t)-(Rx_j+t)\|^2=(x_i-x_j)^TR^TR(x_i-x_j)=d_{ij}^2"/>
+              <p:cNvPicPr>
+                <a:picLocks noChangeAspect="1"/>
+              </p:cNvPicPr>
+              <p:nvPr/>
+            </p:nvPicPr>
+            <p:blipFill>
+              <a:blip r:embed="rId10"/>
+              <a:stretch>
+                <a:fillRect/>
+              </a:stretch>
+            </p:blipFill>
+            <p:spPr>
+              <a:xfrm>
+                <a:off x="3238347" y="3447288"/>
+                <a:ext cx="5715000" cy="423672"/>
+              </a:xfrm>
+              <a:prstGeom prst="rect">
+                <a:avLst/>
+              </a:prstGeom>
+            </p:spPr>
+          </p:pic>
+        </mc:Fallback>
+      </mc:AlternateContent>
+      <p:sp>
+        <p:nvSpPr>
+          <p:cNvPr id="13" name="TextBox 12"/>
+          <p:cNvSpPr txBox="1"/>
+          <p:nvPr/>
+        </p:nvSpPr>
+        <p:spPr>
+          <a:xfrm>
+            <a:off x="594360" y="3959352"/>
+            <a:ext cx="11000232" cy="352552"/>
+          </a:xfrm>
+          <a:prstGeom prst="rect">
+            <a:avLst/>
+          </a:prstGeom>
+          <a:noFill/>
+        </p:spPr>
+        <p:txBody>
+          <a:bodyPr wrap="square" lIns="0" rIns="0" tIns="0" bIns="0" anchor="t">
+            <a:noAutofit/>
+          </a:bodyPr>
+          <a:lstStyle/>
+          <a:p>
+            <a:pPr algn="l">
+              <a:lnSpc>
+                <a:spcPts val="1984"/>
+              </a:lnSpc>
+            </a:pPr>
+            <a:r>
+              <a:rPr sz="1550" b="0" lang="ja-JP" altLang="en-US">
+                <a:solidFill>
+                  <a:srgbClr val="333333"/>
+                </a:solidFill>
+                <a:latin typeface="Noto Sans JP"/>
+                <a:ea typeface="Noto Sans JP"/>
+              </a:rPr>
+              <a:t>接触マップは距離を0か1へ変換した表。この演習では8 Å未満を接触とし、配列で隣接する残基対を除く。</a:t>
+            </a:r>
+          </a:p>
+        </p:txBody>
+      </p:sp>
+      <mc:AlternateContent xmlns:mc="http://schemas.openxmlformats.org/markup-compatibility/2006">
+        <mc:Choice xmlns:a14="http://schemas.microsoft.com/office/drawing/2010/main" Requires="a14">
+          <p:sp>
+            <p:nvSpPr>
+              <p:cNvPr id="14" name="TextBox 13"/>
+              <p:cNvSpPr txBox="1"/>
+              <p:nvPr/>
+            </p:nvSpPr>
+            <p:spPr>
+              <a:xfrm>
+                <a:off x="457200" y="4572000"/>
+                <a:ext cx="11277295" cy="429768"/>
               </a:xfrm>
               <a:prstGeom prst="rect">
                 <a:avLst/>
@@ -12797,14 +14510,14 @@
                             <m:e>
                               <m:r>
                                 <m:rPr/>
-                                <a:rPr lang="en-US" sz="2500" i="1">
+                                <a:rPr lang="en-US" sz="2300" i="1">
                                   <a:solidFill>
                                     <a:srgbClr val="1A1A1A"/>
                                   </a:solidFill>
                                   <a:latin typeface="Cambria Math" panose="02040503050406030204" pitchFamily="18" charset="0"/>
                                   <a:ea typeface="Cambria Math"/>
                                 </a:rPr>
-                                <m:t>d</m:t>
+                                <m:t>C</m:t>
                               </m:r>
                             </m:e>
                             <m:sub>
@@ -12812,7 +14525,7 @@
                                 <m:e>
                                   <m:r>
                                     <m:rPr/>
-                                    <a:rPr lang="en-US" sz="2500" i="1">
+                                    <a:rPr lang="en-US" sz="2300" i="1">
                                       <a:solidFill>
                                         <a:srgbClr val="1A1A1A"/>
                                       </a:solidFill>
@@ -12823,7 +14536,7 @@
                                   </m:r>
                                   <m:r>
                                     <m:rPr/>
-                                    <a:rPr lang="en-US" sz="2500" i="1">
+                                    <a:rPr lang="en-US" sz="2300" i="1">
                                       <a:solidFill>
                                         <a:srgbClr val="1A1A1A"/>
                                       </a:solidFill>
@@ -12840,7 +14553,7 @@
                             <m:rPr>
                               <m:sty m:val="p"/>
                             </m:rPr>
-                            <a:rPr lang="en-US" sz="2500" i="0">
+                            <a:rPr lang="en-US" sz="2300" i="0">
                               <a:solidFill>
                                 <a:srgbClr val="1A1A1A"/>
                               </a:solidFill>
@@ -12849,392 +14562,48 @@
                             </a:rPr>
                             <m:t>=</m:t>
                           </m:r>
+                          <m:box>
+                            <m:e>
+                              <m:r>
+                                <m:rPr>
+                                  <m:sty m:val="p"/>
+                                </m:rPr>
+                                <a:rPr lang="en-US" sz="2300" i="0">
+                                  <a:solidFill>
+                                    <a:srgbClr val="1A1A1A"/>
+                                  </a:solidFill>
+                                  <a:latin typeface="Cambria Math" panose="02040503050406030204" pitchFamily="18" charset="0"/>
+                                  <a:ea typeface="Cambria Math"/>
+                                </a:rPr>
+                                <m:t>1</m:t>
+                              </m:r>
+                            </m:e>
+                          </m:box>
                           <m:r>
                             <m:rPr>
                               <m:sty m:val="p"/>
                             </m:rPr>
-                            <a:rPr lang="en-US" sz="2500" i="0">
+                            <a:rPr lang="en-US" sz="2300" i="0">
                               <a:solidFill>
                                 <a:srgbClr val="1A1A1A"/>
                               </a:solidFill>
                               <a:latin typeface="Cambria Math" panose="02040503050406030204" pitchFamily="18" charset="0"/>
                               <a:ea typeface="Cambria Math"/>
                             </a:rPr>
-                            <m:t>‖</m:t>
+                            <m:t>[</m:t>
                           </m:r>
                           <m:sSub>
                             <m:e>
                               <m:r>
                                 <m:rPr/>
-                                <a:rPr lang="en-US" sz="2500" i="1">
+                                <a:rPr lang="en-US" sz="2300" i="1">
                                   <a:solidFill>
                                     <a:srgbClr val="1A1A1A"/>
                                   </a:solidFill>
                                   <a:latin typeface="Cambria Math" panose="02040503050406030204" pitchFamily="18" charset="0"/>
                                   <a:ea typeface="Cambria Math"/>
                                 </a:rPr>
-                                <m:t>x</m:t>
-                              </m:r>
-                            </m:e>
-                            <m:sub>
-                              <m:r>
-                                <m:rPr/>
-                                <a:rPr lang="en-US" sz="2500" i="1">
-                                  <a:solidFill>
-                                    <a:srgbClr val="1A1A1A"/>
-                                  </a:solidFill>
-                                  <a:latin typeface="Cambria Math" panose="02040503050406030204" pitchFamily="18" charset="0"/>
-                                  <a:ea typeface="Cambria Math"/>
-                                </a:rPr>
-                                <m:t>i</m:t>
-                              </m:r>
-                            </m:sub>
-                          </m:sSub>
-                          <m:r>
-                            <m:rPr>
-                              <m:sty m:val="p"/>
-                            </m:rPr>
-                            <a:rPr lang="en-US" sz="2500" i="0">
-                              <a:solidFill>
-                                <a:srgbClr val="1A1A1A"/>
-                              </a:solidFill>
-                              <a:latin typeface="Cambria Math" panose="02040503050406030204" pitchFamily="18" charset="0"/>
-                              <a:ea typeface="Cambria Math"/>
-                            </a:rPr>
-                            <m:t>−</m:t>
-                          </m:r>
-                          <m:sSub>
-                            <m:e>
-                              <m:r>
-                                <m:rPr/>
-                                <a:rPr lang="en-US" sz="2500" i="1">
-                                  <a:solidFill>
-                                    <a:srgbClr val="1A1A1A"/>
-                                  </a:solidFill>
-                                  <a:latin typeface="Cambria Math" panose="02040503050406030204" pitchFamily="18" charset="0"/>
-                                  <a:ea typeface="Cambria Math"/>
-                                </a:rPr>
-                                <m:t>x</m:t>
-                              </m:r>
-                            </m:e>
-                            <m:sub>
-                              <m:r>
-                                <m:rPr/>
-                                <a:rPr lang="en-US" sz="2500" i="1">
-                                  <a:solidFill>
-                                    <a:srgbClr val="1A1A1A"/>
-                                  </a:solidFill>
-                                  <a:latin typeface="Cambria Math" panose="02040503050406030204" pitchFamily="18" charset="0"/>
-                                  <a:ea typeface="Cambria Math"/>
-                                </a:rPr>
-                                <m:t>j</m:t>
-                              </m:r>
-                            </m:sub>
-                          </m:sSub>
-                          <m:sSub>
-                            <m:e>
-                              <m:r>
-                                <m:rPr>
-                                  <m:sty m:val="p"/>
-                                </m:rPr>
-                                <a:rPr lang="en-US" sz="2500" i="0">
-                                  <a:solidFill>
-                                    <a:srgbClr val="1A1A1A"/>
-                                  </a:solidFill>
-                                  <a:latin typeface="Cambria Math" panose="02040503050406030204" pitchFamily="18" charset="0"/>
-                                  <a:ea typeface="Cambria Math"/>
-                                </a:rPr>
-                                <m:t>‖</m:t>
-                              </m:r>
-                            </m:e>
-                            <m:sub>
-                              <m:r>
-                                <m:rPr>
-                                  <m:sty m:val="p"/>
-                                </m:rPr>
-                                <a:rPr lang="en-US" sz="2500" i="0">
-                                  <a:solidFill>
-                                    <a:srgbClr val="1A1A1A"/>
-                                  </a:solidFill>
-                                  <a:latin typeface="Cambria Math" panose="02040503050406030204" pitchFamily="18" charset="0"/>
-                                  <a:ea typeface="Cambria Math"/>
-                                </a:rPr>
-                                <m:t>2</m:t>
-                              </m:r>
-                            </m:sub>
-                          </m:sSub>
-                        </m:e>
-                      </m:box>
-                    </m:oMath>
-                  </m:oMathPara>
-                </a14:m>
-                <a:endParaRPr lang="en-US" sz="2500"/>
-              </a:p>
-            </p:txBody>
-          </p:sp>
-        </mc:Choice>
-        <mc:Fallback>
-          <p:pic>
-            <p:nvPicPr>
-              <p:cNvPr id="17" name="Picture 16" descr="d_{ij}=\|x_i-x_j\|_2"/>
-              <p:cNvPicPr>
-                <a:picLocks noChangeAspect="1"/>
-              </p:cNvPicPr>
-              <p:nvPr/>
-            </p:nvPicPr>
-            <p:blipFill>
-              <a:blip r:embed="rId8"/>
-              <a:stretch>
-                <a:fillRect/>
-              </a:stretch>
-            </p:blipFill>
-            <p:spPr>
-              <a:xfrm>
-                <a:off x="5108295" y="2002536"/>
-                <a:ext cx="1975104" cy="396240"/>
-              </a:xfrm>
-              <a:prstGeom prst="rect">
-                <a:avLst/>
-              </a:prstGeom>
-            </p:spPr>
-          </p:pic>
-        </mc:Fallback>
-      </mc:AlternateContent>
-      <p:sp>
-        <p:nvSpPr>
-          <p:cNvPr id="18" name="TextBox 17"/>
-          <p:cNvSpPr txBox="1"/>
-          <p:nvPr/>
-        </p:nvSpPr>
-        <p:spPr>
-          <a:xfrm>
-            <a:off x="594360" y="2523744"/>
-            <a:ext cx="11000232" cy="360680"/>
-          </a:xfrm>
-          <a:prstGeom prst="rect">
-            <a:avLst/>
-          </a:prstGeom>
-          <a:noFill/>
-        </p:spPr>
-        <p:txBody>
-          <a:bodyPr wrap="square" lIns="0" rIns="0" tIns="0" bIns="0" anchor="t">
-            <a:noAutofit/>
-          </a:bodyPr>
-          <a:lstStyle/>
-          <a:p>
-            <a:pPr algn="l">
-              <a:lnSpc>
-                <a:spcPts val="2048"/>
-              </a:lnSpc>
-            </a:pPr>
-            <a:r>
-              <a:rPr sz="1600" b="0" i="1">
-                <a:solidFill>
-                  <a:srgbClr val="333333"/>
-                </a:solidFill>
-                <a:latin typeface="Cambria Math"/>
-                <a:ea typeface="Noto Sans JP"/>
-              </a:rPr>
-              <a:t>R</a:t>
-            </a:r>
-            <a:r>
-              <a:rPr sz="1600" b="0" lang="ja-JP" altLang="en-US">
-                <a:solidFill>
-                  <a:srgbClr val="333333"/>
-                </a:solidFill>
-                <a:latin typeface="Noto Sans JP"/>
-                <a:ea typeface="Noto Sans JP"/>
-              </a:rPr>
-              <a:t> は回転行列（</a:t>
-            </a:r>
-            <a:r>
-              <a:rPr sz="1600" b="0" i="1">
-                <a:solidFill>
-                  <a:srgbClr val="333333"/>
-                </a:solidFill>
-                <a:latin typeface="Cambria Math"/>
-                <a:ea typeface="Noto Sans JP"/>
-              </a:rPr>
-              <a:t>R</a:t>
-            </a:r>
-            <a:r>
-              <a:rPr sz="1600" b="0" i="1" baseline="30000">
-                <a:solidFill>
-                  <a:srgbClr val="333333"/>
-                </a:solidFill>
-                <a:latin typeface="Cambria Math"/>
-                <a:ea typeface="Noto Sans JP"/>
-              </a:rPr>
-              <a:t>T</a:t>
-            </a:r>
-            <a:r>
-              <a:rPr sz="1600" b="0" i="1">
-                <a:solidFill>
-                  <a:srgbClr val="333333"/>
-                </a:solidFill>
-                <a:latin typeface="Cambria Math"/>
-                <a:ea typeface="Noto Sans JP"/>
-              </a:rPr>
-              <a:t>R</a:t>
-            </a:r>
-            <a:r>
-              <a:rPr sz="1600" b="0" i="0">
-                <a:solidFill>
-                  <a:srgbClr val="333333"/>
-                </a:solidFill>
-                <a:latin typeface="Cambria Math"/>
-                <a:ea typeface="Noto Sans JP"/>
-              </a:rPr>
-              <a:t>=</a:t>
-            </a:r>
-            <a:r>
-              <a:rPr sz="1600" b="0" i="1">
-                <a:solidFill>
-                  <a:srgbClr val="333333"/>
-                </a:solidFill>
-                <a:latin typeface="Cambria Math"/>
-                <a:ea typeface="Noto Sans JP"/>
-              </a:rPr>
-              <a:t>I</a:t>
-            </a:r>
-            <a:r>
-              <a:rPr sz="1600" b="0" lang="ja-JP" altLang="en-US">
-                <a:solidFill>
-                  <a:srgbClr val="333333"/>
-                </a:solidFill>
-                <a:latin typeface="Noto Sans JP"/>
-                <a:ea typeface="Noto Sans JP"/>
-              </a:rPr>
-              <a:t>）、</a:t>
-            </a:r>
-            <a:r>
-              <a:rPr sz="1600" b="0" i="1">
-                <a:solidFill>
-                  <a:srgbClr val="333333"/>
-                </a:solidFill>
-                <a:latin typeface="Cambria Math"/>
-                <a:ea typeface="Noto Sans JP"/>
-              </a:rPr>
-              <a:t>t</a:t>
-            </a:r>
-            <a:r>
-              <a:rPr sz="1600" b="0" lang="ja-JP" altLang="en-US">
-                <a:solidFill>
-                  <a:srgbClr val="333333"/>
-                </a:solidFill>
-                <a:latin typeface="Noto Sans JP"/>
-                <a:ea typeface="Noto Sans JP"/>
-              </a:rPr>
-              <a:t> は並進ベクトル。差を取ると </a:t>
-            </a:r>
-            <a:r>
-              <a:rPr sz="1600" b="0" i="1">
-                <a:solidFill>
-                  <a:srgbClr val="333333"/>
-                </a:solidFill>
-                <a:latin typeface="Cambria Math"/>
-                <a:ea typeface="Noto Sans JP"/>
-              </a:rPr>
-              <a:t>t</a:t>
-            </a:r>
-            <a:r>
-              <a:rPr sz="1600" b="0" lang="ja-JP" altLang="en-US">
-                <a:solidFill>
-                  <a:srgbClr val="333333"/>
-                </a:solidFill>
-                <a:latin typeface="Noto Sans JP"/>
-                <a:ea typeface="Noto Sans JP"/>
-              </a:rPr>
-              <a:t> が消え、回転も距離を変えない。</a:t>
-            </a:r>
-          </a:p>
-        </p:txBody>
-      </p:sp>
-      <p:sp>
-        <p:nvSpPr>
-          <p:cNvPr id="19" name="TextBox 18"/>
-          <p:cNvSpPr txBox="1"/>
-          <p:nvPr/>
-        </p:nvSpPr>
-        <p:spPr>
-          <a:xfrm>
-            <a:off x="594360" y="3630168"/>
-            <a:ext cx="11000232" cy="352552"/>
-          </a:xfrm>
-          <a:prstGeom prst="rect">
-            <a:avLst/>
-          </a:prstGeom>
-          <a:noFill/>
-        </p:spPr>
-        <p:txBody>
-          <a:bodyPr wrap="square" lIns="0" rIns="0" tIns="0" bIns="0" anchor="t">
-            <a:noAutofit/>
-          </a:bodyPr>
-          <a:lstStyle/>
-          <a:p>
-            <a:pPr algn="l">
-              <a:lnSpc>
-                <a:spcPts val="1984"/>
-              </a:lnSpc>
-            </a:pPr>
-            <a:r>
-              <a:rPr sz="1550" b="0" lang="ja-JP" altLang="en-US">
-                <a:solidFill>
-                  <a:srgbClr val="333333"/>
-                </a:solidFill>
-                <a:latin typeface="Noto Sans JP"/>
-                <a:ea typeface="Noto Sans JP"/>
-              </a:rPr>
-              <a:t>接触マップは距離を0か1へ変換した表。この演習では8 Å未満を接触とし、配列で隣接する残基対を除く。</a:t>
-            </a:r>
-          </a:p>
-        </p:txBody>
-      </p:sp>
-      <mc:AlternateContent xmlns:mc="http://schemas.openxmlformats.org/markup-compatibility/2006">
-        <mc:Choice xmlns:a14="http://schemas.microsoft.com/office/drawing/2010/main" Requires="a14">
-          <p:sp>
-            <p:nvSpPr>
-              <p:cNvPr id="20" name="TextBox 19"/>
-              <p:cNvSpPr txBox="1"/>
-              <p:nvPr/>
-            </p:nvSpPr>
-            <p:spPr>
-              <a:xfrm>
-                <a:off x="457200" y="4434840"/>
-                <a:ext cx="11277295" cy="466344"/>
-              </a:xfrm>
-              <a:prstGeom prst="rect">
-                <a:avLst/>
-              </a:prstGeom>
-              <a:noFill/>
-            </p:spPr>
-            <p:txBody>
-              <a:bodyPr wrap="none" lIns="0" rIns="0" tIns="0" bIns="0" anchor="ctr">
-                <a:noAutofit/>
-              </a:bodyPr>
-              <a:lstStyle/>
-              <a:p>
-                <a:pPr algn="ctr"/>
-                <a14:m>
-                  <m:oMathPara xmlns:m="http://schemas.openxmlformats.org/officeDocument/2006/math">
-                    <m:oMathParaPr>
-                      <m:jc m:val="center"/>
-                    </m:oMathParaPr>
-                    <m:oMath>
-                      <m:box>
-                        <m:e>
-                          <m:sSub>
-                            <m:e>
-                              <m:r>
-                                <m:rPr/>
-                                <a:rPr lang="en-US" sz="2500" i="1">
-                                  <a:solidFill>
-                                    <a:srgbClr val="1A1A1A"/>
-                                  </a:solidFill>
-                                  <a:latin typeface="Cambria Math" panose="02040503050406030204" pitchFamily="18" charset="0"/>
-                                  <a:ea typeface="Cambria Math"/>
-                                </a:rPr>
-                                <m:t>C</m:t>
+                                <m:t>d</m:t>
                               </m:r>
                             </m:e>
                             <m:sub>
@@ -13242,7 +14611,7 @@
                                 <m:e>
                                   <m:r>
                                     <m:rPr/>
-                                    <a:rPr lang="en-US" sz="2500" i="1">
+                                    <a:rPr lang="en-US" sz="2300" i="1">
                                       <a:solidFill>
                                         <a:srgbClr val="1A1A1A"/>
                                       </a:solidFill>
@@ -13253,7 +14622,7 @@
                                   </m:r>
                                   <m:r>
                                     <m:rPr/>
-                                    <a:rPr lang="en-US" sz="2500" i="1">
+                                    <a:rPr lang="en-US" sz="2300" i="1">
                                       <a:solidFill>
                                         <a:srgbClr val="1A1A1A"/>
                                       </a:solidFill>
@@ -13270,14 +14639,40 @@
                             <m:rPr>
                               <m:sty m:val="p"/>
                             </m:rPr>
-                            <a:rPr lang="en-US" sz="2500" i="0">
+                            <a:rPr lang="en-US" sz="2300" i="0">
                               <a:solidFill>
                                 <a:srgbClr val="1A1A1A"/>
                               </a:solidFill>
                               <a:latin typeface="Cambria Math" panose="02040503050406030204" pitchFamily="18" charset="0"/>
                               <a:ea typeface="Cambria Math"/>
                             </a:rPr>
-                            <m:t>=</m:t>
+                            <m:t>&lt;</m:t>
+                          </m:r>
+                          <m:r>
+                            <m:rPr>
+                              <m:sty m:val="p"/>
+                            </m:rPr>
+                            <a:rPr lang="en-US" sz="2300" i="0">
+                              <a:solidFill>
+                                <a:srgbClr val="1A1A1A"/>
+                              </a:solidFill>
+                              <a:latin typeface="Cambria Math" panose="02040503050406030204" pitchFamily="18" charset="0"/>
+                              <a:ea typeface="Cambria Math"/>
+                            </a:rPr>
+                            <m:t>8</m:t>
+                          </m:r>
+                          <m:r>
+                            <m:rPr>
+                              <m:sty m:val="p"/>
+                            </m:rPr>
+                            <a:rPr lang="en-US" sz="2300" i="0">
+                              <a:solidFill>
+                                <a:srgbClr val="1A1A1A"/>
+                              </a:solidFill>
+                              <a:latin typeface="Cambria Math" panose="02040503050406030204" pitchFamily="18" charset="0"/>
+                              <a:ea typeface="Cambria Math"/>
+                            </a:rPr>
+                            <m:t> </m:t>
                           </m:r>
                           <m:box>
                             <m:e>
@@ -13285,7 +14680,50 @@
                                 <m:rPr>
                                   <m:sty m:val="p"/>
                                 </m:rPr>
-                                <a:rPr lang="en-US" sz="2500" i="0">
+                                <a:rPr lang="en-US" sz="2300" i="0">
+                                  <a:solidFill>
+                                    <a:srgbClr val="1A1A1A"/>
+                                  </a:solidFill>
+                                  <a:latin typeface="Cambria Math" panose="02040503050406030204" pitchFamily="18" charset="0"/>
+                                  <a:ea typeface="Cambria Math"/>
+                                </a:rPr>
+                                <m:t>Å</m:t>
+                              </m:r>
+                            </m:e>
+                          </m:box>
+                          <m:r>
+                            <m:rPr>
+                              <m:sty m:val="p"/>
+                            </m:rPr>
+                            <a:rPr lang="en-US" sz="2300" i="0">
+                              <a:solidFill>
+                                <a:srgbClr val="1A1A1A"/>
+                              </a:solidFill>
+                              <a:latin typeface="Cambria Math" panose="02040503050406030204" pitchFamily="18" charset="0"/>
+                              <a:ea typeface="Cambria Math"/>
+                            </a:rPr>
+                            <m:t>]</m:t>
+                          </m:r>
+                          <m:r>
+                            <m:rPr>
+                              <m:sty m:val="p"/>
+                            </m:rPr>
+                            <a:rPr lang="en-US" sz="2300" i="0">
+                              <a:solidFill>
+                                <a:srgbClr val="1A1A1A"/>
+                              </a:solidFill>
+                              <a:latin typeface="Cambria Math" panose="02040503050406030204" pitchFamily="18" charset="0"/>
+                              <a:ea typeface="Cambria Math"/>
+                            </a:rPr>
+                            <m:t> </m:t>
+                          </m:r>
+                          <m:box>
+                            <m:e>
+                              <m:r>
+                                <m:rPr>
+                                  <m:sty m:val="p"/>
+                                </m:rPr>
+                                <a:rPr lang="en-US" sz="2300" i="0">
                                   <a:solidFill>
                                     <a:srgbClr val="1A1A1A"/>
                                   </a:solidFill>
@@ -13300,162 +14738,7 @@
                             <m:rPr>
                               <m:sty m:val="p"/>
                             </m:rPr>
-                            <a:rPr lang="en-US" sz="2500" i="0">
-                              <a:solidFill>
-                                <a:srgbClr val="1A1A1A"/>
-                              </a:solidFill>
-                              <a:latin typeface="Cambria Math" panose="02040503050406030204" pitchFamily="18" charset="0"/>
-                              <a:ea typeface="Cambria Math"/>
-                            </a:rPr>
-                            <m:t>[</m:t>
-                          </m:r>
-                          <m:sSub>
-                            <m:e>
-                              <m:r>
-                                <m:rPr/>
-                                <a:rPr lang="en-US" sz="2500" i="1">
-                                  <a:solidFill>
-                                    <a:srgbClr val="1A1A1A"/>
-                                  </a:solidFill>
-                                  <a:latin typeface="Cambria Math" panose="02040503050406030204" pitchFamily="18" charset="0"/>
-                                  <a:ea typeface="Cambria Math"/>
-                                </a:rPr>
-                                <m:t>d</m:t>
-                              </m:r>
-                            </m:e>
-                            <m:sub>
-                              <m:box>
-                                <m:e>
-                                  <m:r>
-                                    <m:rPr/>
-                                    <a:rPr lang="en-US" sz="2500" i="1">
-                                      <a:solidFill>
-                                        <a:srgbClr val="1A1A1A"/>
-                                      </a:solidFill>
-                                      <a:latin typeface="Cambria Math" panose="02040503050406030204" pitchFamily="18" charset="0"/>
-                                      <a:ea typeface="Cambria Math"/>
-                                    </a:rPr>
-                                    <m:t>i</m:t>
-                                  </m:r>
-                                  <m:r>
-                                    <m:rPr/>
-                                    <a:rPr lang="en-US" sz="2500" i="1">
-                                      <a:solidFill>
-                                        <a:srgbClr val="1A1A1A"/>
-                                      </a:solidFill>
-                                      <a:latin typeface="Cambria Math" panose="02040503050406030204" pitchFamily="18" charset="0"/>
-                                      <a:ea typeface="Cambria Math"/>
-                                    </a:rPr>
-                                    <m:t>j</m:t>
-                                  </m:r>
-                                </m:e>
-                              </m:box>
-                            </m:sub>
-                          </m:sSub>
-                          <m:r>
-                            <m:rPr>
-                              <m:sty m:val="p"/>
-                            </m:rPr>
-                            <a:rPr lang="en-US" sz="2500" i="0">
-                              <a:solidFill>
-                                <a:srgbClr val="1A1A1A"/>
-                              </a:solidFill>
-                              <a:latin typeface="Cambria Math" panose="02040503050406030204" pitchFamily="18" charset="0"/>
-                              <a:ea typeface="Cambria Math"/>
-                            </a:rPr>
-                            <m:t>&lt;</m:t>
-                          </m:r>
-                          <m:r>
-                            <m:rPr>
-                              <m:sty m:val="p"/>
-                            </m:rPr>
-                            <a:rPr lang="en-US" sz="2500" i="0">
-                              <a:solidFill>
-                                <a:srgbClr val="1A1A1A"/>
-                              </a:solidFill>
-                              <a:latin typeface="Cambria Math" panose="02040503050406030204" pitchFamily="18" charset="0"/>
-                              <a:ea typeface="Cambria Math"/>
-                            </a:rPr>
-                            <m:t>8</m:t>
-                          </m:r>
-                          <m:r>
-                            <m:rPr>
-                              <m:sty m:val="p"/>
-                            </m:rPr>
-                            <a:rPr lang="en-US" sz="2500" i="0">
-                              <a:solidFill>
-                                <a:srgbClr val="1A1A1A"/>
-                              </a:solidFill>
-                              <a:latin typeface="Cambria Math" panose="02040503050406030204" pitchFamily="18" charset="0"/>
-                              <a:ea typeface="Cambria Math"/>
-                            </a:rPr>
-                            <m:t> </m:t>
-                          </m:r>
-                          <m:box>
-                            <m:e>
-                              <m:r>
-                                <m:rPr>
-                                  <m:sty m:val="p"/>
-                                </m:rPr>
-                                <a:rPr lang="en-US" sz="2500" i="0">
-                                  <a:solidFill>
-                                    <a:srgbClr val="1A1A1A"/>
-                                  </a:solidFill>
-                                  <a:latin typeface="Cambria Math" panose="02040503050406030204" pitchFamily="18" charset="0"/>
-                                  <a:ea typeface="Cambria Math"/>
-                                </a:rPr>
-                                <m:t>Å</m:t>
-                              </m:r>
-                            </m:e>
-                          </m:box>
-                          <m:r>
-                            <m:rPr>
-                              <m:sty m:val="p"/>
-                            </m:rPr>
-                            <a:rPr lang="en-US" sz="2500" i="0">
-                              <a:solidFill>
-                                <a:srgbClr val="1A1A1A"/>
-                              </a:solidFill>
-                              <a:latin typeface="Cambria Math" panose="02040503050406030204" pitchFamily="18" charset="0"/>
-                              <a:ea typeface="Cambria Math"/>
-                            </a:rPr>
-                            <m:t>]</m:t>
-                          </m:r>
-                          <m:r>
-                            <m:rPr>
-                              <m:sty m:val="p"/>
-                            </m:rPr>
-                            <a:rPr lang="en-US" sz="2500" i="0">
-                              <a:solidFill>
-                                <a:srgbClr val="1A1A1A"/>
-                              </a:solidFill>
-                              <a:latin typeface="Cambria Math" panose="02040503050406030204" pitchFamily="18" charset="0"/>
-                              <a:ea typeface="Cambria Math"/>
-                            </a:rPr>
-                            <m:t> </m:t>
-                          </m:r>
-                          <m:box>
-                            <m:e>
-                              <m:r>
-                                <m:rPr>
-                                  <m:sty m:val="p"/>
-                                </m:rPr>
-                                <a:rPr lang="en-US" sz="2500" i="0">
-                                  <a:solidFill>
-                                    <a:srgbClr val="1A1A1A"/>
-                                  </a:solidFill>
-                                  <a:latin typeface="Cambria Math" panose="02040503050406030204" pitchFamily="18" charset="0"/>
-                                  <a:ea typeface="Cambria Math"/>
-                                </a:rPr>
-                                <m:t>1</m:t>
-                              </m:r>
-                            </m:e>
-                          </m:box>
-                          <m:r>
-                            <m:rPr>
-                              <m:sty m:val="p"/>
-                            </m:rPr>
-                            <a:rPr lang="en-US" sz="2500" i="0">
+                            <a:rPr lang="en-US" sz="2300" i="0">
                               <a:solidFill>
                                 <a:srgbClr val="1A1A1A"/>
                               </a:solidFill>
@@ -13468,7 +14751,7 @@
                             <m:rPr>
                               <m:sty m:val="p"/>
                             </m:rPr>
-                            <a:rPr lang="en-US" sz="2500" i="0">
+                            <a:rPr lang="en-US" sz="2300" i="0">
                               <a:solidFill>
                                 <a:srgbClr val="1A1A1A"/>
                               </a:solidFill>
@@ -13479,7 +14762,7 @@
                           </m:r>
                           <m:r>
                             <m:rPr/>
-                            <a:rPr lang="en-US" sz="2500" i="1">
+                            <a:rPr lang="en-US" sz="2300" i="1">
                               <a:solidFill>
                                 <a:srgbClr val="1A1A1A"/>
                               </a:solidFill>
@@ -13492,7 +14775,7 @@
                             <m:rPr>
                               <m:sty m:val="p"/>
                             </m:rPr>
-                            <a:rPr lang="en-US" sz="2500" i="0">
+                            <a:rPr lang="en-US" sz="2300" i="0">
                               <a:solidFill>
                                 <a:srgbClr val="1A1A1A"/>
                               </a:solidFill>
@@ -13503,7 +14786,7 @@
                           </m:r>
                           <m:r>
                             <m:rPr/>
-                            <a:rPr lang="en-US" sz="2500" i="1">
+                            <a:rPr lang="en-US" sz="2300" i="1">
                               <a:solidFill>
                                 <a:srgbClr val="1A1A1A"/>
                               </a:solidFill>
@@ -13516,7 +14799,7 @@
                             <m:rPr>
                               <m:sty m:val="p"/>
                             </m:rPr>
-                            <a:rPr lang="en-US" sz="2500" i="0">
+                            <a:rPr lang="en-US" sz="2300" i="0">
                               <a:solidFill>
                                 <a:srgbClr val="1A1A1A"/>
                               </a:solidFill>
@@ -13529,7 +14812,7 @@
                             <m:rPr>
                               <m:sty m:val="p"/>
                             </m:rPr>
-                            <a:rPr lang="en-US" sz="2500" i="0">
+                            <a:rPr lang="en-US" sz="2300" i="0">
                               <a:solidFill>
                                 <a:srgbClr val="1A1A1A"/>
                               </a:solidFill>
@@ -13542,7 +14825,7 @@
                             <m:rPr>
                               <m:sty m:val="p"/>
                             </m:rPr>
-                            <a:rPr lang="en-US" sz="2500" i="0">
+                            <a:rPr lang="en-US" sz="2300" i="0">
                               <a:solidFill>
                                 <a:srgbClr val="1A1A1A"/>
                               </a:solidFill>
@@ -13555,7 +14838,7 @@
                             <m:rPr>
                               <m:sty m:val="p"/>
                             </m:rPr>
-                            <a:rPr lang="en-US" sz="2500" i="0">
+                            <a:rPr lang="en-US" sz="2300" i="0">
                               <a:solidFill>
                                 <a:srgbClr val="1A1A1A"/>
                               </a:solidFill>
@@ -13569,7 +14852,7 @@
                     </m:oMath>
                   </m:oMathPara>
                 </a14:m>
-                <a:endParaRPr lang="en-US" sz="2500"/>
+                <a:endParaRPr lang="en-US" sz="2300"/>
               </a:p>
             </p:txBody>
           </p:sp>
@@ -13577,22 +14860,22 @@
         <mc:Fallback>
           <p:pic>
             <p:nvPicPr>
-              <p:cNvPr id="21" name="Picture 20" descr="C_{ij}=\mathbf{1}[d_{ij}&lt;8\,\mathrm{Å}]\,\mathbf{1}[|i-j|\geq3]"/>
+              <p:cNvPr id="15" name="Picture 14" descr="C_{ij}=\mathbf{1}[d_{ij}&lt;8\,\mathrm{Å}]\,\mathbf{1}[|i-j|\geq3]"/>
               <p:cNvPicPr>
                 <a:picLocks noChangeAspect="1"/>
               </p:cNvPicPr>
               <p:nvPr/>
             </p:nvPicPr>
             <p:blipFill>
-              <a:blip r:embed="rId9"/>
+              <a:blip r:embed="rId11"/>
               <a:stretch>
                 <a:fillRect/>
               </a:stretch>
             </p:blipFill>
             <p:spPr>
               <a:xfrm>
-                <a:off x="4169511" y="4434840"/>
-                <a:ext cx="3852671" cy="466344"/>
+                <a:off x="4321911" y="4572000"/>
+                <a:ext cx="3547872" cy="429768"/>
               </a:xfrm>
               <a:prstGeom prst="rect">
                 <a:avLst/>
@@ -13603,33 +14886,33 @@
       </mc:AlternateContent>
       <p:sp>
         <p:nvSpPr>
-          <p:cNvPr id="22" name="TextBox 21"/>
-          <p:cNvSpPr txBox="1"/>
-          <p:nvPr/>
-        </p:nvSpPr>
-        <p:spPr>
-          <a:xfrm>
-            <a:off x="594360" y="5056632"/>
-            <a:ext cx="5362955" cy="880872"/>
-          </a:xfrm>
-          <a:prstGeom prst="rect">
-            <a:avLst/>
-          </a:prstGeom>
-          <a:noFill/>
-        </p:spPr>
-        <p:txBody>
-          <a:bodyPr wrap="square" lIns="0" rIns="0" tIns="0" bIns="0" anchor="t">
-            <a:noAutofit/>
-          </a:bodyPr>
-          <a:lstStyle/>
-          <a:p>
-            <a:pPr algn="l">
-              <a:lnSpc>
-                <a:spcPts val="2048"/>
-              </a:lnSpc>
-            </a:pPr>
-            <a:r>
-              <a:rPr sz="1600" b="0" i="0">
+          <p:cNvPr id="16" name="TextBox 15"/>
+          <p:cNvSpPr txBox="1"/>
+          <p:nvPr/>
+        </p:nvSpPr>
+        <p:spPr>
+          <a:xfrm>
+            <a:off x="594360" y="5175504"/>
+            <a:ext cx="5362955" cy="856488"/>
+          </a:xfrm>
+          <a:prstGeom prst="rect">
+            <a:avLst/>
+          </a:prstGeom>
+          <a:noFill/>
+        </p:spPr>
+        <p:txBody>
+          <a:bodyPr wrap="square" lIns="0" rIns="0" tIns="0" bIns="0" anchor="t">
+            <a:noAutofit/>
+          </a:bodyPr>
+          <a:lstStyle/>
+          <a:p>
+            <a:pPr algn="l">
+              <a:lnSpc>
+                <a:spcPts val="1984"/>
+              </a:lnSpc>
+            </a:pPr>
+            <a:r>
+              <a:rPr sz="1550" b="0" i="0">
                 <a:solidFill>
                   <a:srgbClr val="333333"/>
                 </a:solidFill>
@@ -13639,7 +14922,7 @@
               <a:t>1[·]</a:t>
             </a:r>
             <a:r>
-              <a:rPr sz="1600" b="0" lang="ja-JP" altLang="en-US">
+              <a:rPr sz="1550" b="0" lang="ja-JP" altLang="en-US">
                 <a:solidFill>
                   <a:srgbClr val="333333"/>
                 </a:solidFill>
@@ -13649,7 +14932,7 @@
               <a:t> は条件が真なら1、偽なら0。</a:t>
             </a:r>
             <a:r>
-              <a:rPr sz="1600" b="0" i="1">
+              <a:rPr sz="1550" b="0" i="1">
                 <a:solidFill>
                   <a:srgbClr val="333333"/>
                 </a:solidFill>
@@ -13659,7 +14942,7 @@
               <a:t>i</a:t>
             </a:r>
             <a:r>
-              <a:rPr sz="1600" b="0" i="0">
+              <a:rPr sz="1550" b="0" i="0">
                 <a:solidFill>
                   <a:srgbClr val="333333"/>
                 </a:solidFill>
@@ -13669,7 +14952,7 @@
               <a:t>,</a:t>
             </a:r>
             <a:r>
-              <a:rPr sz="1600" b="0" i="1">
+              <a:rPr sz="1550" b="0" i="1">
                 <a:solidFill>
                   <a:srgbClr val="333333"/>
                 </a:solidFill>
@@ -13679,7 +14962,7 @@
               <a:t>j</a:t>
             </a:r>
             <a:r>
-              <a:rPr sz="1600" b="0" lang="ja-JP" altLang="en-US">
+              <a:rPr sz="1550" b="0" lang="ja-JP" altLang="en-US">
                 <a:solidFill>
                   <a:srgbClr val="333333"/>
                 </a:solidFill>
@@ -13693,33 +14976,33 @@
       </p:sp>
       <p:sp>
         <p:nvSpPr>
-          <p:cNvPr id="23" name="TextBox 22"/>
-          <p:cNvSpPr txBox="1"/>
-          <p:nvPr/>
-        </p:nvSpPr>
-        <p:spPr>
-          <a:xfrm>
-            <a:off x="6231636" y="5056632"/>
-            <a:ext cx="5362955" cy="620776"/>
-          </a:xfrm>
-          <a:prstGeom prst="rect">
-            <a:avLst/>
-          </a:prstGeom>
-          <a:noFill/>
-        </p:spPr>
-        <p:txBody>
-          <a:bodyPr wrap="square" lIns="0" rIns="0" tIns="0" bIns="0" anchor="t">
-            <a:noAutofit/>
-          </a:bodyPr>
-          <a:lstStyle/>
-          <a:p>
-            <a:pPr algn="l">
-              <a:lnSpc>
-                <a:spcPts val="2048"/>
-              </a:lnSpc>
-            </a:pPr>
-            <a:r>
-              <a:rPr sz="1600" b="0" i="1">
+          <p:cNvPr id="17" name="TextBox 16"/>
+          <p:cNvSpPr txBox="1"/>
+          <p:nvPr/>
+        </p:nvSpPr>
+        <p:spPr>
+          <a:xfrm>
+            <a:off x="6231636" y="5175504"/>
+            <a:ext cx="5362955" cy="604520"/>
+          </a:xfrm>
+          <a:prstGeom prst="rect">
+            <a:avLst/>
+          </a:prstGeom>
+          <a:noFill/>
+        </p:spPr>
+        <p:txBody>
+          <a:bodyPr wrap="square" lIns="0" rIns="0" tIns="0" bIns="0" anchor="t">
+            <a:noAutofit/>
+          </a:bodyPr>
+          <a:lstStyle/>
+          <a:p>
+            <a:pPr algn="l">
+              <a:lnSpc>
+                <a:spcPts val="1984"/>
+              </a:lnSpc>
+            </a:pPr>
+            <a:r>
+              <a:rPr sz="1550" b="0" i="1">
                 <a:solidFill>
                   <a:srgbClr val="333333"/>
                 </a:solidFill>
@@ -13729,7 +15012,7 @@
               <a:t>d</a:t>
             </a:r>
             <a:r>
-              <a:rPr sz="1600" b="0" i="1" baseline="-25000">
+              <a:rPr sz="1550" b="0" i="1" baseline="-25000">
                 <a:solidFill>
                   <a:srgbClr val="333333"/>
                 </a:solidFill>
@@ -13739,7 +15022,7 @@
               <a:t>ij</a:t>
             </a:r>
             <a:r>
-              <a:rPr sz="1600" b="0" i="0">
+              <a:rPr sz="1550" b="0" i="0">
                 <a:solidFill>
                   <a:srgbClr val="333333"/>
                 </a:solidFill>
@@ -13749,7 +15032,7 @@
               <a:t>=</a:t>
             </a:r>
             <a:r>
-              <a:rPr sz="1600" b="0" i="1">
+              <a:rPr sz="1550" b="0" i="1">
                 <a:solidFill>
                   <a:srgbClr val="333333"/>
                 </a:solidFill>
@@ -13759,7 +15042,7 @@
               <a:t>d</a:t>
             </a:r>
             <a:r>
-              <a:rPr sz="1600" b="0" i="1" baseline="-25000">
+              <a:rPr sz="1550" b="0" i="1" baseline="-25000">
                 <a:solidFill>
                   <a:srgbClr val="333333"/>
                 </a:solidFill>
@@ -13769,7 +15052,7 @@
               <a:t>ji</a:t>
             </a:r>
             <a:r>
-              <a:rPr sz="1600" b="0" lang="ja-JP" altLang="en-US">
+              <a:rPr sz="1550" b="0" lang="ja-JP" altLang="en-US">
                 <a:solidFill>
                   <a:srgbClr val="333333"/>
                 </a:solidFill>
@@ -13777,6 +15060,46 @@
                 <a:ea typeface="Noto Sans JP"/>
               </a:rPr>
               <a:t> なので接触マップも対称。接触だけでは距離の値や水素結合の有無までは分からない。</a:t>
+            </a:r>
+          </a:p>
+        </p:txBody>
+      </p:sp>
+      <p:sp>
+        <p:nvSpPr>
+          <p:cNvPr id="18" name="TextBox 17"/>
+          <p:cNvSpPr txBox="1"/>
+          <p:nvPr/>
+        </p:nvSpPr>
+        <p:spPr>
+          <a:xfrm>
+            <a:off x="502920" y="6217920"/>
+            <a:ext cx="11064240" cy="182880"/>
+          </a:xfrm>
+          <a:prstGeom prst="rect">
+            <a:avLst/>
+          </a:prstGeom>
+          <a:noFill/>
+        </p:spPr>
+        <p:txBody>
+          <a:bodyPr wrap="square" lIns="0" rIns="0" tIns="0" bIns="0" anchor="t">
+            <a:noAutofit/>
+          </a:bodyPr>
+          <a:lstStyle/>
+          <a:p>
+            <a:pPr algn="l">
+              <a:lnSpc>
+                <a:spcPct val="100000"/>
+              </a:lnSpc>
+            </a:pPr>
+            <a:r>
+              <a:rPr sz="919" b="0" lang="ja-JP" altLang="en-US">
+                <a:solidFill>
+                  <a:srgbClr val="666666"/>
+                </a:solidFill>
+                <a:latin typeface="Noto Sans JP"/>
+                <a:ea typeface="Noto Sans JP"/>
+              </a:rPr>
+              <a:t>構造の表現と比較 p.11 を再利用。三角形は回転・並進の模式図。</a:t>
             </a:r>
           </a:p>
         </p:txBody>
@@ -14774,7 +16097,7 @@
                 <a:latin typeface="Noto Sans JP"/>
                 <a:ea typeface="Noto Sans JP"/>
               </a:rPr>
-              <a:t>接触マップの点を実測値で読む</a:t>
+              <a:t>構造データから接触の有無を確かめる</a:t>
             </a:r>
           </a:p>
         </p:txBody>
@@ -14862,27 +16185,27 @@
         </p:nvSpPr>
         <p:spPr>
           <a:xfrm>
-            <a:off x="685800" y="1554480"/>
-            <a:ext cx="10808208" cy="783336"/>
-          </a:xfrm>
-          <a:prstGeom prst="rect">
-            <a:avLst/>
-          </a:prstGeom>
-          <a:noFill/>
-        </p:spPr>
-        <p:txBody>
-          <a:bodyPr wrap="square" lIns="0" rIns="0" tIns="0" bIns="0" anchor="t">
-            <a:noAutofit/>
-          </a:bodyPr>
-          <a:lstStyle/>
-          <a:p>
-            <a:pPr algn="l">
-              <a:lnSpc>
-                <a:spcPts val="2688"/>
-              </a:lnSpc>
-            </a:pPr>
-            <a:r>
-              <a:rPr sz="2100" b="0" lang="ja-JP" altLang="en-US">
+            <a:off x="594360" y="1508760"/>
+            <a:ext cx="5760720" cy="978408"/>
+          </a:xfrm>
+          <a:prstGeom prst="rect">
+            <a:avLst/>
+          </a:prstGeom>
+          <a:noFill/>
+        </p:spPr>
+        <p:txBody>
+          <a:bodyPr wrap="square" lIns="0" rIns="0" tIns="0" bIns="0" anchor="t">
+            <a:noAutofit/>
+          </a:bodyPr>
+          <a:lstStyle/>
+          <a:p>
+            <a:pPr algn="l">
+              <a:lnSpc>
+                <a:spcPts val="2304"/>
+              </a:lnSpc>
+            </a:pPr>
+            <a:r>
+              <a:rPr sz="1800" b="0" lang="ja-JP" altLang="en-US">
                 <a:solidFill>
                   <a:srgbClr val="333333"/>
                 </a:solidFill>
@@ -14902,27 +16225,27 @@
         </p:nvSpPr>
         <p:spPr>
           <a:xfrm>
-            <a:off x="685800" y="2438400"/>
-            <a:ext cx="10808208" cy="783336"/>
-          </a:xfrm>
-          <a:prstGeom prst="rect">
-            <a:avLst/>
-          </a:prstGeom>
-          <a:noFill/>
-        </p:spPr>
-        <p:txBody>
-          <a:bodyPr wrap="square" lIns="0" rIns="0" tIns="0" bIns="0" anchor="t">
-            <a:noAutofit/>
-          </a:bodyPr>
-          <a:lstStyle/>
-          <a:p>
-            <a:pPr algn="l">
-              <a:lnSpc>
-                <a:spcPts val="2688"/>
-              </a:lnSpc>
-            </a:pPr>
-            <a:r>
-              <a:rPr sz="2100" b="0" lang="ja-JP" altLang="en-US">
+            <a:off x="594360" y="2587752"/>
+            <a:ext cx="5760720" cy="685800"/>
+          </a:xfrm>
+          <a:prstGeom prst="rect">
+            <a:avLst/>
+          </a:prstGeom>
+          <a:noFill/>
+        </p:spPr>
+        <p:txBody>
+          <a:bodyPr wrap="square" lIns="0" rIns="0" tIns="0" bIns="0" anchor="t">
+            <a:noAutofit/>
+          </a:bodyPr>
+          <a:lstStyle/>
+          <a:p>
+            <a:pPr algn="l">
+              <a:lnSpc>
+                <a:spcPts val="2304"/>
+              </a:lnSpc>
+            </a:pPr>
+            <a:r>
+              <a:rPr sz="1800" b="0" lang="ja-JP" altLang="en-US">
                 <a:solidFill>
                   <a:srgbClr val="333333"/>
                 </a:solidFill>
@@ -14942,27 +16265,27 @@
         </p:nvSpPr>
         <p:spPr>
           <a:xfrm>
-            <a:off x="685800" y="3322320"/>
-            <a:ext cx="10808208" cy="441959"/>
-          </a:xfrm>
-          <a:prstGeom prst="rect">
-            <a:avLst/>
-          </a:prstGeom>
-          <a:noFill/>
-        </p:spPr>
-        <p:txBody>
-          <a:bodyPr wrap="square" lIns="0" rIns="0" tIns="0" bIns="0" anchor="t">
-            <a:noAutofit/>
-          </a:bodyPr>
-          <a:lstStyle/>
-          <a:p>
-            <a:pPr algn="l">
-              <a:lnSpc>
-                <a:spcPts val="2688"/>
-              </a:lnSpc>
-            </a:pPr>
-            <a:r>
-              <a:rPr sz="2100" b="0" lang="ja-JP" altLang="en-US">
+            <a:off x="594360" y="3374136"/>
+            <a:ext cx="5760720" cy="685800"/>
+          </a:xfrm>
+          <a:prstGeom prst="rect">
+            <a:avLst/>
+          </a:prstGeom>
+          <a:noFill/>
+        </p:spPr>
+        <p:txBody>
+          <a:bodyPr wrap="square" lIns="0" rIns="0" tIns="0" bIns="0" anchor="t">
+            <a:noAutofit/>
+          </a:bodyPr>
+          <a:lstStyle/>
+          <a:p>
+            <a:pPr algn="l">
+              <a:lnSpc>
+                <a:spcPts val="2304"/>
+              </a:lnSpc>
+            </a:pPr>
+            <a:r>
+              <a:rPr sz="1800" b="0" lang="ja-JP" altLang="en-US">
                 <a:solidFill>
                   <a:srgbClr val="333333"/>
                 </a:solidFill>
@@ -14982,27 +16305,27 @@
         </p:nvSpPr>
         <p:spPr>
           <a:xfrm>
-            <a:off x="685800" y="3864864"/>
-            <a:ext cx="10808208" cy="783336"/>
-          </a:xfrm>
-          <a:prstGeom prst="rect">
-            <a:avLst/>
-          </a:prstGeom>
-          <a:noFill/>
-        </p:spPr>
-        <p:txBody>
-          <a:bodyPr wrap="square" lIns="0" rIns="0" tIns="0" bIns="0" anchor="t">
-            <a:noAutofit/>
-          </a:bodyPr>
-          <a:lstStyle/>
-          <a:p>
-            <a:pPr algn="l">
-              <a:lnSpc>
-                <a:spcPts val="2688"/>
-              </a:lnSpc>
-            </a:pPr>
-            <a:r>
-              <a:rPr sz="2100" b="0" lang="ja-JP" altLang="en-US">
+            <a:off x="594360" y="4160520"/>
+            <a:ext cx="5760720" cy="978408"/>
+          </a:xfrm>
+          <a:prstGeom prst="rect">
+            <a:avLst/>
+          </a:prstGeom>
+          <a:noFill/>
+        </p:spPr>
+        <p:txBody>
+          <a:bodyPr wrap="square" lIns="0" rIns="0" tIns="0" bIns="0" anchor="t">
+            <a:noAutofit/>
+          </a:bodyPr>
+          <a:lstStyle/>
+          <a:p>
+            <a:pPr algn="l">
+              <a:lnSpc>
+                <a:spcPts val="2304"/>
+              </a:lnSpc>
+            </a:pPr>
+            <a:r>
+              <a:rPr sz="1800" b="0" lang="ja-JP" altLang="en-US">
                 <a:solidFill>
                   <a:srgbClr val="333333"/>
                 </a:solidFill>
@@ -15010,6 +16333,71 @@
                 <a:ea typeface="Noto Sans JP"/>
               </a:rPr>
               <a:t>Cα 間の距離だけでは水素結合の有無は決められない。供与体・受容体となる原子の種類と向きも確かめる。</a:t>
+            </a:r>
+          </a:p>
+        </p:txBody>
+      </p:sp>
+      <p:pic>
+        <p:nvPicPr>
+          <p:cNvPr id="10" name="Picture 9" descr="review_contacts.png"/>
+          <p:cNvPicPr>
+            <a:picLocks noChangeAspect="1"/>
+          </p:cNvPicPr>
+          <p:nvPr/>
+        </p:nvPicPr>
+        <p:blipFill>
+          <a:blip r:embed="rId3"/>
+          <a:srcRect/>
+          <a:stretch>
+            <a:fillRect/>
+          </a:stretch>
+        </p:blipFill>
+        <p:spPr>
+          <a:xfrm>
+            <a:off x="6611112" y="2069592"/>
+            <a:ext cx="4956048" cy="3304032"/>
+          </a:xfrm>
+          <a:prstGeom prst="rect">
+            <a:avLst/>
+          </a:prstGeom>
+        </p:spPr>
+      </p:pic>
+      <p:sp>
+        <p:nvSpPr>
+          <p:cNvPr id="11" name="TextBox 10"/>
+          <p:cNvSpPr txBox="1"/>
+          <p:nvPr/>
+        </p:nvSpPr>
+        <p:spPr>
+          <a:xfrm>
+            <a:off x="502920" y="6217920"/>
+            <a:ext cx="11064240" cy="182880"/>
+          </a:xfrm>
+          <a:prstGeom prst="rect">
+            <a:avLst/>
+          </a:prstGeom>
+          <a:noFill/>
+        </p:spPr>
+        <p:txBody>
+          <a:bodyPr wrap="square" lIns="0" rIns="0" tIns="0" bIns="0" anchor="t">
+            <a:noAutofit/>
+          </a:bodyPr>
+          <a:lstStyle/>
+          <a:p>
+            <a:pPr algn="l">
+              <a:lnSpc>
+                <a:spcPct val="100000"/>
+              </a:lnSpc>
+            </a:pPr>
+            <a:r>
+              <a:rPr sz="919" b="0" lang="ja-JP" altLang="en-US">
+                <a:solidFill>
+                  <a:srgbClr val="666666"/>
+                </a:solidFill>
+                <a:latin typeface="Noto Sans JP"/>
+                <a:ea typeface="Noto Sans JP"/>
+              </a:rPr>
+              <a:t>PDB 1UBQ：残基5・68・65のCα間距離を計算。模式図の線の長さは距離に比例しない。</a:t>
             </a:r>
           </a:p>
         </p:txBody>
@@ -15561,7 +16949,7 @@
                 <a:latin typeface="Noto Sans JP"/>
                 <a:ea typeface="Noto Sans JP"/>
               </a:rPr>
-              <a:t>戻す順序が結果を変える</a:t>
+              <a:t>変性剤の除去と酸化の順序で結果が変わる</a:t>
             </a:r>
           </a:p>
         </p:txBody>
@@ -15821,7 +17209,7 @@
                 <a:latin typeface="Noto Sans JP"/>
                 <a:ea typeface="Noto Sans JP"/>
               </a:rPr>
-              <a:t>上段と下段を比べ、尿素を除く時点と酸化する時点をたどる。同じ配列でも、間違った結合の組合せに捕まることがある。</a:t>
+              <a:t>上段と下段を比べ、尿素を除く時点と酸化する時点をたどる。同じ配列でも、天然構造とは異なる結合の組合せが残ることがある。</a:t>
             </a:r>
           </a:p>
         </p:txBody>
@@ -16202,7 +17590,7 @@
                 <a:latin typeface="Noto Sans JP"/>
                 <a:ea typeface="Noto Sans JP"/>
               </a:rPr>
-              <a:t>構造と接触マップを対応させ、観察を相互作用と結び付ける。</a:t>
+              <a:t>立体構造と接触マップを対応させ、近接する残基を読み取る。</a:t>
             </a:r>
           </a:p>
         </p:txBody>
@@ -16216,7 +17604,7 @@
         <p:spPr>
           <a:xfrm>
             <a:off x="685800" y="3182111"/>
-            <a:ext cx="10808208" cy="441959"/>
+            <a:ext cx="10808208" cy="783336"/>
           </a:xfrm>
           <a:prstGeom prst="rect">
             <a:avLst/>
@@ -16242,7 +17630,459 @@
                 <a:latin typeface="Noto Sans JP"/>
                 <a:ea typeface="Noto Sans JP"/>
               </a:rPr>
-              <a:t>座学 60 分／構造を操作する演習 20 分。演習は成績評価に用いない。</a:t>
+              <a:t>演習では構造を回転し、原子・二次構造・接触マップの表示を比べる。成績評価には用いない。</a:t>
+            </a:r>
+          </a:p>
+        </p:txBody>
+      </p:sp>
+      <p:sp>
+        <p:nvSpPr>
+          <p:cNvPr id="10" name="Rectangle 9"/>
+          <p:cNvSpPr/>
+          <p:nvPr/>
+        </p:nvSpPr>
+        <p:spPr>
+          <a:xfrm>
+            <a:off x="731520" y="4681728"/>
+            <a:ext cx="2240280" cy="822960"/>
+          </a:xfrm>
+          <a:prstGeom prst="rect">
+            <a:avLst/>
+          </a:prstGeom>
+          <a:solidFill>
+            <a:srgbClr val="EEF3FA"/>
+          </a:solidFill>
+          <a:ln>
+            <a:noFill/>
+          </a:ln>
+        </p:spPr>
+        <p:style>
+          <a:lnRef idx="1">
+            <a:schemeClr val="accent1"/>
+          </a:lnRef>
+          <a:fillRef idx="3">
+            <a:schemeClr val="accent1"/>
+          </a:fillRef>
+          <a:effectRef idx="2">
+            <a:schemeClr val="accent1"/>
+          </a:effectRef>
+          <a:fontRef idx="minor">
+            <a:schemeClr val="lt1"/>
+          </a:fontRef>
+        </p:style>
+        <p:txBody>
+          <a:bodyPr rtlCol="0" anchor="ctr"/>
+          <a:lstStyle/>
+          <a:p>
+            <a:pPr algn="ctr"/>
+          </a:p>
+        </p:txBody>
+      </p:sp>
+      <p:sp>
+        <p:nvSpPr>
+          <p:cNvPr id="11" name="TextBox 10"/>
+          <p:cNvSpPr txBox="1"/>
+          <p:nvPr/>
+        </p:nvSpPr>
+        <p:spPr>
+          <a:xfrm>
+            <a:off x="850392" y="4919472"/>
+            <a:ext cx="2011680" cy="365760"/>
+          </a:xfrm>
+          <a:prstGeom prst="rect">
+            <a:avLst/>
+          </a:prstGeom>
+          <a:noFill/>
+        </p:spPr>
+        <p:txBody>
+          <a:bodyPr wrap="square" lIns="0" rIns="0" tIns="0" bIns="0" anchor="t">
+            <a:noAutofit/>
+          </a:bodyPr>
+          <a:lstStyle/>
+          <a:p>
+            <a:pPr algn="l">
+              <a:lnSpc>
+                <a:spcPct val="140000"/>
+              </a:lnSpc>
+            </a:pPr>
+            <a:r>
+              <a:rPr sz="2000" b="1" lang="ja-JP" altLang="en-US">
+                <a:solidFill>
+                  <a:srgbClr val="0017C1"/>
+                </a:solidFill>
+                <a:latin typeface="Noto Sans JP"/>
+                <a:ea typeface="Noto Sans JP"/>
+              </a:rPr>
+              <a:t>アミノ酸</a:t>
+            </a:r>
+          </a:p>
+        </p:txBody>
+      </p:sp>
+      <p:sp>
+        <p:nvSpPr>
+          <p:cNvPr id="12" name="Rectangle 11"/>
+          <p:cNvSpPr/>
+          <p:nvPr/>
+        </p:nvSpPr>
+        <p:spPr>
+          <a:xfrm>
+            <a:off x="3566160" y="4681728"/>
+            <a:ext cx="2240280" cy="822960"/>
+          </a:xfrm>
+          <a:prstGeom prst="rect">
+            <a:avLst/>
+          </a:prstGeom>
+          <a:solidFill>
+            <a:srgbClr val="EEF3FA"/>
+          </a:solidFill>
+          <a:ln>
+            <a:noFill/>
+          </a:ln>
+        </p:spPr>
+        <p:style>
+          <a:lnRef idx="1">
+            <a:schemeClr val="accent1"/>
+          </a:lnRef>
+          <a:fillRef idx="3">
+            <a:schemeClr val="accent1"/>
+          </a:fillRef>
+          <a:effectRef idx="2">
+            <a:schemeClr val="accent1"/>
+          </a:effectRef>
+          <a:fontRef idx="minor">
+            <a:schemeClr val="lt1"/>
+          </a:fontRef>
+        </p:style>
+        <p:txBody>
+          <a:bodyPr rtlCol="0" anchor="ctr"/>
+          <a:lstStyle/>
+          <a:p>
+            <a:pPr algn="ctr"/>
+          </a:p>
+        </p:txBody>
+      </p:sp>
+      <p:sp>
+        <p:nvSpPr>
+          <p:cNvPr id="13" name="TextBox 12"/>
+          <p:cNvSpPr txBox="1"/>
+          <p:nvPr/>
+        </p:nvSpPr>
+        <p:spPr>
+          <a:xfrm>
+            <a:off x="3685032" y="4919472"/>
+            <a:ext cx="2011680" cy="365760"/>
+          </a:xfrm>
+          <a:prstGeom prst="rect">
+            <a:avLst/>
+          </a:prstGeom>
+          <a:noFill/>
+        </p:spPr>
+        <p:txBody>
+          <a:bodyPr wrap="square" lIns="0" rIns="0" tIns="0" bIns="0" anchor="t">
+            <a:noAutofit/>
+          </a:bodyPr>
+          <a:lstStyle/>
+          <a:p>
+            <a:pPr algn="l">
+              <a:lnSpc>
+                <a:spcPct val="140000"/>
+              </a:lnSpc>
+            </a:pPr>
+            <a:r>
+              <a:rPr sz="2000" b="1" lang="ja-JP" altLang="en-US">
+                <a:solidFill>
+                  <a:srgbClr val="0017C1"/>
+                </a:solidFill>
+                <a:latin typeface="Noto Sans JP"/>
+                <a:ea typeface="Noto Sans JP"/>
+              </a:rPr>
+              <a:t>二次構造</a:t>
+            </a:r>
+          </a:p>
+        </p:txBody>
+      </p:sp>
+      <p:sp>
+        <p:nvSpPr>
+          <p:cNvPr id="14" name="Rectangle 13"/>
+          <p:cNvSpPr/>
+          <p:nvPr/>
+        </p:nvSpPr>
+        <p:spPr>
+          <a:xfrm>
+            <a:off x="6400800" y="4681728"/>
+            <a:ext cx="2240280" cy="822960"/>
+          </a:xfrm>
+          <a:prstGeom prst="rect">
+            <a:avLst/>
+          </a:prstGeom>
+          <a:solidFill>
+            <a:srgbClr val="EEF3FA"/>
+          </a:solidFill>
+          <a:ln>
+            <a:noFill/>
+          </a:ln>
+        </p:spPr>
+        <p:style>
+          <a:lnRef idx="1">
+            <a:schemeClr val="accent1"/>
+          </a:lnRef>
+          <a:fillRef idx="3">
+            <a:schemeClr val="accent1"/>
+          </a:fillRef>
+          <a:effectRef idx="2">
+            <a:schemeClr val="accent1"/>
+          </a:effectRef>
+          <a:fontRef idx="minor">
+            <a:schemeClr val="lt1"/>
+          </a:fontRef>
+        </p:style>
+        <p:txBody>
+          <a:bodyPr rtlCol="0" anchor="ctr"/>
+          <a:lstStyle/>
+          <a:p>
+            <a:pPr algn="ctr"/>
+          </a:p>
+        </p:txBody>
+      </p:sp>
+      <p:sp>
+        <p:nvSpPr>
+          <p:cNvPr id="15" name="TextBox 14"/>
+          <p:cNvSpPr txBox="1"/>
+          <p:nvPr/>
+        </p:nvSpPr>
+        <p:spPr>
+          <a:xfrm>
+            <a:off x="6519672" y="4919472"/>
+            <a:ext cx="2011680" cy="365760"/>
+          </a:xfrm>
+          <a:prstGeom prst="rect">
+            <a:avLst/>
+          </a:prstGeom>
+          <a:noFill/>
+        </p:spPr>
+        <p:txBody>
+          <a:bodyPr wrap="square" lIns="0" rIns="0" tIns="0" bIns="0" anchor="t">
+            <a:noAutofit/>
+          </a:bodyPr>
+          <a:lstStyle/>
+          <a:p>
+            <a:pPr algn="l">
+              <a:lnSpc>
+                <a:spcPct val="140000"/>
+              </a:lnSpc>
+            </a:pPr>
+            <a:r>
+              <a:rPr sz="2000" b="1" lang="ja-JP" altLang="en-US">
+                <a:solidFill>
+                  <a:srgbClr val="0017C1"/>
+                </a:solidFill>
+                <a:latin typeface="Noto Sans JP"/>
+                <a:ea typeface="Noto Sans JP"/>
+              </a:rPr>
+              <a:t>立体構造</a:t>
+            </a:r>
+          </a:p>
+        </p:txBody>
+      </p:sp>
+      <p:sp>
+        <p:nvSpPr>
+          <p:cNvPr id="16" name="Rectangle 15"/>
+          <p:cNvSpPr/>
+          <p:nvPr/>
+        </p:nvSpPr>
+        <p:spPr>
+          <a:xfrm>
+            <a:off x="9235440" y="4681728"/>
+            <a:ext cx="2240280" cy="822960"/>
+          </a:xfrm>
+          <a:prstGeom prst="rect">
+            <a:avLst/>
+          </a:prstGeom>
+          <a:solidFill>
+            <a:srgbClr val="EEF3FA"/>
+          </a:solidFill>
+          <a:ln>
+            <a:noFill/>
+          </a:ln>
+        </p:spPr>
+        <p:style>
+          <a:lnRef idx="1">
+            <a:schemeClr val="accent1"/>
+          </a:lnRef>
+          <a:fillRef idx="3">
+            <a:schemeClr val="accent1"/>
+          </a:fillRef>
+          <a:effectRef idx="2">
+            <a:schemeClr val="accent1"/>
+          </a:effectRef>
+          <a:fontRef idx="minor">
+            <a:schemeClr val="lt1"/>
+          </a:fontRef>
+        </p:style>
+        <p:txBody>
+          <a:bodyPr rtlCol="0" anchor="ctr"/>
+          <a:lstStyle/>
+          <a:p>
+            <a:pPr algn="ctr"/>
+          </a:p>
+        </p:txBody>
+      </p:sp>
+      <p:sp>
+        <p:nvSpPr>
+          <p:cNvPr id="17" name="TextBox 16"/>
+          <p:cNvSpPr txBox="1"/>
+          <p:nvPr/>
+        </p:nvSpPr>
+        <p:spPr>
+          <a:xfrm>
+            <a:off x="9354312" y="4919472"/>
+            <a:ext cx="2011680" cy="365760"/>
+          </a:xfrm>
+          <a:prstGeom prst="rect">
+            <a:avLst/>
+          </a:prstGeom>
+          <a:noFill/>
+        </p:spPr>
+        <p:txBody>
+          <a:bodyPr wrap="square" lIns="0" rIns="0" tIns="0" bIns="0" anchor="t">
+            <a:noAutofit/>
+          </a:bodyPr>
+          <a:lstStyle/>
+          <a:p>
+            <a:pPr algn="l">
+              <a:lnSpc>
+                <a:spcPct val="140000"/>
+              </a:lnSpc>
+            </a:pPr>
+            <a:r>
+              <a:rPr sz="2000" b="1" lang="ja-JP" altLang="en-US">
+                <a:solidFill>
+                  <a:srgbClr val="0017C1"/>
+                </a:solidFill>
+                <a:latin typeface="Noto Sans JP"/>
+                <a:ea typeface="Noto Sans JP"/>
+              </a:rPr>
+              <a:t>構造データ</a:t>
+            </a:r>
+          </a:p>
+        </p:txBody>
+      </p:sp>
+      <p:sp>
+        <p:nvSpPr>
+          <p:cNvPr id="18" name="TextBox 17"/>
+          <p:cNvSpPr txBox="1"/>
+          <p:nvPr/>
+        </p:nvSpPr>
+        <p:spPr>
+          <a:xfrm>
+            <a:off x="3017520" y="4864608"/>
+            <a:ext cx="475488" cy="457200"/>
+          </a:xfrm>
+          <a:prstGeom prst="rect">
+            <a:avLst/>
+          </a:prstGeom>
+          <a:noFill/>
+        </p:spPr>
+        <p:txBody>
+          <a:bodyPr wrap="square" lIns="0" rIns="0" tIns="0" bIns="0" anchor="t">
+            <a:noAutofit/>
+          </a:bodyPr>
+          <a:lstStyle/>
+          <a:p>
+            <a:pPr algn="l">
+              <a:lnSpc>
+                <a:spcPct val="140000"/>
+              </a:lnSpc>
+            </a:pPr>
+            <a:r>
+              <a:rPr sz="2400" b="0" lang="ja-JP" altLang="en-US">
+                <a:solidFill>
+                  <a:srgbClr val="0017C1"/>
+                </a:solidFill>
+                <a:latin typeface="Noto Sans JP"/>
+                <a:ea typeface="Noto Sans JP"/>
+              </a:rPr>
+              <a:t>→</a:t>
+            </a:r>
+          </a:p>
+        </p:txBody>
+      </p:sp>
+      <p:sp>
+        <p:nvSpPr>
+          <p:cNvPr id="19" name="TextBox 18"/>
+          <p:cNvSpPr txBox="1"/>
+          <p:nvPr/>
+        </p:nvSpPr>
+        <p:spPr>
+          <a:xfrm>
+            <a:off x="5852160" y="4864608"/>
+            <a:ext cx="475488" cy="457200"/>
+          </a:xfrm>
+          <a:prstGeom prst="rect">
+            <a:avLst/>
+          </a:prstGeom>
+          <a:noFill/>
+        </p:spPr>
+        <p:txBody>
+          <a:bodyPr wrap="square" lIns="0" rIns="0" tIns="0" bIns="0" anchor="t">
+            <a:noAutofit/>
+          </a:bodyPr>
+          <a:lstStyle/>
+          <a:p>
+            <a:pPr algn="l">
+              <a:lnSpc>
+                <a:spcPct val="140000"/>
+              </a:lnSpc>
+            </a:pPr>
+            <a:r>
+              <a:rPr sz="2400" b="0" lang="ja-JP" altLang="en-US">
+                <a:solidFill>
+                  <a:srgbClr val="0017C1"/>
+                </a:solidFill>
+                <a:latin typeface="Noto Sans JP"/>
+                <a:ea typeface="Noto Sans JP"/>
+              </a:rPr>
+              <a:t>→</a:t>
+            </a:r>
+          </a:p>
+        </p:txBody>
+      </p:sp>
+      <p:sp>
+        <p:nvSpPr>
+          <p:cNvPr id="20" name="TextBox 19"/>
+          <p:cNvSpPr txBox="1"/>
+          <p:nvPr/>
+        </p:nvSpPr>
+        <p:spPr>
+          <a:xfrm>
+            <a:off x="8686800" y="4864608"/>
+            <a:ext cx="475488" cy="457200"/>
+          </a:xfrm>
+          <a:prstGeom prst="rect">
+            <a:avLst/>
+          </a:prstGeom>
+          <a:noFill/>
+        </p:spPr>
+        <p:txBody>
+          <a:bodyPr wrap="square" lIns="0" rIns="0" tIns="0" bIns="0" anchor="t">
+            <a:noAutofit/>
+          </a:bodyPr>
+          <a:lstStyle/>
+          <a:p>
+            <a:pPr algn="l">
+              <a:lnSpc>
+                <a:spcPct val="140000"/>
+              </a:lnSpc>
+            </a:pPr>
+            <a:r>
+              <a:rPr sz="2400" b="0" lang="ja-JP" altLang="en-US">
+                <a:solidFill>
+                  <a:srgbClr val="0017C1"/>
+                </a:solidFill>
+                <a:latin typeface="Noto Sans JP"/>
+                <a:ea typeface="Noto Sans JP"/>
+              </a:rPr>
+              <a:t>→</a:t>
             </a:r>
           </a:p>
         </p:txBody>
@@ -16436,27 +18276,27 @@
         </p:nvSpPr>
         <p:spPr>
           <a:xfrm>
-            <a:off x="685800" y="1554480"/>
-            <a:ext cx="10808208" cy="368808"/>
-          </a:xfrm>
-          <a:prstGeom prst="rect">
-            <a:avLst/>
-          </a:prstGeom>
-          <a:noFill/>
-        </p:spPr>
-        <p:txBody>
-          <a:bodyPr wrap="square" lIns="0" rIns="0" tIns="0" bIns="0" anchor="t">
-            <a:noAutofit/>
-          </a:bodyPr>
-          <a:lstStyle/>
-          <a:p>
-            <a:pPr algn="l">
-              <a:lnSpc>
-                <a:spcPts val="2112"/>
-              </a:lnSpc>
-            </a:pPr>
-            <a:r>
-              <a:rPr sz="1650" b="0" lang="ja-JP" altLang="en-US">
+            <a:off x="594360" y="1481328"/>
+            <a:ext cx="6885432" cy="385064"/>
+          </a:xfrm>
+          <a:prstGeom prst="rect">
+            <a:avLst/>
+          </a:prstGeom>
+          <a:noFill/>
+        </p:spPr>
+        <p:txBody>
+          <a:bodyPr wrap="square" lIns="0" rIns="0" tIns="0" bIns="0" anchor="t">
+            <a:noAutofit/>
+          </a:bodyPr>
+          <a:lstStyle/>
+          <a:p>
+            <a:pPr algn="l">
+              <a:lnSpc>
+                <a:spcPts val="2240"/>
+              </a:lnSpc>
+            </a:pPr>
+            <a:r>
+              <a:rPr sz="1750" b="0" lang="ja-JP" altLang="en-US">
                 <a:solidFill>
                   <a:srgbClr val="333333"/>
                 </a:solidFill>
@@ -16476,27 +18316,27 @@
         </p:nvSpPr>
         <p:spPr>
           <a:xfrm>
-            <a:off x="685800" y="2023872"/>
-            <a:ext cx="10808208" cy="368808"/>
-          </a:xfrm>
-          <a:prstGeom prst="rect">
-            <a:avLst/>
-          </a:prstGeom>
-          <a:noFill/>
-        </p:spPr>
-        <p:txBody>
-          <a:bodyPr wrap="square" lIns="0" rIns="0" tIns="0" bIns="0" anchor="t">
-            <a:noAutofit/>
-          </a:bodyPr>
-          <a:lstStyle/>
-          <a:p>
-            <a:pPr algn="l">
-              <a:lnSpc>
-                <a:spcPts val="2112"/>
-              </a:lnSpc>
-            </a:pPr>
-            <a:r>
-              <a:rPr sz="1650" b="0" lang="ja-JP" altLang="en-US">
+            <a:off x="594360" y="1966976"/>
+            <a:ext cx="6885432" cy="669544"/>
+          </a:xfrm>
+          <a:prstGeom prst="rect">
+            <a:avLst/>
+          </a:prstGeom>
+          <a:noFill/>
+        </p:spPr>
+        <p:txBody>
+          <a:bodyPr wrap="square" lIns="0" rIns="0" tIns="0" bIns="0" anchor="t">
+            <a:noAutofit/>
+          </a:bodyPr>
+          <a:lstStyle/>
+          <a:p>
+            <a:pPr algn="l">
+              <a:lnSpc>
+                <a:spcPts val="2240"/>
+              </a:lnSpc>
+            </a:pPr>
+            <a:r>
+              <a:rPr sz="1750" b="0" lang="ja-JP" altLang="en-US">
                 <a:solidFill>
                   <a:srgbClr val="333333"/>
                 </a:solidFill>
@@ -16516,27 +18356,27 @@
         </p:nvSpPr>
         <p:spPr>
           <a:xfrm>
-            <a:off x="685800" y="2493264"/>
-            <a:ext cx="10808208" cy="368808"/>
-          </a:xfrm>
-          <a:prstGeom prst="rect">
-            <a:avLst/>
-          </a:prstGeom>
-          <a:noFill/>
-        </p:spPr>
-        <p:txBody>
-          <a:bodyPr wrap="square" lIns="0" rIns="0" tIns="0" bIns="0" anchor="t">
-            <a:noAutofit/>
-          </a:bodyPr>
-          <a:lstStyle/>
-          <a:p>
-            <a:pPr algn="l">
-              <a:lnSpc>
-                <a:spcPts val="2112"/>
-              </a:lnSpc>
-            </a:pPr>
-            <a:r>
-              <a:rPr sz="1650" b="0" lang="ja-JP" altLang="en-US">
+            <a:off x="594360" y="2737104"/>
+            <a:ext cx="6885432" cy="669544"/>
+          </a:xfrm>
+          <a:prstGeom prst="rect">
+            <a:avLst/>
+          </a:prstGeom>
+          <a:noFill/>
+        </p:spPr>
+        <p:txBody>
+          <a:bodyPr wrap="square" lIns="0" rIns="0" tIns="0" bIns="0" anchor="t">
+            <a:noAutofit/>
+          </a:bodyPr>
+          <a:lstStyle/>
+          <a:p>
+            <a:pPr algn="l">
+              <a:lnSpc>
+                <a:spcPts val="2240"/>
+              </a:lnSpc>
+            </a:pPr>
+            <a:r>
+              <a:rPr sz="1750" b="0" lang="ja-JP" altLang="en-US">
                 <a:solidFill>
                   <a:srgbClr val="333333"/>
                 </a:solidFill>
@@ -16556,27 +18396,27 @@
         </p:nvSpPr>
         <p:spPr>
           <a:xfrm>
-            <a:off x="685800" y="2962656"/>
-            <a:ext cx="10808208" cy="368808"/>
-          </a:xfrm>
-          <a:prstGeom prst="rect">
-            <a:avLst/>
-          </a:prstGeom>
-          <a:noFill/>
-        </p:spPr>
-        <p:txBody>
-          <a:bodyPr wrap="square" lIns="0" rIns="0" tIns="0" bIns="0" anchor="t">
-            <a:noAutofit/>
-          </a:bodyPr>
-          <a:lstStyle/>
-          <a:p>
-            <a:pPr algn="l">
-              <a:lnSpc>
-                <a:spcPts val="2112"/>
-              </a:lnSpc>
-            </a:pPr>
-            <a:r>
-              <a:rPr sz="1650" b="0" i="1">
+            <a:off x="594360" y="3507232"/>
+            <a:ext cx="6885432" cy="669544"/>
+          </a:xfrm>
+          <a:prstGeom prst="rect">
+            <a:avLst/>
+          </a:prstGeom>
+          <a:noFill/>
+        </p:spPr>
+        <p:txBody>
+          <a:bodyPr wrap="square" lIns="0" rIns="0" tIns="0" bIns="0" anchor="t">
+            <a:noAutofit/>
+          </a:bodyPr>
+          <a:lstStyle/>
+          <a:p>
+            <a:pPr algn="l">
+              <a:lnSpc>
+                <a:spcPts val="2240"/>
+              </a:lnSpc>
+            </a:pPr>
+            <a:r>
+              <a:rPr sz="1750" b="0" i="1">
                 <a:solidFill>
                   <a:srgbClr val="333333"/>
                 </a:solidFill>
@@ -16586,7 +18426,7 @@
               <a:t>G</a:t>
             </a:r>
             <a:r>
-              <a:rPr sz="1650" b="0" lang="ja-JP" altLang="en-US">
+              <a:rPr sz="1750" b="0" lang="ja-JP" altLang="en-US">
                 <a:solidFill>
                   <a:srgbClr val="333333"/>
                 </a:solidFill>
@@ -16596,7 +18436,7 @@
               <a:t>：自由エネルギー、</a:t>
             </a:r>
             <a:r>
-              <a:rPr sz="1650" b="0" i="1">
+              <a:rPr sz="1750" b="0" i="1">
                 <a:solidFill>
                   <a:srgbClr val="333333"/>
                 </a:solidFill>
@@ -16606,7 +18446,7 @@
               <a:t>H</a:t>
             </a:r>
             <a:r>
-              <a:rPr sz="1650" b="0" lang="ja-JP" altLang="en-US">
+              <a:rPr sz="1750" b="0" lang="ja-JP" altLang="en-US">
                 <a:solidFill>
                   <a:srgbClr val="333333"/>
                 </a:solidFill>
@@ -16616,7 +18456,7 @@
               <a:t>：エンタルピー、</a:t>
             </a:r>
             <a:r>
-              <a:rPr sz="1650" b="0" i="1">
+              <a:rPr sz="1750" b="0" i="1">
                 <a:solidFill>
                   <a:srgbClr val="333333"/>
                 </a:solidFill>
@@ -16626,7 +18466,7 @@
               <a:t>T</a:t>
             </a:r>
             <a:r>
-              <a:rPr sz="1650" b="0" lang="ja-JP" altLang="en-US">
+              <a:rPr sz="1750" b="0" lang="ja-JP" altLang="en-US">
                 <a:solidFill>
                   <a:srgbClr val="333333"/>
                 </a:solidFill>
@@ -16636,7 +18476,7 @@
               <a:t>：温度、</a:t>
             </a:r>
             <a:r>
-              <a:rPr sz="1650" b="0" i="1">
+              <a:rPr sz="1750" b="0" i="1">
                 <a:solidFill>
                   <a:srgbClr val="333333"/>
                 </a:solidFill>
@@ -16646,7 +18486,7 @@
               <a:t>S</a:t>
             </a:r>
             <a:r>
-              <a:rPr sz="1650" b="0" lang="ja-JP" altLang="en-US">
+              <a:rPr sz="1750" b="0" lang="ja-JP" altLang="en-US">
                 <a:solidFill>
                   <a:srgbClr val="333333"/>
                 </a:solidFill>
@@ -16666,27 +18506,27 @@
         </p:nvSpPr>
         <p:spPr>
           <a:xfrm>
-            <a:off x="685800" y="3432047"/>
-            <a:ext cx="10808208" cy="637032"/>
-          </a:xfrm>
-          <a:prstGeom prst="rect">
-            <a:avLst/>
-          </a:prstGeom>
-          <a:noFill/>
-        </p:spPr>
-        <p:txBody>
-          <a:bodyPr wrap="square" lIns="0" rIns="0" tIns="0" bIns="0" anchor="t">
-            <a:noAutofit/>
-          </a:bodyPr>
-          <a:lstStyle/>
-          <a:p>
-            <a:pPr algn="l">
-              <a:lnSpc>
-                <a:spcPts val="2112"/>
-              </a:lnSpc>
-            </a:pPr>
-            <a:r>
-              <a:rPr sz="1650" b="0" lang="ja-JP" altLang="en-US">
+            <a:off x="594360" y="4277360"/>
+            <a:ext cx="6885432" cy="954024"/>
+          </a:xfrm>
+          <a:prstGeom prst="rect">
+            <a:avLst/>
+          </a:prstGeom>
+          <a:noFill/>
+        </p:spPr>
+        <p:txBody>
+          <a:bodyPr wrap="square" lIns="0" rIns="0" tIns="0" bIns="0" anchor="t">
+            <a:noAutofit/>
+          </a:bodyPr>
+          <a:lstStyle/>
+          <a:p>
+            <a:pPr algn="l">
+              <a:lnSpc>
+                <a:spcPts val="2240"/>
+              </a:lnSpc>
+            </a:pPr>
+            <a:r>
+              <a:rPr sz="1750" b="0" lang="ja-JP" altLang="en-US">
                 <a:solidFill>
                   <a:srgbClr val="333333"/>
                 </a:solidFill>
@@ -16696,7 +18536,7 @@
               <a:t>同じ温度・圧力の下で二つの状態を比べると、</a:t>
             </a:r>
             <a:r>
-              <a:rPr sz="1650" b="0" i="0">
+              <a:rPr sz="1750" b="0" i="0">
                 <a:solidFill>
                   <a:srgbClr val="333333"/>
                 </a:solidFill>
@@ -16706,7 +18546,7 @@
               <a:t>Δ </a:t>
             </a:r>
             <a:r>
-              <a:rPr sz="1650" b="0" i="1">
+              <a:rPr sz="1750" b="0" i="1">
                 <a:solidFill>
                   <a:srgbClr val="333333"/>
                 </a:solidFill>
@@ -16716,7 +18556,7 @@
               <a:t>G</a:t>
             </a:r>
             <a:r>
-              <a:rPr sz="1650" b="0" i="0">
+              <a:rPr sz="1750" b="0" i="0">
                 <a:solidFill>
                   <a:srgbClr val="333333"/>
                 </a:solidFill>
@@ -16726,7 +18566,7 @@
               <a:t> = Δ </a:t>
             </a:r>
             <a:r>
-              <a:rPr sz="1650" b="0" i="1">
+              <a:rPr sz="1750" b="0" i="1">
                 <a:solidFill>
                   <a:srgbClr val="333333"/>
                 </a:solidFill>
@@ -16736,7 +18576,7 @@
               <a:t>H</a:t>
             </a:r>
             <a:r>
-              <a:rPr sz="1650" b="0" i="0">
+              <a:rPr sz="1750" b="0" i="0">
                 <a:solidFill>
                   <a:srgbClr val="333333"/>
                 </a:solidFill>
@@ -16746,7 +18586,7 @@
               <a:t> − </a:t>
             </a:r>
             <a:r>
-              <a:rPr sz="1650" b="0" i="1">
+              <a:rPr sz="1750" b="0" i="1">
                 <a:solidFill>
                   <a:srgbClr val="333333"/>
                 </a:solidFill>
@@ -16756,7 +18596,7 @@
               <a:t>T</a:t>
             </a:r>
             <a:r>
-              <a:rPr sz="1650" b="0" i="0">
+              <a:rPr sz="1750" b="0" i="0">
                 <a:solidFill>
                   <a:srgbClr val="333333"/>
                 </a:solidFill>
@@ -16766,7 +18606,7 @@
               <a:t>Δ </a:t>
             </a:r>
             <a:r>
-              <a:rPr sz="1650" b="0" i="1">
+              <a:rPr sz="1750" b="0" i="1">
                 <a:solidFill>
                   <a:srgbClr val="333333"/>
                 </a:solidFill>
@@ -16776,7 +18616,7 @@
               <a:t>S</a:t>
             </a:r>
             <a:r>
-              <a:rPr sz="1650" b="0" lang="ja-JP" altLang="en-US">
+              <a:rPr sz="1750" b="0" lang="ja-JP" altLang="en-US">
                 <a:solidFill>
                   <a:srgbClr val="333333"/>
                 </a:solidFill>
@@ -16786,7 +18626,7 @@
               <a:t>。相互作用による </a:t>
             </a:r>
             <a:r>
-              <a:rPr sz="1650" b="0" i="0">
+              <a:rPr sz="1750" b="0" i="0">
                 <a:solidFill>
                   <a:srgbClr val="333333"/>
                 </a:solidFill>
@@ -16796,7 +18636,7 @@
               <a:t>Δ </a:t>
             </a:r>
             <a:r>
-              <a:rPr sz="1650" b="0" i="1">
+              <a:rPr sz="1750" b="0" i="1">
                 <a:solidFill>
                   <a:srgbClr val="333333"/>
                 </a:solidFill>
@@ -16806,7 +18646,7 @@
               <a:t>H</a:t>
             </a:r>
             <a:r>
-              <a:rPr sz="1650" b="0" lang="ja-JP" altLang="en-US">
+              <a:rPr sz="1750" b="0" lang="ja-JP" altLang="en-US">
                 <a:solidFill>
                   <a:srgbClr val="333333"/>
                 </a:solidFill>
@@ -16816,7 +18656,7 @@
               <a:t> だけでなく、鎖と水を含めた </a:t>
             </a:r>
             <a:r>
-              <a:rPr sz="1650" b="0" i="0">
+              <a:rPr sz="1750" b="0" i="0">
                 <a:solidFill>
                   <a:srgbClr val="333333"/>
                 </a:solidFill>
@@ -16826,7 +18666,7 @@
               <a:t>Δ </a:t>
             </a:r>
             <a:r>
-              <a:rPr sz="1650" b="0" i="1">
+              <a:rPr sz="1750" b="0" i="1">
                 <a:solidFill>
                   <a:srgbClr val="333333"/>
                 </a:solidFill>
@@ -16836,7 +18676,7 @@
               <a:t>S</a:t>
             </a:r>
             <a:r>
-              <a:rPr sz="1650" b="0" lang="ja-JP" altLang="en-US">
+              <a:rPr sz="1750" b="0" lang="ja-JP" altLang="en-US">
                 <a:solidFill>
                   <a:srgbClr val="333333"/>
                 </a:solidFill>
@@ -16856,27 +18696,27 @@
         </p:nvSpPr>
         <p:spPr>
           <a:xfrm>
-            <a:off x="685800" y="4169663"/>
-            <a:ext cx="10808208" cy="637032"/>
-          </a:xfrm>
-          <a:prstGeom prst="rect">
-            <a:avLst/>
-          </a:prstGeom>
-          <a:noFill/>
-        </p:spPr>
-        <p:txBody>
-          <a:bodyPr wrap="square" lIns="0" rIns="0" tIns="0" bIns="0" anchor="t">
-            <a:noAutofit/>
-          </a:bodyPr>
-          <a:lstStyle/>
-          <a:p>
-            <a:pPr algn="l">
-              <a:lnSpc>
-                <a:spcPts val="2112"/>
-              </a:lnSpc>
-            </a:pPr>
-            <a:r>
-              <a:rPr sz="1650" b="0" lang="ja-JP" altLang="en-US">
+            <a:off x="594360" y="5331968"/>
+            <a:ext cx="6885432" cy="669544"/>
+          </a:xfrm>
+          <a:prstGeom prst="rect">
+            <a:avLst/>
+          </a:prstGeom>
+          <a:noFill/>
+        </p:spPr>
+        <p:txBody>
+          <a:bodyPr wrap="square" lIns="0" rIns="0" tIns="0" bIns="0" anchor="t">
+            <a:noAutofit/>
+          </a:bodyPr>
+          <a:lstStyle/>
+          <a:p>
+            <a:pPr algn="l">
+              <a:lnSpc>
+                <a:spcPts val="2240"/>
+              </a:lnSpc>
+            </a:pPr>
+            <a:r>
+              <a:rPr sz="1750" b="0" lang="ja-JP" altLang="en-US">
                 <a:solidFill>
                   <a:srgbClr val="333333"/>
                 </a:solidFill>
@@ -16888,18 +18728,43 @@
           </a:p>
         </p:txBody>
       </p:sp>
+      <p:pic>
+        <p:nvPicPr>
+          <p:cNvPr id="12" name="Picture 11" descr="review_stability.png"/>
+          <p:cNvPicPr>
+            <a:picLocks noChangeAspect="1"/>
+          </p:cNvPicPr>
+          <p:nvPr/>
+        </p:nvPicPr>
+        <p:blipFill>
+          <a:blip r:embed="rId3"/>
+          <a:srcRect/>
+          <a:stretch>
+            <a:fillRect/>
+          </a:stretch>
+        </p:blipFill>
+        <p:spPr>
+          <a:xfrm>
+            <a:off x="7818120" y="2033016"/>
+            <a:ext cx="3749039" cy="2499359"/>
+          </a:xfrm>
+          <a:prstGeom prst="rect">
+            <a:avLst/>
+          </a:prstGeom>
+        </p:spPr>
+      </p:pic>
       <mc:AlternateContent xmlns:mc="http://schemas.openxmlformats.org/markup-compatibility/2006">
         <mc:Choice xmlns:a14="http://schemas.microsoft.com/office/drawing/2010/main" Requires="a14">
           <p:sp>
             <p:nvSpPr>
-              <p:cNvPr id="12" name="TextBox 11"/>
+              <p:cNvPr id="13" name="TextBox 12"/>
               <p:cNvSpPr txBox="1"/>
               <p:nvPr/>
             </p:nvSpPr>
             <p:spPr>
               <a:xfrm>
-                <a:off x="457200" y="5138928"/>
-                <a:ext cx="11277295" cy="390144"/>
+                <a:off x="8862059" y="5166360"/>
+                <a:ext cx="1786737" cy="377952"/>
               </a:xfrm>
               <a:prstGeom prst="rect">
                 <a:avLst/>
@@ -16912,18 +18777,18 @@
               </a:bodyPr>
               <a:lstStyle/>
               <a:p>
-                <a:pPr algn="ctr"/>
+                <a:pPr algn="l"/>
                 <a14:m>
                   <m:oMathPara xmlns:m="http://schemas.openxmlformats.org/officeDocument/2006/math">
                     <m:oMathParaPr>
-                      <m:jc m:val="center"/>
+                      <m:jc m:val="left"/>
                     </m:oMathParaPr>
                     <m:oMath>
                       <m:box>
                         <m:e>
                           <m:r>
                             <m:rPr/>
-                            <a:rPr lang="en-US" sz="2600" i="1">
+                            <a:rPr lang="en-US" sz="2500" i="1">
                               <a:solidFill>
                                 <a:srgbClr val="1A1A1A"/>
                               </a:solidFill>
@@ -16936,7 +18801,7 @@
                             <m:rPr>
                               <m:sty m:val="p"/>
                             </m:rPr>
-                            <a:rPr lang="en-US" sz="2600" i="0">
+                            <a:rPr lang="en-US" sz="2500" i="0">
                               <a:solidFill>
                                 <a:srgbClr val="1A1A1A"/>
                               </a:solidFill>
@@ -16947,7 +18812,7 @@
                           </m:r>
                           <m:r>
                             <m:rPr/>
-                            <a:rPr lang="en-US" sz="2600" i="1">
+                            <a:rPr lang="en-US" sz="2500" i="1">
                               <a:solidFill>
                                 <a:srgbClr val="1A1A1A"/>
                               </a:solidFill>
@@ -16960,7 +18825,7 @@
                             <m:rPr>
                               <m:sty m:val="p"/>
                             </m:rPr>
-                            <a:rPr lang="en-US" sz="2600" i="0">
+                            <a:rPr lang="en-US" sz="2500" i="0">
                               <a:solidFill>
                                 <a:srgbClr val="1A1A1A"/>
                               </a:solidFill>
@@ -16971,7 +18836,7 @@
                           </m:r>
                           <m:r>
                             <m:rPr/>
-                            <a:rPr lang="en-US" sz="2600" i="1">
+                            <a:rPr lang="en-US" sz="2500" i="1">
                               <a:solidFill>
                                 <a:srgbClr val="1A1A1A"/>
                               </a:solidFill>
@@ -16982,7 +18847,7 @@
                           </m:r>
                           <m:r>
                             <m:rPr/>
-                            <a:rPr lang="en-US" sz="2600" i="1">
+                            <a:rPr lang="en-US" sz="2500" i="1">
                               <a:solidFill>
                                 <a:srgbClr val="1A1A1A"/>
                               </a:solidFill>
@@ -16996,7 +18861,7 @@
                     </m:oMath>
                   </m:oMathPara>
                 </a14:m>
-                <a:endParaRPr lang="en-US" sz="2600"/>
+                <a:endParaRPr lang="en-US" sz="2500"/>
               </a:p>
             </p:txBody>
           </p:sp>
@@ -17004,22 +18869,22 @@
         <mc:Fallback>
           <p:pic>
             <p:nvPicPr>
-              <p:cNvPr id="13" name="Picture 12" descr="G = H - TS"/>
+              <p:cNvPr id="14" name="Picture 13" descr="G = H - TS"/>
               <p:cNvPicPr>
                 <a:picLocks noChangeAspect="1"/>
               </p:cNvPicPr>
               <p:nvPr/>
             </p:nvPicPr>
             <p:blipFill>
-              <a:blip r:embed="rId3"/>
+              <a:blip r:embed="rId4"/>
               <a:stretch>
                 <a:fillRect/>
               </a:stretch>
             </p:blipFill>
             <p:spPr>
               <a:xfrm>
-                <a:off x="5282031" y="5138928"/>
-                <a:ext cx="1627632" cy="390144"/>
+                <a:off x="8862059" y="5166360"/>
+                <a:ext cx="1569720" cy="377952"/>
               </a:xfrm>
               <a:prstGeom prst="rect">
                 <a:avLst/>
@@ -17129,7 +18994,7 @@
                 <a:latin typeface="Noto Sans JP"/>
                 <a:ea typeface="Noto Sans JP"/>
               </a:rPr>
-              <a:t>PDB は座標と根拠を保存する</a:t>
+              <a:t>PDB は原子座標と実験情報を保存する</a:t>
             </a:r>
           </a:p>
         </p:txBody>
@@ -18269,7 +20134,7 @@
                 <a:latin typeface="Noto Sans JP"/>
                 <a:ea typeface="Noto Sans JP"/>
               </a:rPr>
-              <a:t>01 構造を何で表すか</a:t>
+              <a:t>構造データ</a:t>
             </a:r>
           </a:p>
         </p:txBody>
@@ -18309,7 +20174,7 @@
                 <a:latin typeface="Noto Sans JP"/>
                 <a:ea typeface="Noto Sans JP"/>
               </a:rPr>
-              <a:t>座標ファイルの番号は残基の意味ではない</a:t>
+              <a:t>残基番号と配列中の位置を区別する</a:t>
             </a:r>
           </a:p>
         </p:txBody>
@@ -18423,7 +20288,7 @@
         <p:spPr>
           <a:xfrm>
             <a:off x="594360" y="4727448"/>
-            <a:ext cx="5349240" cy="1238504"/>
+            <a:ext cx="5349240" cy="1466088"/>
           </a:xfrm>
           <a:prstGeom prst="rect">
             <a:avLst/>
@@ -18449,7 +20314,7 @@
                 <a:latin typeface="Noto Sans JP"/>
                 <a:ea typeface="Noto Sans JP"/>
               </a:rPr>
-              <a:t>PDB/mmCIFには鎖、残基、原子、占有率、代替位置などが記録される。著者番号と連続した配列番号は別で、挿入コードや欠損もある。 100・100A・100Bは別の残基。整数へ変換すると挿入された残基が消える。座標欠損は位置がゼロではなく、観測から位置を決めていないことを表す。</a:t>
+              <a:t>PDB/mmCIFには鎖、残基、原子、占有率、代替位置などが記録される。著者番号と連続した配列番号は別で、挿入コードや欠損もある。 100・100A・100Bは別の残基。挿入コードを落とすと異なる残基を区別できなくなる。座標欠損は位置がゼロではなく、観測から位置を決めていないことを表す。</a:t>
             </a:r>
           </a:p>
         </p:txBody>
@@ -19342,7 +21207,7 @@
                 <a:latin typeface="Noto Sans JP"/>
                 <a:ea typeface="Noto Sans JP"/>
               </a:rPr>
-              <a:t>構造を操作して予想を確かめる</a:t>
+              <a:t>構造を回転し、表示を切り替えて観察する</a:t>
             </a:r>
           </a:p>
         </p:txBody>
@@ -19771,27 +21636,27 @@
         </p:nvSpPr>
         <p:spPr>
           <a:xfrm>
-            <a:off x="594360" y="1389888"/>
-            <a:ext cx="10972800" cy="718312"/>
-          </a:xfrm>
-          <a:prstGeom prst="rect">
-            <a:avLst/>
-          </a:prstGeom>
-          <a:noFill/>
-        </p:spPr>
-        <p:txBody>
-          <a:bodyPr wrap="square" lIns="0" rIns="0" tIns="0" bIns="0" anchor="t">
-            <a:noAutofit/>
-          </a:bodyPr>
-          <a:lstStyle/>
-          <a:p>
-            <a:pPr algn="l">
-              <a:lnSpc>
-                <a:spcPts val="2432"/>
-              </a:lnSpc>
-            </a:pPr>
-            <a:r>
-              <a:rPr sz="1900" b="0" lang="ja-JP" altLang="en-US">
+            <a:off x="594360" y="1408176"/>
+            <a:ext cx="6995160" cy="929640"/>
+          </a:xfrm>
+          <a:prstGeom prst="rect">
+            <a:avLst/>
+          </a:prstGeom>
+          <a:noFill/>
+        </p:spPr>
+        <p:txBody>
+          <a:bodyPr wrap="square" lIns="0" rIns="0" tIns="0" bIns="0" anchor="t">
+            <a:noAutofit/>
+          </a:bodyPr>
+          <a:lstStyle/>
+          <a:p>
+            <a:pPr algn="l">
+              <a:lnSpc>
+                <a:spcPts val="2176"/>
+              </a:lnSpc>
+            </a:pPr>
+            <a:r>
+              <a:rPr sz="1700" b="0" lang="ja-JP" altLang="en-US">
                 <a:solidFill>
                   <a:srgbClr val="333333"/>
                 </a:solidFill>
@@ -19801,7 +21666,7 @@
               <a:t>点の対応と順序を固定する。回転も鏡映も点間距離を保つため、距離行列だけでは左右の違いが失われる。4点の向きは符号付き体積 </a:t>
             </a:r>
             <a:r>
-              <a:rPr sz="1900" b="0" i="1">
+              <a:rPr sz="1700" b="0" i="1">
                 <a:solidFill>
                   <a:srgbClr val="333333"/>
                 </a:solidFill>
@@ -19811,7 +21676,7 @@
               <a:t>V</a:t>
             </a:r>
             <a:r>
-              <a:rPr sz="1900" b="0" lang="ja-JP" altLang="en-US">
+              <a:rPr sz="1700" b="0" lang="ja-JP" altLang="en-US">
                 <a:solidFill>
                   <a:srgbClr val="333333"/>
                 </a:solidFill>
@@ -19833,8 +21698,8 @@
             </p:nvSpPr>
             <p:spPr>
               <a:xfrm>
-                <a:off x="457200" y="2377440"/>
-                <a:ext cx="11277295" cy="826008"/>
+                <a:off x="1991868" y="2606040"/>
+                <a:ext cx="4479462" cy="682752"/>
               </a:xfrm>
               <a:prstGeom prst="rect">
                 <a:avLst/>
@@ -19847,18 +21712,18 @@
               </a:bodyPr>
               <a:lstStyle/>
               <a:p>
-                <a:pPr algn="ctr"/>
+                <a:pPr algn="l"/>
                 <a14:m>
                   <m:oMathPara xmlns:m="http://schemas.openxmlformats.org/officeDocument/2006/math">
                     <m:oMathParaPr>
-                      <m:jc m:val="center"/>
+                      <m:jc m:val="left"/>
                     </m:oMathParaPr>
                     <m:oMath>
                       <m:box>
                         <m:e>
                           <m:r>
                             <m:rPr/>
-                            <a:rPr lang="en-US" sz="2700" i="1">
+                            <a:rPr lang="en-US" sz="2200" i="1">
                               <a:solidFill>
                                 <a:srgbClr val="1A1A1A"/>
                               </a:solidFill>
@@ -19871,7 +21736,7 @@
                             <m:rPr>
                               <m:sty m:val="p"/>
                             </m:rPr>
-                            <a:rPr lang="en-US" sz="2700" i="0">
+                            <a:rPr lang="en-US" sz="2200" i="0">
                               <a:solidFill>
                                 <a:srgbClr val="1A1A1A"/>
                               </a:solidFill>
@@ -19888,7 +21753,7 @@
                                     <m:rPr>
                                       <m:sty m:val="p"/>
                                     </m:rPr>
-                                    <a:rPr lang="en-US" sz="2700" i="0">
+                                    <a:rPr lang="en-US" sz="2200" i="0">
                                       <a:solidFill>
                                         <a:srgbClr val="1A1A1A"/>
                                       </a:solidFill>
@@ -19907,7 +21772,7 @@
                                     <m:rPr>
                                       <m:sty m:val="p"/>
                                     </m:rPr>
-                                    <a:rPr lang="en-US" sz="2700" i="0">
+                                    <a:rPr lang="en-US" sz="2200" i="0">
                                       <a:solidFill>
                                         <a:srgbClr val="1A1A1A"/>
                                       </a:solidFill>
@@ -19924,7 +21789,7 @@
                             <m:rPr>
                               <m:sty m:val="p"/>
                             </m:rPr>
-                            <a:rPr lang="en-US" sz="2700" i="0">
+                            <a:rPr lang="en-US" sz="2200" i="0">
                               <a:solidFill>
                                 <a:srgbClr val="1A1A1A"/>
                               </a:solidFill>
@@ -19937,7 +21802,7 @@
                             <m:rPr>
                               <m:sty m:val="p"/>
                             </m:rPr>
-                            <a:rPr lang="en-US" sz="2700" i="0">
+                            <a:rPr lang="en-US" sz="2200" i="0">
                               <a:solidFill>
                                 <a:srgbClr val="1A1A1A"/>
                               </a:solidFill>
@@ -19950,7 +21815,7 @@
                             <m:e>
                               <m:r>
                                 <m:rPr/>
-                                <a:rPr lang="en-US" sz="2700" i="1">
+                                <a:rPr lang="en-US" sz="2200" i="1">
                                   <a:solidFill>
                                     <a:srgbClr val="1A1A1A"/>
                                   </a:solidFill>
@@ -19965,7 +21830,7 @@
                                 <m:rPr>
                                   <m:sty m:val="p"/>
                                 </m:rPr>
-                                <a:rPr lang="en-US" sz="2700" i="0">
+                                <a:rPr lang="en-US" sz="2200" i="0">
                                   <a:solidFill>
                                     <a:srgbClr val="1A1A1A"/>
                                   </a:solidFill>
@@ -19980,7 +21845,7 @@
                             <m:rPr>
                               <m:sty m:val="p"/>
                             </m:rPr>
-                            <a:rPr lang="en-US" sz="2700" i="0">
+                            <a:rPr lang="en-US" sz="2200" i="0">
                               <a:solidFill>
                                 <a:srgbClr val="1A1A1A"/>
                               </a:solidFill>
@@ -19993,7 +21858,7 @@
                             <m:e>
                               <m:r>
                                 <m:rPr/>
-                                <a:rPr lang="en-US" sz="2700" i="1">
+                                <a:rPr lang="en-US" sz="2200" i="1">
                                   <a:solidFill>
                                     <a:srgbClr val="1A1A1A"/>
                                   </a:solidFill>
@@ -20008,7 +21873,7 @@
                                 <m:rPr>
                                   <m:sty m:val="p"/>
                                 </m:rPr>
-                                <a:rPr lang="en-US" sz="2700" i="0">
+                                <a:rPr lang="en-US" sz="2200" i="0">
                                   <a:solidFill>
                                     <a:srgbClr val="1A1A1A"/>
                                   </a:solidFill>
@@ -20023,7 +21888,7 @@
                             <m:rPr>
                               <m:sty m:val="p"/>
                             </m:rPr>
-                            <a:rPr lang="en-US" sz="2700" i="0">
+                            <a:rPr lang="en-US" sz="2200" i="0">
                               <a:solidFill>
                                 <a:srgbClr val="1A1A1A"/>
                               </a:solidFill>
@@ -20037,7 +21902,7 @@
                               <m:nor/>
                               <m:sty m:val="p"/>
                             </m:rPr>
-                            <a:rPr lang="en-US" sz="2700" i="0">
+                            <a:rPr lang="en-US" sz="2200" i="0">
                               <a:solidFill>
                                 <a:srgbClr val="1A1A1A"/>
                               </a:solidFill>
@@ -20050,7 +21915,7 @@
                             <m:e>
                               <m:r>
                                 <m:rPr/>
-                                <a:rPr lang="en-US" sz="2700" i="1">
+                                <a:rPr lang="en-US" sz="2200" i="1">
                                   <a:solidFill>
                                     <a:srgbClr val="1A1A1A"/>
                                   </a:solidFill>
@@ -20065,7 +21930,7 @@
                                 <m:rPr>
                                   <m:sty m:val="p"/>
                                 </m:rPr>
-                                <a:rPr lang="en-US" sz="2700" i="0">
+                                <a:rPr lang="en-US" sz="2200" i="0">
                                   <a:solidFill>
                                     <a:srgbClr val="1A1A1A"/>
                                   </a:solidFill>
@@ -20080,7 +21945,7 @@
                             <m:rPr>
                               <m:sty m:val="p"/>
                             </m:rPr>
-                            <a:rPr lang="en-US" sz="2700" i="0">
+                            <a:rPr lang="en-US" sz="2200" i="0">
                               <a:solidFill>
                                 <a:srgbClr val="1A1A1A"/>
                               </a:solidFill>
@@ -20093,7 +21958,7 @@
                             <m:e>
                               <m:r>
                                 <m:rPr/>
-                                <a:rPr lang="en-US" sz="2700" i="1">
+                                <a:rPr lang="en-US" sz="2200" i="1">
                                   <a:solidFill>
                                     <a:srgbClr val="1A1A1A"/>
                                   </a:solidFill>
@@ -20108,7 +21973,7 @@
                                 <m:rPr>
                                   <m:sty m:val="p"/>
                                 </m:rPr>
-                                <a:rPr lang="en-US" sz="2700" i="0">
+                                <a:rPr lang="en-US" sz="2200" i="0">
                                   <a:solidFill>
                                     <a:srgbClr val="1A1A1A"/>
                                   </a:solidFill>
@@ -20123,7 +21988,7 @@
                             <m:rPr>
                               <m:sty m:val="p"/>
                             </m:rPr>
-                            <a:rPr lang="en-US" sz="2700" i="0">
+                            <a:rPr lang="en-US" sz="2200" i="0">
                               <a:solidFill>
                                 <a:srgbClr val="1A1A1A"/>
                               </a:solidFill>
@@ -20137,7 +22002,7 @@
                               <m:nor/>
                               <m:sty m:val="p"/>
                             </m:rPr>
-                            <a:rPr lang="en-US" sz="2700" i="0">
+                            <a:rPr lang="en-US" sz="2200" i="0">
                               <a:solidFill>
                                 <a:srgbClr val="1A1A1A"/>
                               </a:solidFill>
@@ -20150,7 +22015,7 @@
                             <m:e>
                               <m:r>
                                 <m:rPr/>
-                                <a:rPr lang="en-US" sz="2700" i="1">
+                                <a:rPr lang="en-US" sz="2200" i="1">
                                   <a:solidFill>
                                     <a:srgbClr val="1A1A1A"/>
                                   </a:solidFill>
@@ -20165,7 +22030,7 @@
                                 <m:rPr>
                                   <m:sty m:val="p"/>
                                 </m:rPr>
-                                <a:rPr lang="en-US" sz="2700" i="0">
+                                <a:rPr lang="en-US" sz="2200" i="0">
                                   <a:solidFill>
                                     <a:srgbClr val="1A1A1A"/>
                                   </a:solidFill>
@@ -20180,7 +22045,7 @@
                             <m:rPr>
                               <m:sty m:val="p"/>
                             </m:rPr>
-                            <a:rPr lang="en-US" sz="2700" i="0">
+                            <a:rPr lang="en-US" sz="2200" i="0">
                               <a:solidFill>
                                 <a:srgbClr val="1A1A1A"/>
                               </a:solidFill>
@@ -20193,7 +22058,7 @@
                             <m:e>
                               <m:r>
                                 <m:rPr/>
-                                <a:rPr lang="en-US" sz="2700" i="1">
+                                <a:rPr lang="en-US" sz="2200" i="1">
                                   <a:solidFill>
                                     <a:srgbClr val="1A1A1A"/>
                                   </a:solidFill>
@@ -20208,7 +22073,7 @@
                                 <m:rPr>
                                   <m:sty m:val="p"/>
                                 </m:rPr>
-                                <a:rPr lang="en-US" sz="2700" i="0">
+                                <a:rPr lang="en-US" sz="2200" i="0">
                                   <a:solidFill>
                                     <a:srgbClr val="1A1A1A"/>
                                   </a:solidFill>
@@ -20223,7 +22088,7 @@
                             <m:rPr>
                               <m:sty m:val="p"/>
                             </m:rPr>
-                            <a:rPr lang="en-US" sz="2700" i="0">
+                            <a:rPr lang="en-US" sz="2200" i="0">
                               <a:solidFill>
                                 <a:srgbClr val="1A1A1A"/>
                               </a:solidFill>
@@ -20237,7 +22102,7 @@
                     </m:oMath>
                   </m:oMathPara>
                 </a14:m>
-                <a:endParaRPr lang="en-US" sz="2700"/>
+                <a:endParaRPr lang="en-US" sz="2200"/>
               </a:p>
             </p:txBody>
           </p:sp>
@@ -20259,8 +22124,8 @@
             </p:blipFill>
             <p:spPr>
               <a:xfrm>
-                <a:off x="3608679" y="2377440"/>
-                <a:ext cx="4974336" cy="826008"/>
+                <a:off x="1991868" y="2606040"/>
+                <a:ext cx="4062984" cy="682752"/>
               </a:xfrm>
               <a:prstGeom prst="rect">
                 <a:avLst/>
@@ -20277,27 +22142,27 @@
         </p:nvSpPr>
         <p:spPr>
           <a:xfrm>
-            <a:off x="594360" y="3383280"/>
-            <a:ext cx="10972800" cy="637032"/>
-          </a:xfrm>
-          <a:prstGeom prst="rect">
-            <a:avLst/>
-          </a:prstGeom>
-          <a:noFill/>
-        </p:spPr>
-        <p:txBody>
-          <a:bodyPr wrap="square" lIns="0" rIns="0" tIns="0" bIns="0" anchor="t">
-            <a:noAutofit/>
-          </a:bodyPr>
-          <a:lstStyle/>
-          <a:p>
-            <a:pPr algn="l">
-              <a:lnSpc>
-                <a:spcPts val="2112"/>
-              </a:lnSpc>
-            </a:pPr>
-            <a:r>
-              <a:rPr sz="1650" b="0" lang="ja-JP" altLang="en-US">
+            <a:off x="594360" y="3328416"/>
+            <a:ext cx="6995160" cy="653288"/>
+          </a:xfrm>
+          <a:prstGeom prst="rect">
+            <a:avLst/>
+          </a:prstGeom>
+          <a:noFill/>
+        </p:spPr>
+        <p:txBody>
+          <a:bodyPr wrap="square" lIns="0" rIns="0" tIns="0" bIns="0" anchor="t">
+            <a:noAutofit/>
+          </a:bodyPr>
+          <a:lstStyle/>
+          <a:p>
+            <a:pPr algn="l">
+              <a:lnSpc>
+                <a:spcPts val="2176"/>
+              </a:lnSpc>
+            </a:pPr>
+            <a:r>
+              <a:rPr sz="1700" b="0" lang="ja-JP" altLang="en-US">
                 <a:solidFill>
                   <a:srgbClr val="333333"/>
                 </a:solidFill>
@@ -20307,7 +22172,7 @@
               <a:t>直交行列 </a:t>
             </a:r>
             <a:r>
-              <a:rPr sz="1650" b="0" i="1">
+              <a:rPr sz="1700" b="0" i="1">
                 <a:solidFill>
                   <a:srgbClr val="333333"/>
                 </a:solidFill>
@@ -20317,7 +22182,7 @@
               <a:t>Q</a:t>
             </a:r>
             <a:r>
-              <a:rPr sz="1650" b="0" lang="ja-JP" altLang="en-US">
+              <a:rPr sz="1700" b="0" lang="ja-JP" altLang="en-US">
                 <a:solidFill>
                   <a:srgbClr val="333333"/>
                 </a:solidFill>
@@ -20327,7 +22192,7 @@
               <a:t> と並進 </a:t>
             </a:r>
             <a:r>
-              <a:rPr sz="1650" b="0" i="1">
+              <a:rPr sz="1700" b="0" i="1">
                 <a:solidFill>
                   <a:srgbClr val="333333"/>
                 </a:solidFill>
@@ -20337,7 +22202,7 @@
               <a:t>t</a:t>
             </a:r>
             <a:r>
-              <a:rPr sz="1650" b="0" lang="ja-JP" altLang="en-US">
+              <a:rPr sz="1700" b="0" lang="ja-JP" altLang="en-US">
                 <a:solidFill>
                   <a:srgbClr val="333333"/>
                 </a:solidFill>
@@ -20347,7 +22212,7 @@
               <a:t> で </a:t>
             </a:r>
             <a:r>
-              <a:rPr sz="1650" b="0" i="1">
+              <a:rPr sz="1700" b="0" i="1">
                 <a:solidFill>
                   <a:srgbClr val="333333"/>
                 </a:solidFill>
@@ -20357,7 +22222,7 @@
               <a:t>x</a:t>
             </a:r>
             <a:r>
-              <a:rPr sz="1650" b="0" i="1" baseline="-25000">
+              <a:rPr sz="1700" b="0" i="1" baseline="-25000">
                 <a:solidFill>
                   <a:srgbClr val="333333"/>
                 </a:solidFill>
@@ -20367,7 +22232,7 @@
               <a:t>i</a:t>
             </a:r>
             <a:r>
-              <a:rPr sz="1650" b="0" i="0">
+              <a:rPr sz="1700" b="0" i="0">
                 <a:solidFill>
                   <a:srgbClr val="333333"/>
                 </a:solidFill>
@@ -20377,7 +22242,7 @@
               <a:t>↦ </a:t>
             </a:r>
             <a:r>
-              <a:rPr sz="1650" b="0" i="1">
+              <a:rPr sz="1700" b="0" i="1">
                 <a:solidFill>
                   <a:srgbClr val="333333"/>
                 </a:solidFill>
@@ -20387,7 +22252,7 @@
               <a:t>Qx</a:t>
             </a:r>
             <a:r>
-              <a:rPr sz="1650" b="0" i="1" baseline="-25000">
+              <a:rPr sz="1700" b="0" i="1" baseline="-25000">
                 <a:solidFill>
                   <a:srgbClr val="333333"/>
                 </a:solidFill>
@@ -20397,7 +22262,7 @@
               <a:t>i</a:t>
             </a:r>
             <a:r>
-              <a:rPr sz="1650" b="0" i="0">
+              <a:rPr sz="1700" b="0" i="0">
                 <a:solidFill>
                   <a:srgbClr val="333333"/>
                 </a:solidFill>
@@ -20407,7 +22272,7 @@
               <a:t>+</a:t>
             </a:r>
             <a:r>
-              <a:rPr sz="1650" b="0" i="1">
+              <a:rPr sz="1700" b="0" i="1">
                 <a:solidFill>
                   <a:srgbClr val="333333"/>
                 </a:solidFill>
@@ -20417,7 +22282,7 @@
               <a:t>t</a:t>
             </a:r>
             <a:r>
-              <a:rPr sz="1650" b="0" lang="ja-JP" altLang="en-US">
+              <a:rPr sz="1700" b="0" lang="ja-JP" altLang="en-US">
                 <a:solidFill>
                   <a:srgbClr val="333333"/>
                 </a:solidFill>
@@ -20427,7 +22292,7 @@
               <a:t> と変換する。差から </a:t>
             </a:r>
             <a:r>
-              <a:rPr sz="1650" b="0" i="1">
+              <a:rPr sz="1700" b="0" i="1">
                 <a:solidFill>
                   <a:srgbClr val="333333"/>
                 </a:solidFill>
@@ -20437,7 +22302,7 @@
               <a:t>t</a:t>
             </a:r>
             <a:r>
-              <a:rPr sz="1650" b="0" lang="ja-JP" altLang="en-US">
+              <a:rPr sz="1700" b="0" lang="ja-JP" altLang="en-US">
                 <a:solidFill>
                   <a:srgbClr val="333333"/>
                 </a:solidFill>
@@ -20459,8 +22324,8 @@
             </p:nvSpPr>
             <p:spPr>
               <a:xfrm>
-                <a:off x="457200" y="4251960"/>
-                <a:ext cx="11277295" cy="448056"/>
+                <a:off x="2337816" y="4352544"/>
+                <a:ext cx="3732215" cy="390144"/>
               </a:xfrm>
               <a:prstGeom prst="rect">
                 <a:avLst/>
@@ -20473,11 +22338,11 @@
               </a:bodyPr>
               <a:lstStyle/>
               <a:p>
-                <a:pPr algn="ctr"/>
+                <a:pPr algn="l"/>
                 <a14:m>
                   <m:oMathPara xmlns:m="http://schemas.openxmlformats.org/officeDocument/2006/math">
                     <m:oMathParaPr>
-                      <m:jc m:val="center"/>
+                      <m:jc m:val="left"/>
                     </m:oMathParaPr>
                     <m:oMath>
                       <m:box>
@@ -20486,7 +22351,7 @@
                             <m:e>
                               <m:r>
                                 <m:rPr/>
-                                <a:rPr lang="en-US" sz="2700" i="1">
+                                <a:rPr lang="en-US" sz="2300" i="1">
                                   <a:solidFill>
                                     <a:srgbClr val="1A1A1A"/>
                                   </a:solidFill>
@@ -20503,7 +22368,7 @@
                                     <m:rPr>
                                       <m:sty m:val="p"/>
                                     </m:rPr>
-                                    <a:rPr lang="en-US" sz="2700" i="0">
+                                    <a:rPr lang="en-US" sz="2300" i="0">
                                       <a:solidFill>
                                         <a:srgbClr val="1A1A1A"/>
                                       </a:solidFill>
@@ -20520,7 +22385,7 @@
                             <m:rPr>
                               <m:sty m:val="p"/>
                             </m:rPr>
-                            <a:rPr lang="en-US" sz="2700" i="0">
+                            <a:rPr lang="en-US" sz="2300" i="0">
                               <a:solidFill>
                                 <a:srgbClr val="1A1A1A"/>
                               </a:solidFill>
@@ -20533,7 +22398,7 @@
                             <m:rPr>
                               <m:sty m:val="p"/>
                             </m:rPr>
-                            <a:rPr lang="en-US" sz="2700" i="0">
+                            <a:rPr lang="en-US" sz="2300" i="0">
                               <a:solidFill>
                                 <a:srgbClr val="1A1A1A"/>
                               </a:solidFill>
@@ -20546,7 +22411,7 @@
                             <m:rPr>
                               <m:sty m:val="p"/>
                             </m:rPr>
-                            <a:rPr lang="en-US" sz="2700" i="0">
+                            <a:rPr lang="en-US" sz="2300" i="0">
                               <a:solidFill>
                                 <a:srgbClr val="1A1A1A"/>
                               </a:solidFill>
@@ -20557,7 +22422,7 @@
                           </m:r>
                           <m:r>
                             <m:rPr/>
-                            <a:rPr lang="en-US" sz="2700" i="1">
+                            <a:rPr lang="en-US" sz="2300" i="1">
                               <a:solidFill>
                                 <a:srgbClr val="1A1A1A"/>
                               </a:solidFill>
@@ -20570,7 +22435,7 @@
                             <m:rPr>
                               <m:sty m:val="p"/>
                             </m:rPr>
-                            <a:rPr lang="en-US" sz="2700" i="0">
+                            <a:rPr lang="en-US" sz="2300" i="0">
                               <a:solidFill>
                                 <a:srgbClr val="1A1A1A"/>
                               </a:solidFill>
@@ -20581,7 +22446,7 @@
                           </m:r>
                           <m:r>
                             <m:rPr/>
-                            <a:rPr lang="en-US" sz="2700" i="1">
+                            <a:rPr lang="en-US" sz="2300" i="1">
                               <a:solidFill>
                                 <a:srgbClr val="1A1A1A"/>
                               </a:solidFill>
@@ -20594,7 +22459,7 @@
                             <m:rPr>
                               <m:sty m:val="p"/>
                             </m:rPr>
-                            <a:rPr lang="en-US" sz="2700" i="0">
+                            <a:rPr lang="en-US" sz="2300" i="0">
                               <a:solidFill>
                                 <a:srgbClr val="1A1A1A"/>
                               </a:solidFill>
@@ -20607,7 +22472,7 @@
                             <m:rPr>
                               <m:sty m:val="p"/>
                             </m:rPr>
-                            <a:rPr lang="en-US" sz="2700" i="0">
+                            <a:rPr lang="en-US" sz="2300" i="0">
                               <a:solidFill>
                                 <a:srgbClr val="1A1A1A"/>
                               </a:solidFill>
@@ -20620,7 +22485,7 @@
                             <m:e>
                               <m:r>
                                 <m:rPr/>
-                                <a:rPr lang="en-US" sz="2700" i="1">
+                                <a:rPr lang="en-US" sz="2300" i="1">
                                   <a:solidFill>
                                     <a:srgbClr val="1A1A1A"/>
                                   </a:solidFill>
@@ -20633,7 +22498,7 @@
                             <m:sup>
                               <m:r>
                                 <m:rPr/>
-                                <a:rPr lang="en-US" sz="2700" i="1">
+                                <a:rPr lang="en-US" sz="2300" i="1">
                                   <a:solidFill>
                                     <a:srgbClr val="1A1A1A"/>
                                   </a:solidFill>
@@ -20646,7 +22511,7 @@
                           </m:sSup>
                           <m:r>
                             <m:rPr/>
-                            <a:rPr lang="en-US" sz="2700" i="1">
+                            <a:rPr lang="en-US" sz="2300" i="1">
                               <a:solidFill>
                                 <a:srgbClr val="1A1A1A"/>
                               </a:solidFill>
@@ -20659,7 +22524,7 @@
                             <m:rPr>
                               <m:sty m:val="p"/>
                             </m:rPr>
-                            <a:rPr lang="en-US" sz="2700" i="0">
+                            <a:rPr lang="en-US" sz="2300" i="0">
                               <a:solidFill>
                                 <a:srgbClr val="1A1A1A"/>
                               </a:solidFill>
@@ -20670,7 +22535,7 @@
                           </m:r>
                           <m:r>
                             <m:rPr/>
-                            <a:rPr lang="en-US" sz="2700" i="1">
+                            <a:rPr lang="en-US" sz="2300" i="1">
                               <a:solidFill>
                                 <a:srgbClr val="1A1A1A"/>
                               </a:solidFill>
@@ -20684,7 +22549,7 @@
                     </m:oMath>
                   </m:oMathPara>
                 </a14:m>
-                <a:endParaRPr lang="en-US" sz="2700"/>
+                <a:endParaRPr lang="en-US" sz="2300"/>
               </a:p>
             </p:txBody>
           </p:sp>
@@ -20706,8 +22571,8 @@
             </p:blipFill>
             <p:spPr>
               <a:xfrm>
-                <a:off x="4122267" y="4251960"/>
-                <a:ext cx="3947160" cy="448056"/>
+                <a:off x="2337816" y="4352544"/>
+                <a:ext cx="3371088" cy="390144"/>
               </a:xfrm>
               <a:prstGeom prst="rect">
                 <a:avLst/>
@@ -20716,35 +22581,60 @@
           </p:pic>
         </mc:Fallback>
       </mc:AlternateContent>
-      <p:sp>
-        <p:nvSpPr>
-          <p:cNvPr id="12" name="TextBox 11"/>
-          <p:cNvSpPr txBox="1"/>
-          <p:nvPr/>
-        </p:nvSpPr>
-        <p:spPr>
-          <a:xfrm>
-            <a:off x="594360" y="4956048"/>
-            <a:ext cx="5349240" cy="929640"/>
-          </a:xfrm>
-          <a:prstGeom prst="rect">
-            <a:avLst/>
-          </a:prstGeom>
-          <a:noFill/>
-        </p:spPr>
-        <p:txBody>
-          <a:bodyPr wrap="square" lIns="0" rIns="0" tIns="0" bIns="0" anchor="t">
-            <a:noAutofit/>
-          </a:bodyPr>
-          <a:lstStyle/>
-          <a:p>
-            <a:pPr algn="l">
-              <a:lnSpc>
-                <a:spcPts val="2176"/>
-              </a:lnSpc>
-            </a:pPr>
-            <a:r>
-              <a:rPr sz="1700" b="0" lang="ja-JP" altLang="en-US">
+      <p:pic>
+        <p:nvPicPr>
+          <p:cNvPr id="12" name="Picture 11" descr="review_mirror.png"/>
+          <p:cNvPicPr>
+            <a:picLocks noChangeAspect="1"/>
+          </p:cNvPicPr>
+          <p:nvPr/>
+        </p:nvPicPr>
+        <p:blipFill>
+          <a:blip r:embed="rId5"/>
+          <a:srcRect/>
+          <a:stretch>
+            <a:fillRect/>
+          </a:stretch>
+        </p:blipFill>
+        <p:spPr>
+          <a:xfrm>
+            <a:off x="7882127" y="1592199"/>
+            <a:ext cx="3749039" cy="3280410"/>
+          </a:xfrm>
+          <a:prstGeom prst="rect">
+            <a:avLst/>
+          </a:prstGeom>
+        </p:spPr>
+      </p:pic>
+      <p:sp>
+        <p:nvSpPr>
+          <p:cNvPr id="13" name="TextBox 12"/>
+          <p:cNvSpPr txBox="1"/>
+          <p:nvPr/>
+        </p:nvSpPr>
+        <p:spPr>
+          <a:xfrm>
+            <a:off x="594360" y="5074920"/>
+            <a:ext cx="5349240" cy="880872"/>
+          </a:xfrm>
+          <a:prstGeom prst="rect">
+            <a:avLst/>
+          </a:prstGeom>
+          <a:noFill/>
+        </p:spPr>
+        <p:txBody>
+          <a:bodyPr wrap="square" lIns="0" rIns="0" tIns="0" bIns="0" anchor="t">
+            <a:noAutofit/>
+          </a:bodyPr>
+          <a:lstStyle/>
+          <a:p>
+            <a:pPr algn="l">
+              <a:lnSpc>
+                <a:spcPts val="2048"/>
+              </a:lnSpc>
+            </a:pPr>
+            <a:r>
+              <a:rPr sz="1600" b="0" lang="ja-JP" altLang="en-US">
                 <a:solidFill>
                   <a:srgbClr val="333333"/>
                 </a:solidFill>
@@ -20754,7 +22644,7 @@
               <a:t>回転：</a:t>
             </a:r>
             <a:r>
-              <a:rPr sz="1700" b="0" i="0">
+              <a:rPr sz="1600" b="0" i="0">
                 <a:solidFill>
                   <a:srgbClr val="333333"/>
                 </a:solidFill>
@@ -20764,7 +22654,7 @@
               <a:t>det(</a:t>
             </a:r>
             <a:r>
-              <a:rPr sz="1700" b="0" i="1">
+              <a:rPr sz="1600" b="0" i="1">
                 <a:solidFill>
                   <a:srgbClr val="333333"/>
                 </a:solidFill>
@@ -20774,7 +22664,7 @@
               <a:t>Q</a:t>
             </a:r>
             <a:r>
-              <a:rPr sz="1700" b="0" i="0">
+              <a:rPr sz="1600" b="0" i="0">
                 <a:solidFill>
                   <a:srgbClr val="333333"/>
                 </a:solidFill>
@@ -20784,7 +22674,7 @@
               <a:t>)=+1</a:t>
             </a:r>
             <a:r>
-              <a:rPr sz="1700" b="0" lang="ja-JP" altLang="en-US">
+              <a:rPr sz="1600" b="0" lang="ja-JP" altLang="en-US">
                 <a:solidFill>
                   <a:srgbClr val="333333"/>
                 </a:solidFill>
@@ -20794,7 +22684,7 @@
               <a:t> なので </a:t>
             </a:r>
             <a:r>
-              <a:rPr sz="1700" b="0" i="1">
+              <a:rPr sz="1600" b="0" i="1">
                 <a:solidFill>
                   <a:srgbClr val="333333"/>
                 </a:solidFill>
@@ -20804,7 +22694,7 @@
               <a:t>V</a:t>
             </a:r>
             <a:r>
-              <a:rPr sz="1700" b="0" lang="ja-JP" altLang="en-US">
+              <a:rPr sz="1600" b="0" lang="ja-JP" altLang="en-US">
                 <a:solidFill>
                   <a:srgbClr val="333333"/>
                 </a:solidFill>
@@ -20814,7 +22704,7 @@
               <a:t> の符号は保存される。鏡映：</a:t>
             </a:r>
             <a:r>
-              <a:rPr sz="1700" b="0" i="0">
+              <a:rPr sz="1600" b="0" i="0">
                 <a:solidFill>
                   <a:srgbClr val="333333"/>
                 </a:solidFill>
@@ -20824,7 +22714,7 @@
               <a:t>det(</a:t>
             </a:r>
             <a:r>
-              <a:rPr sz="1700" b="0" i="1">
+              <a:rPr sz="1600" b="0" i="1">
                 <a:solidFill>
                   <a:srgbClr val="333333"/>
                 </a:solidFill>
@@ -20834,7 +22724,7 @@
               <a:t>Q</a:t>
             </a:r>
             <a:r>
-              <a:rPr sz="1700" b="0" i="0">
+              <a:rPr sz="1600" b="0" i="0">
                 <a:solidFill>
                   <a:srgbClr val="333333"/>
                 </a:solidFill>
@@ -20844,7 +22734,7 @@
               <a:t>)=−1</a:t>
             </a:r>
             <a:r>
-              <a:rPr sz="1700" b="0" lang="ja-JP" altLang="en-US">
+              <a:rPr sz="1600" b="0" lang="ja-JP" altLang="en-US">
                 <a:solidFill>
                   <a:srgbClr val="333333"/>
                 </a:solidFill>
@@ -20854,7 +22744,7 @@
               <a:t> なので、</a:t>
             </a:r>
             <a:r>
-              <a:rPr sz="1700" b="0" i="1">
+              <a:rPr sz="1600" b="0" i="1">
                 <a:solidFill>
                   <a:srgbClr val="333333"/>
                 </a:solidFill>
@@ -20864,7 +22754,7 @@
               <a:t>V</a:t>
             </a:r>
             <a:r>
-              <a:rPr sz="1700" b="0" i="0">
+              <a:rPr sz="1600" b="0" i="0">
                 <a:solidFill>
                   <a:srgbClr val="333333"/>
                 </a:solidFill>
@@ -20874,7 +22764,7 @@
               <a:t>≠0</a:t>
             </a:r>
             <a:r>
-              <a:rPr sz="1700" b="0" lang="ja-JP" altLang="en-US">
+              <a:rPr sz="1600" b="0" lang="ja-JP" altLang="en-US">
                 <a:solidFill>
                   <a:srgbClr val="333333"/>
                 </a:solidFill>
@@ -20888,33 +22778,33 @@
       </p:sp>
       <p:sp>
         <p:nvSpPr>
-          <p:cNvPr id="13" name="TextBox 12"/>
-          <p:cNvSpPr txBox="1"/>
-          <p:nvPr/>
-        </p:nvSpPr>
-        <p:spPr>
-          <a:xfrm>
-            <a:off x="6217920" y="4956048"/>
-            <a:ext cx="5349240" cy="929640"/>
-          </a:xfrm>
-          <a:prstGeom prst="rect">
-            <a:avLst/>
-          </a:prstGeom>
-          <a:noFill/>
-        </p:spPr>
-        <p:txBody>
-          <a:bodyPr wrap="square" lIns="0" rIns="0" tIns="0" bIns="0" anchor="t">
-            <a:noAutofit/>
-          </a:bodyPr>
-          <a:lstStyle/>
-          <a:p>
-            <a:pPr algn="l">
-              <a:lnSpc>
-                <a:spcPts val="2176"/>
-              </a:lnSpc>
-            </a:pPr>
-            <a:r>
-              <a:rPr sz="1700" b="0" lang="ja-JP" altLang="en-US">
+          <p:cNvPr id="14" name="TextBox 13"/>
+          <p:cNvSpPr txBox="1"/>
+          <p:nvPr/>
+        </p:nvSpPr>
+        <p:spPr>
+          <a:xfrm>
+            <a:off x="6217920" y="5074920"/>
+            <a:ext cx="5349240" cy="880872"/>
+          </a:xfrm>
+          <a:prstGeom prst="rect">
+            <a:avLst/>
+          </a:prstGeom>
+          <a:noFill/>
+        </p:spPr>
+        <p:txBody>
+          <a:bodyPr wrap="square" lIns="0" rIns="0" tIns="0" bIns="0" anchor="t">
+            <a:noAutofit/>
+          </a:bodyPr>
+          <a:lstStyle/>
+          <a:p>
+            <a:pPr algn="l">
+              <a:lnSpc>
+                <a:spcPts val="2048"/>
+              </a:lnSpc>
+            </a:pPr>
+            <a:r>
+              <a:rPr sz="1600" b="0" lang="ja-JP" altLang="en-US">
                 <a:solidFill>
                   <a:srgbClr val="333333"/>
                 </a:solidFill>
@@ -20924,7 +22814,7 @@
               <a:t>4点が同一平面上にあれば </a:t>
             </a:r>
             <a:r>
-              <a:rPr sz="1700" b="0" i="1">
+              <a:rPr sz="1600" b="0" i="1">
                 <a:solidFill>
                   <a:srgbClr val="333333"/>
                 </a:solidFill>
@@ -20934,7 +22824,7 @@
               <a:t>V</a:t>
             </a:r>
             <a:r>
-              <a:rPr sz="1700" b="0" i="0">
+              <a:rPr sz="1600" b="0" i="0">
                 <a:solidFill>
                   <a:srgbClr val="333333"/>
                 </a:solidFill>
@@ -20944,7 +22834,7 @@
               <a:t>=0</a:t>
             </a:r>
             <a:r>
-              <a:rPr sz="1700" b="0" lang="ja-JP" altLang="en-US">
+              <a:rPr sz="1600" b="0" lang="ja-JP" altLang="en-US">
                 <a:solidFill>
                   <a:srgbClr val="333333"/>
                 </a:solidFill>
@@ -20958,7 +22848,7 @@
       </p:sp>
       <p:sp>
         <p:nvSpPr>
-          <p:cNvPr id="14" name="TextBox 13"/>
+          <p:cNvPr id="15" name="TextBox 14"/>
           <p:cNvSpPr txBox="1"/>
           <p:nvPr/>
         </p:nvSpPr>
@@ -21186,26 +23076,26 @@
         <p:spPr>
           <a:xfrm>
             <a:off x="594360" y="1389888"/>
-            <a:ext cx="10972800" cy="718312"/>
-          </a:xfrm>
-          <a:prstGeom prst="rect">
-            <a:avLst/>
-          </a:prstGeom>
-          <a:noFill/>
-        </p:spPr>
-        <p:txBody>
-          <a:bodyPr wrap="square" lIns="0" rIns="0" tIns="0" bIns="0" anchor="t">
-            <a:noAutofit/>
-          </a:bodyPr>
-          <a:lstStyle/>
-          <a:p>
-            <a:pPr algn="l">
-              <a:lnSpc>
-                <a:spcPts val="2432"/>
-              </a:lnSpc>
-            </a:pPr>
-            <a:r>
-              <a:rPr sz="1900" b="0" i="1">
+            <a:ext cx="10972800" cy="685800"/>
+          </a:xfrm>
+          <a:prstGeom prst="rect">
+            <a:avLst/>
+          </a:prstGeom>
+          <a:noFill/>
+        </p:spPr>
+        <p:txBody>
+          <a:bodyPr wrap="square" lIns="0" rIns="0" tIns="0" bIns="0" anchor="t">
+            <a:noAutofit/>
+          </a:bodyPr>
+          <a:lstStyle/>
+          <a:p>
+            <a:pPr algn="l">
+              <a:lnSpc>
+                <a:spcPts val="2304"/>
+              </a:lnSpc>
+            </a:pPr>
+            <a:r>
+              <a:rPr sz="1800" b="0" i="1">
                 <a:solidFill>
                   <a:srgbClr val="333333"/>
                 </a:solidFill>
@@ -21215,7 +23105,7 @@
               <a:t>D</a:t>
             </a:r>
             <a:r>
-              <a:rPr sz="1900" b="0" i="0">
+              <a:rPr sz="1800" b="0" i="0">
                 <a:solidFill>
                   <a:srgbClr val="333333"/>
                 </a:solidFill>
@@ -21225,7 +23115,7 @@
               <a:t>=(</a:t>
             </a:r>
             <a:r>
-              <a:rPr sz="1900" b="0" i="1">
+              <a:rPr sz="1800" b="0" i="1">
                 <a:solidFill>
                   <a:srgbClr val="333333"/>
                 </a:solidFill>
@@ -21235,7 +23125,7 @@
               <a:t>d</a:t>
             </a:r>
             <a:r>
-              <a:rPr sz="1900" b="0" i="1" baseline="-25000">
+              <a:rPr sz="1800" b="0" i="1" baseline="-25000">
                 <a:solidFill>
                   <a:srgbClr val="333333"/>
                 </a:solidFill>
@@ -21245,7 +23135,7 @@
               <a:t>ij</a:t>
             </a:r>
             <a:r>
-              <a:rPr sz="1900" b="0" i="0">
+              <a:rPr sz="1800" b="0" i="0">
                 <a:solidFill>
                   <a:srgbClr val="333333"/>
                 </a:solidFill>
@@ -21255,7 +23145,7 @@
               <a:t>)</a:t>
             </a:r>
             <a:r>
-              <a:rPr sz="1900" b="0" lang="ja-JP" altLang="en-US">
+              <a:rPr sz="1800" b="0" lang="ja-JP" altLang="en-US">
                 <a:solidFill>
                   <a:srgbClr val="333333"/>
                 </a:solidFill>
@@ -21265,7 +23155,7 @@
               <a:t> は </a:t>
             </a:r>
             <a:r>
-              <a:rPr sz="1900" b="0" i="1">
+              <a:rPr sz="1800" b="0" i="1">
                 <a:solidFill>
                   <a:srgbClr val="333333"/>
                 </a:solidFill>
@@ -21275,7 +23165,7 @@
               <a:t>N</a:t>
             </a:r>
             <a:r>
-              <a:rPr sz="1900" b="0" lang="ja-JP" altLang="en-US">
+              <a:rPr sz="1800" b="0" lang="ja-JP" altLang="en-US">
                 <a:solidFill>
                   <a:srgbClr val="333333"/>
                 </a:solidFill>
@@ -21285,7 +23175,7 @@
               <a:t> 個の点の距離を並べた </a:t>
             </a:r>
             <a:r>
-              <a:rPr sz="1900" b="0" i="1">
+              <a:rPr sz="1800" b="0" i="1">
                 <a:solidFill>
                   <a:srgbClr val="333333"/>
                 </a:solidFill>
@@ -21295,7 +23185,7 @@
               <a:t>N</a:t>
             </a:r>
             <a:r>
-              <a:rPr sz="1900" b="0" i="0">
+              <a:rPr sz="1800" b="0" i="0">
                 <a:solidFill>
                   <a:srgbClr val="333333"/>
                 </a:solidFill>
@@ -21305,7 +23195,7 @@
               <a:t>× </a:t>
             </a:r>
             <a:r>
-              <a:rPr sz="1900" b="0" i="1">
+              <a:rPr sz="1800" b="0" i="1">
                 <a:solidFill>
                   <a:srgbClr val="333333"/>
                 </a:solidFill>
@@ -21315,7 +23205,7 @@
               <a:t>N</a:t>
             </a:r>
             <a:r>
-              <a:rPr sz="1900" b="0" lang="ja-JP" altLang="en-US">
+              <a:rPr sz="1800" b="0" lang="ja-JP" altLang="en-US">
                 <a:solidFill>
                   <a:srgbClr val="333333"/>
                 </a:solidFill>
@@ -21337,8 +23227,8 @@
             </p:nvSpPr>
             <p:spPr>
               <a:xfrm>
-                <a:off x="457200" y="2304288"/>
-                <a:ext cx="11277295" cy="408432"/>
+                <a:off x="457200" y="2148840"/>
+                <a:ext cx="11277295" cy="368808"/>
               </a:xfrm>
               <a:prstGeom prst="rect">
                 <a:avLst/>
@@ -21364,7 +23254,7 @@
                             <m:e>
                               <m:r>
                                 <m:rPr/>
-                                <a:rPr lang="en-US" sz="2600" i="1">
+                                <a:rPr lang="en-US" sz="2300" i="1">
                                   <a:solidFill>
                                     <a:srgbClr val="1A1A1A"/>
                                   </a:solidFill>
@@ -21379,7 +23269,7 @@
                                 <m:e>
                                   <m:r>
                                     <m:rPr/>
-                                    <a:rPr lang="en-US" sz="2600" i="1">
+                                    <a:rPr lang="en-US" sz="2300" i="1">
                                       <a:solidFill>
                                         <a:srgbClr val="1A1A1A"/>
                                       </a:solidFill>
@@ -21390,7 +23280,7 @@
                                   </m:r>
                                   <m:r>
                                     <m:rPr/>
-                                    <a:rPr lang="en-US" sz="2600" i="1">
+                                    <a:rPr lang="en-US" sz="2300" i="1">
                                       <a:solidFill>
                                         <a:srgbClr val="1A1A1A"/>
                                       </a:solidFill>
@@ -21407,7 +23297,7 @@
                             <m:rPr>
                               <m:sty m:val="p"/>
                             </m:rPr>
-                            <a:rPr lang="en-US" sz="2600" i="0">
+                            <a:rPr lang="en-US" sz="2300" i="0">
                               <a:solidFill>
                                 <a:srgbClr val="1A1A1A"/>
                               </a:solidFill>
@@ -21420,7 +23310,7 @@
                             <m:rPr>
                               <m:sty m:val="p"/>
                             </m:rPr>
-                            <a:rPr lang="en-US" sz="2600" i="0">
+                            <a:rPr lang="en-US" sz="2300" i="0">
                               <a:solidFill>
                                 <a:srgbClr val="1A1A1A"/>
                               </a:solidFill>
@@ -21433,7 +23323,7 @@
                             <m:rPr>
                               <m:sty m:val="p"/>
                             </m:rPr>
-                            <a:rPr lang="en-US" sz="2600" i="0">
+                            <a:rPr lang="en-US" sz="2300" i="0">
                               <a:solidFill>
                                 <a:srgbClr val="1A1A1A"/>
                               </a:solidFill>
@@ -21446,7 +23336,7 @@
                             <m:rPr>
                               <m:sty m:val="p"/>
                             </m:rPr>
-                            <a:rPr lang="en-US" sz="2600" i="0">
+                            <a:rPr lang="en-US" sz="2300" i="0">
                               <a:solidFill>
                                 <a:srgbClr val="1A1A1A"/>
                               </a:solidFill>
@@ -21459,7 +23349,7 @@
                             <m:e>
                               <m:r>
                                 <m:rPr/>
-                                <a:rPr lang="en-US" sz="2600" i="1">
+                                <a:rPr lang="en-US" sz="2300" i="1">
                                   <a:solidFill>
                                     <a:srgbClr val="1A1A1A"/>
                                   </a:solidFill>
@@ -21474,7 +23364,7 @@
                                 <m:e>
                                   <m:r>
                                     <m:rPr/>
-                                    <a:rPr lang="en-US" sz="2600" i="1">
+                                    <a:rPr lang="en-US" sz="2300" i="1">
                                       <a:solidFill>
                                         <a:srgbClr val="1A1A1A"/>
                                       </a:solidFill>
@@ -21485,7 +23375,7 @@
                                   </m:r>
                                   <m:r>
                                     <m:rPr/>
-                                    <a:rPr lang="en-US" sz="2600" i="1">
+                                    <a:rPr lang="en-US" sz="2300" i="1">
                                       <a:solidFill>
                                         <a:srgbClr val="1A1A1A"/>
                                       </a:solidFill>
@@ -21502,7 +23392,7 @@
                             <m:rPr>
                               <m:sty m:val="p"/>
                             </m:rPr>
-                            <a:rPr lang="en-US" sz="2600" i="0">
+                            <a:rPr lang="en-US" sz="2300" i="0">
                               <a:solidFill>
                                 <a:srgbClr val="1A1A1A"/>
                               </a:solidFill>
@@ -21515,7 +23405,7 @@
                             <m:e>
                               <m:r>
                                 <m:rPr/>
-                                <a:rPr lang="en-US" sz="2600" i="1">
+                                <a:rPr lang="en-US" sz="2300" i="1">
                                   <a:solidFill>
                                     <a:srgbClr val="1A1A1A"/>
                                   </a:solidFill>
@@ -21530,7 +23420,7 @@
                                 <m:e>
                                   <m:r>
                                     <m:rPr/>
-                                    <a:rPr lang="en-US" sz="2600" i="1">
+                                    <a:rPr lang="en-US" sz="2300" i="1">
                                       <a:solidFill>
                                         <a:srgbClr val="1A1A1A"/>
                                       </a:solidFill>
@@ -21541,7 +23431,7 @@
                                   </m:r>
                                   <m:r>
                                     <m:rPr/>
-                                    <a:rPr lang="en-US" sz="2600" i="1">
+                                    <a:rPr lang="en-US" sz="2300" i="1">
                                       <a:solidFill>
                                         <a:srgbClr val="1A1A1A"/>
                                       </a:solidFill>
@@ -21558,7 +23448,7 @@
                             <m:rPr>
                               <m:sty m:val="p"/>
                             </m:rPr>
-                            <a:rPr lang="en-US" sz="2600" i="0">
+                            <a:rPr lang="en-US" sz="2300" i="0">
                               <a:solidFill>
                                 <a:srgbClr val="1A1A1A"/>
                               </a:solidFill>
@@ -21571,7 +23461,7 @@
                             <m:rPr>
                               <m:sty m:val="p"/>
                             </m:rPr>
-                            <a:rPr lang="en-US" sz="2600" i="0">
+                            <a:rPr lang="en-US" sz="2300" i="0">
                               <a:solidFill>
                                 <a:srgbClr val="1A1A1A"/>
                               </a:solidFill>
@@ -21584,7 +23474,7 @@
                             <m:rPr>
                               <m:sty m:val="p"/>
                             </m:rPr>
-                            <a:rPr lang="en-US" sz="2600" i="0">
+                            <a:rPr lang="en-US" sz="2300" i="0">
                               <a:solidFill>
                                 <a:srgbClr val="1A1A1A"/>
                               </a:solidFill>
@@ -21597,7 +23487,7 @@
                             <m:rPr>
                               <m:sty m:val="p"/>
                             </m:rPr>
-                            <a:rPr lang="en-US" sz="2600" i="0">
+                            <a:rPr lang="en-US" sz="2300" i="0">
                               <a:solidFill>
                                 <a:srgbClr val="1A1A1A"/>
                               </a:solidFill>
@@ -21610,7 +23500,7 @@
                             <m:e>
                               <m:r>
                                 <m:rPr/>
-                                <a:rPr lang="en-US" sz="2600" i="1">
+                                <a:rPr lang="en-US" sz="2300" i="1">
                                   <a:solidFill>
                                     <a:srgbClr val="1A1A1A"/>
                                   </a:solidFill>
@@ -21625,7 +23515,7 @@
                                 <m:e>
                                   <m:r>
                                     <m:rPr/>
-                                    <a:rPr lang="en-US" sz="2600" i="1">
+                                    <a:rPr lang="en-US" sz="2300" i="1">
                                       <a:solidFill>
                                         <a:srgbClr val="1A1A1A"/>
                                       </a:solidFill>
@@ -21636,7 +23526,7 @@
                                   </m:r>
                                   <m:r>
                                     <m:rPr/>
-                                    <a:rPr lang="en-US" sz="2600" i="1">
+                                    <a:rPr lang="en-US" sz="2300" i="1">
                                       <a:solidFill>
                                         <a:srgbClr val="1A1A1A"/>
                                       </a:solidFill>
@@ -21653,7 +23543,7 @@
                             <m:rPr>
                               <m:sty m:val="p"/>
                             </m:rPr>
-                            <a:rPr lang="en-US" sz="2600" i="0">
+                            <a:rPr lang="en-US" sz="2300" i="0">
                               <a:solidFill>
                                 <a:srgbClr val="1A1A1A"/>
                               </a:solidFill>
@@ -21666,7 +23556,7 @@
                             <m:e>
                               <m:r>
                                 <m:rPr/>
-                                <a:rPr lang="en-US" sz="2600" i="1">
+                                <a:rPr lang="en-US" sz="2300" i="1">
                                   <a:solidFill>
                                     <a:srgbClr val="1A1A1A"/>
                                   </a:solidFill>
@@ -21681,7 +23571,7 @@
                                 <m:e>
                                   <m:r>
                                     <m:rPr/>
-                                    <a:rPr lang="en-US" sz="2600" i="1">
+                                    <a:rPr lang="en-US" sz="2300" i="1">
                                       <a:solidFill>
                                         <a:srgbClr val="1A1A1A"/>
                                       </a:solidFill>
@@ -21692,7 +23582,7 @@
                                   </m:r>
                                   <m:r>
                                     <m:rPr/>
-                                    <a:rPr lang="en-US" sz="2600" i="1">
+                                    <a:rPr lang="en-US" sz="2300" i="1">
                                       <a:solidFill>
                                         <a:srgbClr val="1A1A1A"/>
                                       </a:solidFill>
@@ -21709,7 +23599,7 @@
                             <m:rPr>
                               <m:sty m:val="p"/>
                             </m:rPr>
-                            <a:rPr lang="en-US" sz="2600" i="0">
+                            <a:rPr lang="en-US" sz="2300" i="0">
                               <a:solidFill>
                                 <a:srgbClr val="1A1A1A"/>
                               </a:solidFill>
@@ -21722,7 +23612,7 @@
                             <m:e>
                               <m:r>
                                 <m:rPr/>
-                                <a:rPr lang="en-US" sz="2600" i="1">
+                                <a:rPr lang="en-US" sz="2300" i="1">
                                   <a:solidFill>
                                     <a:srgbClr val="1A1A1A"/>
                                   </a:solidFill>
@@ -21737,7 +23627,7 @@
                                 <m:e>
                                   <m:r>
                                     <m:rPr/>
-                                    <a:rPr lang="en-US" sz="2600" i="1">
+                                    <a:rPr lang="en-US" sz="2300" i="1">
                                       <a:solidFill>
                                         <a:srgbClr val="1A1A1A"/>
                                       </a:solidFill>
@@ -21748,7 +23638,7 @@
                                   </m:r>
                                   <m:r>
                                     <m:rPr/>
-                                    <a:rPr lang="en-US" sz="2600" i="1">
+                                    <a:rPr lang="en-US" sz="2300" i="1">
                                       <a:solidFill>
                                         <a:srgbClr val="1A1A1A"/>
                                       </a:solidFill>
@@ -21766,7 +23656,7 @@
                     </m:oMath>
                   </m:oMathPara>
                 </a14:m>
-                <a:endParaRPr lang="en-US" sz="2600"/>
+                <a:endParaRPr lang="en-US" sz="2300"/>
               </a:p>
             </p:txBody>
           </p:sp>
@@ -21774,7 +23664,7 @@
         <mc:Fallback>
           <p:pic>
             <p:nvPicPr>
-              <p:cNvPr id="8" name="Picture 7" descr="d_{ii}=0,\qquad d_{ij}=d_{ji}\geq0,\qquad d_{ik}\leq d_{ij}+d_{jk}"/>
+              <p:cNvPr id="8" name="Picture 7" descr="d_{ii}=0,\quad d_{ij}=d_{ji}\geq0,\quad d_{ik}\leq d_{ij}+d_{jk}"/>
               <p:cNvPicPr>
                 <a:picLocks noChangeAspect="1"/>
               </p:cNvPicPr>
@@ -21788,8 +23678,8 @@
             </p:blipFill>
             <p:spPr>
               <a:xfrm>
-                <a:off x="3177387" y="2304288"/>
-                <a:ext cx="5836920" cy="408432"/>
+                <a:off x="3809847" y="2148840"/>
+                <a:ext cx="4572000" cy="368808"/>
               </a:xfrm>
               <a:prstGeom prst="rect">
                 <a:avLst/>
@@ -21806,27 +23696,27 @@
         </p:nvSpPr>
         <p:spPr>
           <a:xfrm>
-            <a:off x="594360" y="2926080"/>
-            <a:ext cx="10972800" cy="385064"/>
-          </a:xfrm>
-          <a:prstGeom prst="rect">
-            <a:avLst/>
-          </a:prstGeom>
-          <a:noFill/>
-        </p:spPr>
-        <p:txBody>
-          <a:bodyPr wrap="square" lIns="0" rIns="0" tIns="0" bIns="0" anchor="t">
-            <a:noAutofit/>
-          </a:bodyPr>
-          <a:lstStyle/>
-          <a:p>
-            <a:pPr algn="l">
-              <a:lnSpc>
-                <a:spcPts val="2240"/>
-              </a:lnSpc>
-            </a:pPr>
-            <a:r>
-              <a:rPr sz="1750" b="0" lang="ja-JP" altLang="en-US">
+            <a:off x="594360" y="2788920"/>
+            <a:ext cx="6492240" cy="653288"/>
+          </a:xfrm>
+          <a:prstGeom prst="rect">
+            <a:avLst/>
+          </a:prstGeom>
+          <a:noFill/>
+        </p:spPr>
+        <p:txBody>
+          <a:bodyPr wrap="square" lIns="0" rIns="0" tIns="0" bIns="0" anchor="t">
+            <a:noAutofit/>
+          </a:bodyPr>
+          <a:lstStyle/>
+          <a:p>
+            <a:pPr algn="l">
+              <a:lnSpc>
+                <a:spcPts val="2176"/>
+              </a:lnSpc>
+            </a:pPr>
+            <a:r>
+              <a:rPr sz="1700" b="0" lang="ja-JP" altLang="en-US">
                 <a:solidFill>
                   <a:srgbClr val="333333"/>
                 </a:solidFill>
@@ -21848,8 +23738,8 @@
             </p:nvSpPr>
             <p:spPr>
               <a:xfrm>
-                <a:off x="457200" y="3703320"/>
-                <a:ext cx="11277295" cy="445008"/>
+                <a:off x="1831848" y="3767328"/>
+                <a:ext cx="4479462" cy="396240"/>
               </a:xfrm>
               <a:prstGeom prst="rect">
                 <a:avLst/>
@@ -21862,11 +23752,11 @@
               </a:bodyPr>
               <a:lstStyle/>
               <a:p>
-                <a:pPr algn="ctr"/>
+                <a:pPr algn="l"/>
                 <a14:m>
                   <m:oMathPara xmlns:m="http://schemas.openxmlformats.org/officeDocument/2006/math">
                     <m:oMathParaPr>
-                      <m:jc m:val="center"/>
+                      <m:jc m:val="left"/>
                     </m:oMathParaPr>
                     <m:oMath>
                       <m:box>
@@ -21875,7 +23765,7 @@
                             <m:e>
                               <m:r>
                                 <m:rPr/>
-                                <a:rPr lang="en-US" sz="2500" i="1">
+                                <a:rPr lang="en-US" sz="2200" i="1">
                                   <a:solidFill>
                                     <a:srgbClr val="1A1A1A"/>
                                   </a:solidFill>
@@ -21892,7 +23782,7 @@
                                     <m:rPr>
                                       <m:sty m:val="p"/>
                                     </m:rPr>
-                                    <a:rPr lang="en-US" sz="2500" i="0">
+                                    <a:rPr lang="en-US" sz="2200" i="0">
                                       <a:solidFill>
                                         <a:srgbClr val="1A1A1A"/>
                                       </a:solidFill>
@@ -21909,7 +23799,7 @@
                             <m:rPr>
                               <m:sty m:val="p"/>
                             </m:rPr>
-                            <a:rPr lang="en-US" sz="2500" i="0">
+                            <a:rPr lang="en-US" sz="2200" i="0">
                               <a:solidFill>
                                 <a:srgbClr val="1A1A1A"/>
                               </a:solidFill>
@@ -21922,7 +23812,7 @@
                             <m:rPr>
                               <m:sty m:val="p"/>
                             </m:rPr>
-                            <a:rPr lang="en-US" sz="2500" i="0">
+                            <a:rPr lang="en-US" sz="2200" i="0">
                               <a:solidFill>
                                 <a:srgbClr val="1A1A1A"/>
                               </a:solidFill>
@@ -21935,7 +23825,7 @@
                             <m:rPr>
                               <m:sty m:val="p"/>
                             </m:rPr>
-                            <a:rPr lang="en-US" sz="2500" i="0">
+                            <a:rPr lang="en-US" sz="2200" i="0">
                               <a:solidFill>
                                 <a:srgbClr val="1A1A1A"/>
                               </a:solidFill>
@@ -21950,7 +23840,7 @@
                                 <m:rPr>
                                   <m:sty m:val="p"/>
                                 </m:rPr>
-                                <a:rPr lang="en-US" sz="2500" i="0">
+                                <a:rPr lang="en-US" sz="2200" i="0">
                                   <a:solidFill>
                                     <a:srgbClr val="1A1A1A"/>
                                   </a:solidFill>
@@ -21965,7 +23855,7 @@
                             <m:rPr>
                               <m:sty m:val="p"/>
                             </m:rPr>
-                            <a:rPr lang="en-US" sz="2500" i="0">
+                            <a:rPr lang="en-US" sz="2200" i="0">
                               <a:solidFill>
                                 <a:srgbClr val="1A1A1A"/>
                               </a:solidFill>
@@ -21978,7 +23868,7 @@
                             <m:rPr>
                               <m:sty m:val="p"/>
                             </m:rPr>
-                            <a:rPr lang="en-US" sz="2500" i="0">
+                            <a:rPr lang="en-US" sz="2200" i="0">
                               <a:solidFill>
                                 <a:srgbClr val="1A1A1A"/>
                               </a:solidFill>
@@ -21991,7 +23881,7 @@
                             <m:e>
                               <m:r>
                                 <m:rPr/>
-                                <a:rPr lang="en-US" sz="2500" i="1">
+                                <a:rPr lang="en-US" sz="2200" i="1">
                                   <a:solidFill>
                                     <a:srgbClr val="1A1A1A"/>
                                   </a:solidFill>
@@ -22008,7 +23898,7 @@
                                     <m:rPr>
                                       <m:sty m:val="p"/>
                                     </m:rPr>
-                                    <a:rPr lang="en-US" sz="2500" i="0">
+                                    <a:rPr lang="en-US" sz="2200" i="0">
                                       <a:solidFill>
                                         <a:srgbClr val="1A1A1A"/>
                                       </a:solidFill>
@@ -22025,7 +23915,7 @@
                             <m:rPr>
                               <m:sty m:val="p"/>
                             </m:rPr>
-                            <a:rPr lang="en-US" sz="2500" i="0">
+                            <a:rPr lang="en-US" sz="2200" i="0">
                               <a:solidFill>
                                 <a:srgbClr val="1A1A1A"/>
                               </a:solidFill>
@@ -22038,7 +23928,7 @@
                             <m:rPr>
                               <m:sty m:val="p"/>
                             </m:rPr>
-                            <a:rPr lang="en-US" sz="2500" i="0">
+                            <a:rPr lang="en-US" sz="2200" i="0">
                               <a:solidFill>
                                 <a:srgbClr val="1A1A1A"/>
                               </a:solidFill>
@@ -22051,7 +23941,7 @@
                             <m:rPr>
                               <m:sty m:val="p"/>
                             </m:rPr>
-                            <a:rPr lang="en-US" sz="2500" i="0">
+                            <a:rPr lang="en-US" sz="2200" i="0">
                               <a:solidFill>
                                 <a:srgbClr val="1A1A1A"/>
                               </a:solidFill>
@@ -22066,7 +23956,7 @@
                                 <m:rPr>
                                   <m:sty m:val="p"/>
                                 </m:rPr>
-                                <a:rPr lang="en-US" sz="2500" i="0">
+                                <a:rPr lang="en-US" sz="2200" i="0">
                                   <a:solidFill>
                                     <a:srgbClr val="1A1A1A"/>
                                   </a:solidFill>
@@ -22081,7 +23971,7 @@
                             <m:rPr>
                               <m:sty m:val="p"/>
                             </m:rPr>
-                            <a:rPr lang="en-US" sz="2500" i="0">
+                            <a:rPr lang="en-US" sz="2200" i="0">
                               <a:solidFill>
                                 <a:srgbClr val="1A1A1A"/>
                               </a:solidFill>
@@ -22094,7 +23984,7 @@
                             <m:rPr>
                               <m:sty m:val="p"/>
                             </m:rPr>
-                            <a:rPr lang="en-US" sz="2500" i="0">
+                            <a:rPr lang="en-US" sz="2200" i="0">
                               <a:solidFill>
                                 <a:srgbClr val="1A1A1A"/>
                               </a:solidFill>
@@ -22107,7 +23997,7 @@
                             <m:e>
                               <m:r>
                                 <m:rPr/>
-                                <a:rPr lang="en-US" sz="2500" i="1">
+                                <a:rPr lang="en-US" sz="2200" i="1">
                                   <a:solidFill>
                                     <a:srgbClr val="1A1A1A"/>
                                   </a:solidFill>
@@ -22124,7 +24014,7 @@
                                     <m:rPr>
                                       <m:sty m:val="p"/>
                                     </m:rPr>
-                                    <a:rPr lang="en-US" sz="2500" i="0">
+                                    <a:rPr lang="en-US" sz="2200" i="0">
                                       <a:solidFill>
                                         <a:srgbClr val="1A1A1A"/>
                                       </a:solidFill>
@@ -22141,7 +24031,7 @@
                             <m:rPr>
                               <m:sty m:val="p"/>
                             </m:rPr>
-                            <a:rPr lang="en-US" sz="2500" i="0">
+                            <a:rPr lang="en-US" sz="2200" i="0">
                               <a:solidFill>
                                 <a:srgbClr val="1A1A1A"/>
                               </a:solidFill>
@@ -22154,7 +24044,7 @@
                             <m:rPr>
                               <m:sty m:val="p"/>
                             </m:rPr>
-                            <a:rPr lang="en-US" sz="2500" i="0">
+                            <a:rPr lang="en-US" sz="2200" i="0">
                               <a:solidFill>
                                 <a:srgbClr val="1A1A1A"/>
                               </a:solidFill>
@@ -22167,7 +24057,7 @@
                             <m:rPr>
                               <m:sty m:val="p"/>
                             </m:rPr>
-                            <a:rPr lang="en-US" sz="2500" i="0">
+                            <a:rPr lang="en-US" sz="2200" i="0">
                               <a:solidFill>
                                 <a:srgbClr val="1A1A1A"/>
                               </a:solidFill>
@@ -22182,7 +24072,7 @@
                                 <m:rPr>
                                   <m:sty m:val="p"/>
                                 </m:rPr>
-                                <a:rPr lang="en-US" sz="2500" i="0">
+                                <a:rPr lang="en-US" sz="2200" i="0">
                                   <a:solidFill>
                                     <a:srgbClr val="1A1A1A"/>
                                   </a:solidFill>
@@ -22193,50 +24083,81 @@
                               </m:r>
                             </m:e>
                           </m:box>
+                        </m:e>
+                      </m:box>
+                    </m:oMath>
+                  </m:oMathPara>
+                </a14:m>
+                <a:endParaRPr lang="en-US" sz="2200"/>
+              </a:p>
+            </p:txBody>
+          </p:sp>
+        </mc:Choice>
+        <mc:Fallback>
+          <p:pic>
+            <p:nvPicPr>
+              <p:cNvPr id="11" name="Picture 10" descr="d_{12}=2\,\mathrm{Å},\quad d_{23}=2\,\mathrm{Å},\quad d_{13}=5\,\mathrm{Å}"/>
+              <p:cNvPicPr>
+                <a:picLocks noChangeAspect="1"/>
+              </p:cNvPicPr>
+              <p:nvPr/>
+            </p:nvPicPr>
+            <p:blipFill>
+              <a:blip r:embed="rId4"/>
+              <a:stretch>
+                <a:fillRect/>
+              </a:stretch>
+            </p:blipFill>
+            <p:spPr>
+              <a:xfrm>
+                <a:off x="1831848" y="3767328"/>
+                <a:ext cx="4062984" cy="396240"/>
+              </a:xfrm>
+              <a:prstGeom prst="rect">
+                <a:avLst/>
+              </a:prstGeom>
+            </p:spPr>
+          </p:pic>
+        </mc:Fallback>
+      </mc:AlternateContent>
+      <mc:AlternateContent xmlns:mc="http://schemas.openxmlformats.org/markup-compatibility/2006">
+        <mc:Choice xmlns:a14="http://schemas.microsoft.com/office/drawing/2010/main" Requires="a14">
+          <p:sp>
+            <p:nvSpPr>
+              <p:cNvPr id="12" name="TextBox 11"/>
+              <p:cNvSpPr txBox="1"/>
+              <p:nvPr/>
+            </p:nvSpPr>
+            <p:spPr>
+              <a:xfrm>
+                <a:off x="3311652" y="4361688"/>
+                <a:ext cx="1283086" cy="338328"/>
+              </a:xfrm>
+              <a:prstGeom prst="rect">
+                <a:avLst/>
+              </a:prstGeom>
+              <a:noFill/>
+            </p:spPr>
+            <p:txBody>
+              <a:bodyPr wrap="none" lIns="0" rIns="0" tIns="0" bIns="0" anchor="ctr">
+                <a:noAutofit/>
+              </a:bodyPr>
+              <a:lstStyle/>
+              <a:p>
+                <a:pPr algn="l"/>
+                <a14:m>
+                  <m:oMathPara xmlns:m="http://schemas.openxmlformats.org/officeDocument/2006/math">
+                    <m:oMathParaPr>
+                      <m:jc m:val="left"/>
+                    </m:oMathParaPr>
+                    <m:oMath>
+                      <m:box>
+                        <m:e>
                           <m:r>
                             <m:rPr>
                               <m:sty m:val="p"/>
                             </m:rPr>
-                            <a:rPr lang="en-US" sz="2500" i="0">
-                              <a:solidFill>
-                                <a:srgbClr val="1A1A1A"/>
-                              </a:solidFill>
-                              <a:latin typeface="Cambria Math" panose="02040503050406030204" pitchFamily="18" charset="0"/>
-                              <a:ea typeface="Cambria Math"/>
-                            </a:rPr>
-                            <m:t> </m:t>
-                          </m:r>
-                          <m:r>
-                            <m:rPr>
-                              <m:sty m:val="p"/>
-                            </m:rPr>
-                            <a:rPr lang="en-US" sz="2500" i="0">
-                              <a:solidFill>
-                                <a:srgbClr val="1A1A1A"/>
-                              </a:solidFill>
-                              <a:latin typeface="Cambria Math" panose="02040503050406030204" pitchFamily="18" charset="0"/>
-                              <a:ea typeface="Cambria Math"/>
-                            </a:rPr>
-                            <m:t>⇒</m:t>
-                          </m:r>
-                          <m:r>
-                            <m:rPr>
-                              <m:sty m:val="p"/>
-                            </m:rPr>
-                            <a:rPr lang="en-US" sz="2500" i="0">
-                              <a:solidFill>
-                                <a:srgbClr val="1A1A1A"/>
-                              </a:solidFill>
-                              <a:latin typeface="Cambria Math" panose="02040503050406030204" pitchFamily="18" charset="0"/>
-                              <a:ea typeface="Cambria Math"/>
-                            </a:rPr>
-                            <m:t> </m:t>
-                          </m:r>
-                          <m:r>
-                            <m:rPr>
-                              <m:sty m:val="p"/>
-                            </m:rPr>
-                            <a:rPr lang="en-US" sz="2500" i="0">
+                            <a:rPr lang="en-US" sz="2200" i="0">
                               <a:solidFill>
                                 <a:srgbClr val="1A1A1A"/>
                               </a:solidFill>
@@ -22249,7 +24170,7 @@
                             <m:rPr>
                               <m:sty m:val="p"/>
                             </m:rPr>
-                            <a:rPr lang="en-US" sz="2500" i="0">
+                            <a:rPr lang="en-US" sz="2200" i="0">
                               <a:solidFill>
                                 <a:srgbClr val="1A1A1A"/>
                               </a:solidFill>
@@ -22262,7 +24183,7 @@
                             <m:rPr>
                               <m:sty m:val="p"/>
                             </m:rPr>
-                            <a:rPr lang="en-US" sz="2500" i="0">
+                            <a:rPr lang="en-US" sz="2200" i="0">
                               <a:solidFill>
                                 <a:srgbClr val="1A1A1A"/>
                               </a:solidFill>
@@ -22275,7 +24196,7 @@
                             <m:rPr>
                               <m:sty m:val="p"/>
                             </m:rPr>
-                            <a:rPr lang="en-US" sz="2500" i="0">
+                            <a:rPr lang="en-US" sz="2200" i="0">
                               <a:solidFill>
                                 <a:srgbClr val="1A1A1A"/>
                               </a:solidFill>
@@ -22288,7 +24209,7 @@
                             <m:rPr>
                               <m:sty m:val="p"/>
                             </m:rPr>
-                            <a:rPr lang="en-US" sz="2500" i="0">
+                            <a:rPr lang="en-US" sz="2200" i="0">
                               <a:solidFill>
                                 <a:srgbClr val="1A1A1A"/>
                               </a:solidFill>
@@ -22302,7 +24223,7 @@
                     </m:oMath>
                   </m:oMathPara>
                 </a14:m>
-                <a:endParaRPr lang="en-US" sz="2500"/>
+                <a:endParaRPr lang="en-US" sz="2200"/>
               </a:p>
             </p:txBody>
           </p:sp>
@@ -22310,22 +24231,22 @@
         <mc:Fallback>
           <p:pic>
             <p:nvPicPr>
-              <p:cNvPr id="11" name="Picture 10" descr="d_{12}=2\,\mathrm{Å},\quad d_{23}=2\,\mathrm{Å},\quad d_{13}=5\,\mathrm{Å}\quad\Rightarrow\quad 5&gt;2+2"/>
+              <p:cNvPr id="13" name="Picture 12" descr="5&gt;2+2"/>
               <p:cNvPicPr>
                 <a:picLocks noChangeAspect="1"/>
               </p:cNvPicPr>
               <p:nvPr/>
             </p:nvPicPr>
             <p:blipFill>
-              <a:blip r:embed="rId4"/>
+              <a:blip r:embed="rId5"/>
               <a:stretch>
                 <a:fillRect/>
               </a:stretch>
             </p:blipFill>
             <p:spPr>
               <a:xfrm>
-                <a:off x="2659227" y="3703320"/>
-                <a:ext cx="6873240" cy="445008"/>
+                <a:off x="3311652" y="4361688"/>
+                <a:ext cx="1103376" cy="338328"/>
               </a:xfrm>
               <a:prstGeom prst="rect">
                 <a:avLst/>
@@ -22334,89 +24255,114 @@
           </p:pic>
         </mc:Fallback>
       </mc:AlternateContent>
-      <p:sp>
-        <p:nvSpPr>
-          <p:cNvPr id="12" name="TextBox 11"/>
-          <p:cNvSpPr txBox="1"/>
-          <p:nvPr/>
-        </p:nvSpPr>
-        <p:spPr>
-          <a:xfrm>
-            <a:off x="594360" y="4462272"/>
-            <a:ext cx="10972800" cy="685800"/>
-          </a:xfrm>
-          <a:prstGeom prst="rect">
-            <a:avLst/>
-          </a:prstGeom>
-          <a:noFill/>
-        </p:spPr>
-        <p:txBody>
-          <a:bodyPr wrap="square" lIns="0" rIns="0" tIns="0" bIns="0" anchor="t">
-            <a:noAutofit/>
-          </a:bodyPr>
-          <a:lstStyle/>
-          <a:p>
-            <a:pPr algn="l">
-              <a:lnSpc>
-                <a:spcPts val="2304"/>
-              </a:lnSpc>
-            </a:pPr>
-            <a:r>
-              <a:rPr sz="1800" b="0" lang="ja-JP" altLang="en-US">
+      <p:pic>
+        <p:nvPicPr>
+          <p:cNvPr id="14" name="Picture 13" descr="review_triangle.png"/>
+          <p:cNvPicPr>
+            <a:picLocks noChangeAspect="1"/>
+          </p:cNvPicPr>
+          <p:nvPr/>
+        </p:nvPicPr>
+        <p:blipFill>
+          <a:blip r:embed="rId6"/>
+          <a:srcRect/>
+          <a:stretch>
+            <a:fillRect/>
+          </a:stretch>
+        </p:blipFill>
+        <p:spPr>
+          <a:xfrm>
+            <a:off x="8349778" y="2670048"/>
+            <a:ext cx="2539419" cy="2221992"/>
+          </a:xfrm>
+          <a:prstGeom prst="rect">
+            <a:avLst/>
+          </a:prstGeom>
+        </p:spPr>
+      </p:pic>
+      <p:sp>
+        <p:nvSpPr>
+          <p:cNvPr id="15" name="TextBox 14"/>
+          <p:cNvSpPr txBox="1"/>
+          <p:nvPr/>
+        </p:nvSpPr>
+        <p:spPr>
+          <a:xfrm>
+            <a:off x="594360" y="5047488"/>
+            <a:ext cx="5349240" cy="604520"/>
+          </a:xfrm>
+          <a:prstGeom prst="rect">
+            <a:avLst/>
+          </a:prstGeom>
+          <a:noFill/>
+        </p:spPr>
+        <p:txBody>
+          <a:bodyPr wrap="square" lIns="0" rIns="0" tIns="0" bIns="0" anchor="t">
+            <a:noAutofit/>
+          </a:bodyPr>
+          <a:lstStyle/>
+          <a:p>
+            <a:pPr algn="l">
+              <a:lnSpc>
+                <a:spcPts val="1984"/>
+              </a:lnSpc>
+            </a:pPr>
+            <a:r>
+              <a:rPr sz="1550" b="0" lang="ja-JP" altLang="en-US">
                 <a:solidFill>
                   <a:srgbClr val="333333"/>
                 </a:solidFill>
                 <a:latin typeface="Noto Sans JP"/>
                 <a:ea typeface="Noto Sans JP"/>
               </a:rPr>
-              <a:t>この3つの距離は、三角不等式を破るので三次元でも実現できない。対称な表を作るだけでは不十分。</a:t>
-            </a:r>
-          </a:p>
-        </p:txBody>
-      </p:sp>
-      <p:sp>
-        <p:nvSpPr>
-          <p:cNvPr id="13" name="TextBox 12"/>
-          <p:cNvSpPr txBox="1"/>
-          <p:nvPr/>
-        </p:nvSpPr>
-        <p:spPr>
-          <a:xfrm>
-            <a:off x="594360" y="5248656"/>
-            <a:ext cx="10972800" cy="685800"/>
-          </a:xfrm>
-          <a:prstGeom prst="rect">
-            <a:avLst/>
-          </a:prstGeom>
-          <a:noFill/>
-        </p:spPr>
-        <p:txBody>
-          <a:bodyPr wrap="square" lIns="0" rIns="0" tIns="0" bIns="0" anchor="t">
-            <a:noAutofit/>
-          </a:bodyPr>
-          <a:lstStyle/>
-          <a:p>
-            <a:pPr algn="l">
-              <a:lnSpc>
-                <a:spcPts val="2304"/>
-              </a:lnSpc>
-            </a:pPr>
-            <a:r>
-              <a:rPr sz="1800" b="0" lang="ja-JP" altLang="en-US">
+              <a:t>この3つの距離は三角不等式を満たさず、三次元でも実現できない。対称な表を作るだけでは不十分。</a:t>
+            </a:r>
+          </a:p>
+        </p:txBody>
+      </p:sp>
+      <p:sp>
+        <p:nvSpPr>
+          <p:cNvPr id="16" name="TextBox 15"/>
+          <p:cNvSpPr txBox="1"/>
+          <p:nvPr/>
+        </p:nvSpPr>
+        <p:spPr>
+          <a:xfrm>
+            <a:off x="6217920" y="5047488"/>
+            <a:ext cx="5349240" cy="856488"/>
+          </a:xfrm>
+          <a:prstGeom prst="rect">
+            <a:avLst/>
+          </a:prstGeom>
+          <a:noFill/>
+        </p:spPr>
+        <p:txBody>
+          <a:bodyPr wrap="square" lIns="0" rIns="0" tIns="0" bIns="0" anchor="t">
+            <a:noAutofit/>
+          </a:bodyPr>
+          <a:lstStyle/>
+          <a:p>
+            <a:pPr algn="l">
+              <a:lnSpc>
+                <a:spcPts val="1984"/>
+              </a:lnSpc>
+            </a:pPr>
+            <a:r>
+              <a:rPr sz="1550" b="0" lang="ja-JP" altLang="en-US">
                 <a:solidFill>
                   <a:srgbClr val="333333"/>
                 </a:solidFill>
                 <a:latin typeface="Noto Sans JP"/>
                 <a:ea typeface="Noto Sans JP"/>
               </a:rPr>
-              <a:t>これらは必要条件。多数の点を三次元に置けるかには、さらに制約がある。距離から座標を復元する方法は、後の構造表現の回で扱う。</a:t>
-            </a:r>
-          </a:p>
-        </p:txBody>
-      </p:sp>
-      <p:sp>
-        <p:nvSpPr>
-          <p:cNvPr id="14" name="TextBox 13"/>
+              <a:t>これらは必要条件。多数の点を三次元に置くには、さらに制約がある。ここでは距離が満たす条件までを扱い、座標復元の計算法は省略する。</a:t>
+            </a:r>
+          </a:p>
+        </p:txBody>
+      </p:sp>
+      <p:sp>
+        <p:nvSpPr>
+          <p:cNvPr id="17" name="TextBox 16"/>
           <p:cNvSpPr txBox="1"/>
           <p:nvPr/>
         </p:nvSpPr>
@@ -23115,7 +25061,7 @@
         <p:spPr>
           <a:xfrm>
             <a:off x="594360" y="4690872"/>
-            <a:ext cx="5349240" cy="604520"/>
+            <a:ext cx="5349240" cy="856488"/>
           </a:xfrm>
           <a:prstGeom prst="rect">
             <a:avLst/>
@@ -23141,7 +25087,7 @@
                 <a:latin typeface="Noto Sans JP"/>
                 <a:ea typeface="Noto Sans JP"/>
               </a:rPr>
-              <a:t>隣り合うアミノ酸の C–N 結合がペプチド結合。 主鎖は N–Cα–C の繰り返し。側鎖は Cα から分かれる。</a:t>
+              <a:t>隣り合うアミノ酸の C–N 結合がペプチド結合。 主鎖は N–Cα–C の繰り返し。側鎖は Cα から分かれる。 配列は N 末端から C 末端へ読む。</a:t>
             </a:r>
           </a:p>
         </p:txBody>
@@ -23181,7 +25127,7 @@
                 <a:latin typeface="Noto Sans JP"/>
                 <a:ea typeface="Noto Sans JP"/>
               </a:rPr>
-              <a:t>配列は N 末端から C 末端へ読む。 図の紫色が主鎖、そこから分かれる部分が側鎖。Met–Val–Phe は同じ主鎖を共有し、側鎖だけが異なる。 ペプチド結合はカルボニル炭素 C と次の残基の N をつなぐ。残基とは、この鎖に組み込まれたアミノ酸の単位。</a:t>
+              <a:t>図の紫色が主鎖、そこから分かれる部分が側鎖。Met–Val–Phe は同じ主鎖を共有し、側鎖だけが異なる。 ペプチド結合はカルボニル炭素 C と次の残基の N をつなぐ。残基とは、この鎖に組み込まれたアミノ酸の単位。</a:t>
             </a:r>
           </a:p>
         </p:txBody>
@@ -23407,9 +25353,209 @@
           </a:p>
         </p:txBody>
       </p:sp>
+      <p:sp>
+        <p:nvSpPr>
+          <p:cNvPr id="6" name="TextBox 5"/>
+          <p:cNvSpPr txBox="1"/>
+          <p:nvPr/>
+        </p:nvSpPr>
+        <p:spPr>
+          <a:xfrm>
+            <a:off x="594360" y="1508760"/>
+            <a:ext cx="5760720" cy="685800"/>
+          </a:xfrm>
+          <a:prstGeom prst="rect">
+            <a:avLst/>
+          </a:prstGeom>
+          <a:noFill/>
+        </p:spPr>
+        <p:txBody>
+          <a:bodyPr wrap="square" lIns="0" rIns="0" tIns="0" bIns="0" anchor="t">
+            <a:noAutofit/>
+          </a:bodyPr>
+          <a:lstStyle/>
+          <a:p>
+            <a:pPr algn="l">
+              <a:lnSpc>
+                <a:spcPts val="2304"/>
+              </a:lnSpc>
+            </a:pPr>
+            <a:r>
+              <a:rPr sz="1800" b="0" lang="ja-JP" altLang="en-US">
+                <a:solidFill>
+                  <a:srgbClr val="333333"/>
+                </a:solidFill>
+                <a:latin typeface="Noto Sans JP"/>
+                <a:ea typeface="Noto Sans JP"/>
+              </a:rPr>
+              <a:t>ペプチド結合は部分的な二重結合性を持ち、ほぼ平面を作る。</a:t>
+            </a:r>
+          </a:p>
+        </p:txBody>
+      </p:sp>
+      <p:sp>
+        <p:nvSpPr>
+          <p:cNvPr id="7" name="TextBox 6"/>
+          <p:cNvSpPr txBox="1"/>
+          <p:nvPr/>
+        </p:nvSpPr>
+        <p:spPr>
+          <a:xfrm>
+            <a:off x="594360" y="2295144"/>
+            <a:ext cx="5760720" cy="393192"/>
+          </a:xfrm>
+          <a:prstGeom prst="rect">
+            <a:avLst/>
+          </a:prstGeom>
+          <a:noFill/>
+        </p:spPr>
+        <p:txBody>
+          <a:bodyPr wrap="square" lIns="0" rIns="0" tIns="0" bIns="0" anchor="t">
+            <a:noAutofit/>
+          </a:bodyPr>
+          <a:lstStyle/>
+          <a:p>
+            <a:pPr algn="l">
+              <a:lnSpc>
+                <a:spcPts val="2304"/>
+              </a:lnSpc>
+            </a:pPr>
+            <a:r>
+              <a:rPr sz="1800" b="0" lang="ja-JP" altLang="en-US">
+                <a:solidFill>
+                  <a:srgbClr val="333333"/>
+                </a:solidFill>
+                <a:latin typeface="Noto Sans JP"/>
+                <a:ea typeface="Noto Sans JP"/>
+              </a:rPr>
+              <a:t>主な回転は N–Cα と Cα–C のまわりで起こる。</a:t>
+            </a:r>
+          </a:p>
+        </p:txBody>
+      </p:sp>
+      <p:sp>
+        <p:nvSpPr>
+          <p:cNvPr id="8" name="TextBox 7"/>
+          <p:cNvSpPr txBox="1"/>
+          <p:nvPr/>
+        </p:nvSpPr>
+        <p:spPr>
+          <a:xfrm>
+            <a:off x="594360" y="2788920"/>
+            <a:ext cx="5760720" cy="685800"/>
+          </a:xfrm>
+          <a:prstGeom prst="rect">
+            <a:avLst/>
+          </a:prstGeom>
+          <a:noFill/>
+        </p:spPr>
+        <p:txBody>
+          <a:bodyPr wrap="square" lIns="0" rIns="0" tIns="0" bIns="0" anchor="t">
+            <a:noAutofit/>
+          </a:bodyPr>
+          <a:lstStyle/>
+          <a:p>
+            <a:pPr algn="l">
+              <a:lnSpc>
+                <a:spcPts val="2304"/>
+              </a:lnSpc>
+            </a:pPr>
+            <a:r>
+              <a:rPr sz="1800" b="0" lang="ja-JP" altLang="en-US">
+                <a:solidFill>
+                  <a:srgbClr val="333333"/>
+                </a:solidFill>
+                <a:latin typeface="Noto Sans JP"/>
+                <a:ea typeface="Noto Sans JP"/>
+              </a:rPr>
+              <a:t>原子どうしが重なる向きは取りにくい。これが構造を制限する。</a:t>
+            </a:r>
+          </a:p>
+        </p:txBody>
+      </p:sp>
+      <p:sp>
+        <p:nvSpPr>
+          <p:cNvPr id="9" name="TextBox 8"/>
+          <p:cNvSpPr txBox="1"/>
+          <p:nvPr/>
+        </p:nvSpPr>
+        <p:spPr>
+          <a:xfrm>
+            <a:off x="594360" y="3575303"/>
+            <a:ext cx="5760720" cy="978408"/>
+          </a:xfrm>
+          <a:prstGeom prst="rect">
+            <a:avLst/>
+          </a:prstGeom>
+          <a:noFill/>
+        </p:spPr>
+        <p:txBody>
+          <a:bodyPr wrap="square" lIns="0" rIns="0" tIns="0" bIns="0" anchor="t">
+            <a:noAutofit/>
+          </a:bodyPr>
+          <a:lstStyle/>
+          <a:p>
+            <a:pPr algn="l">
+              <a:lnSpc>
+                <a:spcPts val="2304"/>
+              </a:lnSpc>
+            </a:pPr>
+            <a:r>
+              <a:rPr sz="1800" b="0" lang="ja-JP" altLang="en-US">
+                <a:solidFill>
+                  <a:srgbClr val="333333"/>
+                </a:solidFill>
+                <a:latin typeface="Noto Sans JP"/>
+                <a:ea typeface="Noto Sans JP"/>
+              </a:rPr>
+              <a:t>回転しやすい二つの結合が平面どうしの向きを変える。主鎖全体が同じ平面に乗るという意味ではない。</a:t>
+            </a:r>
+          </a:p>
+        </p:txBody>
+      </p:sp>
+      <p:sp>
+        <p:nvSpPr>
+          <p:cNvPr id="10" name="TextBox 9"/>
+          <p:cNvSpPr txBox="1"/>
+          <p:nvPr/>
+        </p:nvSpPr>
+        <p:spPr>
+          <a:xfrm>
+            <a:off x="594360" y="4654296"/>
+            <a:ext cx="5760720" cy="978408"/>
+          </a:xfrm>
+          <a:prstGeom prst="rect">
+            <a:avLst/>
+          </a:prstGeom>
+          <a:noFill/>
+        </p:spPr>
+        <p:txBody>
+          <a:bodyPr wrap="square" lIns="0" rIns="0" tIns="0" bIns="0" anchor="t">
+            <a:noAutofit/>
+          </a:bodyPr>
+          <a:lstStyle/>
+          <a:p>
+            <a:pPr algn="l">
+              <a:lnSpc>
+                <a:spcPts val="2304"/>
+              </a:lnSpc>
+            </a:pPr>
+            <a:r>
+              <a:rPr sz="1800" b="0" lang="ja-JP" altLang="en-US">
+                <a:solidFill>
+                  <a:srgbClr val="333333"/>
+                </a:solidFill>
+                <a:latin typeface="Noto Sans JP"/>
+                <a:ea typeface="Noto Sans JP"/>
+              </a:rPr>
+              <a:t>原子の大きさによる制限と水素結合の組合せが、繰り返し現れるヘリックスやシートの形につながる。</a:t>
+            </a:r>
+          </a:p>
+        </p:txBody>
+      </p:sp>
       <p:pic>
         <p:nvPicPr>
-          <p:cNvPr id="6" name="Picture 5" descr="peptide.png"/>
+          <p:cNvPr id="11" name="Picture 10" descr="review_peptide_plane.png"/>
           <p:cNvPicPr>
             <a:picLocks noChangeAspect="1"/>
           </p:cNvPicPr>
@@ -23417,221 +25563,21 @@
         </p:nvPicPr>
         <p:blipFill>
           <a:blip r:embed="rId3"/>
-          <a:srcRect l="25500" t="10500" r="28500" b="16500"/>
+          <a:srcRect/>
           <a:stretch>
             <a:fillRect/>
           </a:stretch>
         </p:blipFill>
         <p:spPr>
           <a:xfrm>
-            <a:off x="457200" y="1589284"/>
-            <a:ext cx="6035040" cy="4264647"/>
+            <a:off x="6611112" y="1739188"/>
+            <a:ext cx="4956048" cy="3964838"/>
           </a:xfrm>
           <a:prstGeom prst="rect">
             <a:avLst/>
           </a:prstGeom>
         </p:spPr>
       </p:pic>
-      <p:sp>
-        <p:nvSpPr>
-          <p:cNvPr id="7" name="TextBox 6"/>
-          <p:cNvSpPr txBox="1"/>
-          <p:nvPr/>
-        </p:nvSpPr>
-        <p:spPr>
-          <a:xfrm>
-            <a:off x="6702552" y="1508760"/>
-            <a:ext cx="5029200" cy="653288"/>
-          </a:xfrm>
-          <a:prstGeom prst="rect">
-            <a:avLst/>
-          </a:prstGeom>
-          <a:noFill/>
-        </p:spPr>
-        <p:txBody>
-          <a:bodyPr wrap="square" lIns="0" rIns="0" tIns="0" bIns="0" anchor="t">
-            <a:noAutofit/>
-          </a:bodyPr>
-          <a:lstStyle/>
-          <a:p>
-            <a:pPr algn="l">
-              <a:lnSpc>
-                <a:spcPts val="2176"/>
-              </a:lnSpc>
-            </a:pPr>
-            <a:r>
-              <a:rPr sz="1700" b="0" lang="ja-JP" altLang="en-US">
-                <a:solidFill>
-                  <a:srgbClr val="333333"/>
-                </a:solidFill>
-                <a:latin typeface="Noto Sans JP"/>
-                <a:ea typeface="Noto Sans JP"/>
-              </a:rPr>
-              <a:t>ペプチド結合は部分的な二重結合性を持ち、ほぼ平面を作る。</a:t>
-            </a:r>
-          </a:p>
-        </p:txBody>
-      </p:sp>
-      <p:sp>
-        <p:nvSpPr>
-          <p:cNvPr id="8" name="TextBox 7"/>
-          <p:cNvSpPr txBox="1"/>
-          <p:nvPr/>
-        </p:nvSpPr>
-        <p:spPr>
-          <a:xfrm>
-            <a:off x="6702552" y="2262632"/>
-            <a:ext cx="5029200" cy="653288"/>
-          </a:xfrm>
-          <a:prstGeom prst="rect">
-            <a:avLst/>
-          </a:prstGeom>
-          <a:noFill/>
-        </p:spPr>
-        <p:txBody>
-          <a:bodyPr wrap="square" lIns="0" rIns="0" tIns="0" bIns="0" anchor="t">
-            <a:noAutofit/>
-          </a:bodyPr>
-          <a:lstStyle/>
-          <a:p>
-            <a:pPr algn="l">
-              <a:lnSpc>
-                <a:spcPts val="2176"/>
-              </a:lnSpc>
-            </a:pPr>
-            <a:r>
-              <a:rPr sz="1700" b="0" lang="ja-JP" altLang="en-US">
-                <a:solidFill>
-                  <a:srgbClr val="333333"/>
-                </a:solidFill>
-                <a:latin typeface="Noto Sans JP"/>
-                <a:ea typeface="Noto Sans JP"/>
-              </a:rPr>
-              <a:t>主な回転は N–Cα と Cα–C のまわりで起こる。</a:t>
-            </a:r>
-          </a:p>
-        </p:txBody>
-      </p:sp>
-      <p:sp>
-        <p:nvSpPr>
-          <p:cNvPr id="9" name="TextBox 8"/>
-          <p:cNvSpPr txBox="1"/>
-          <p:nvPr/>
-        </p:nvSpPr>
-        <p:spPr>
-          <a:xfrm>
-            <a:off x="6702552" y="3016504"/>
-            <a:ext cx="5029200" cy="653288"/>
-          </a:xfrm>
-          <a:prstGeom prst="rect">
-            <a:avLst/>
-          </a:prstGeom>
-          <a:noFill/>
-        </p:spPr>
-        <p:txBody>
-          <a:bodyPr wrap="square" lIns="0" rIns="0" tIns="0" bIns="0" anchor="t">
-            <a:noAutofit/>
-          </a:bodyPr>
-          <a:lstStyle/>
-          <a:p>
-            <a:pPr algn="l">
-              <a:lnSpc>
-                <a:spcPts val="2176"/>
-              </a:lnSpc>
-            </a:pPr>
-            <a:r>
-              <a:rPr sz="1700" b="0" lang="ja-JP" altLang="en-US">
-                <a:solidFill>
-                  <a:srgbClr val="333333"/>
-                </a:solidFill>
-                <a:latin typeface="Noto Sans JP"/>
-                <a:ea typeface="Noto Sans JP"/>
-              </a:rPr>
-              <a:t>原子どうしが重なる向きは取りにくい。これが構造を制限する。</a:t>
-            </a:r>
-          </a:p>
-        </p:txBody>
-      </p:sp>
-      <p:sp>
-        <p:nvSpPr>
-          <p:cNvPr id="10" name="TextBox 9"/>
-          <p:cNvSpPr txBox="1"/>
-          <p:nvPr/>
-        </p:nvSpPr>
-        <p:spPr>
-          <a:xfrm>
-            <a:off x="6702552" y="3770375"/>
-            <a:ext cx="5029200" cy="929640"/>
-          </a:xfrm>
-          <a:prstGeom prst="rect">
-            <a:avLst/>
-          </a:prstGeom>
-          <a:noFill/>
-        </p:spPr>
-        <p:txBody>
-          <a:bodyPr wrap="square" lIns="0" rIns="0" tIns="0" bIns="0" anchor="t">
-            <a:noAutofit/>
-          </a:bodyPr>
-          <a:lstStyle/>
-          <a:p>
-            <a:pPr algn="l">
-              <a:lnSpc>
-                <a:spcPts val="2176"/>
-              </a:lnSpc>
-            </a:pPr>
-            <a:r>
-              <a:rPr sz="1700" b="0" lang="ja-JP" altLang="en-US">
-                <a:solidFill>
-                  <a:srgbClr val="333333"/>
-                </a:solidFill>
-                <a:latin typeface="Noto Sans JP"/>
-                <a:ea typeface="Noto Sans JP"/>
-              </a:rPr>
-              <a:t>回転しやすい二つの結合が平面どうしの向きを変える。主鎖全体が同じ平面に乗るという意味ではない。</a:t>
-            </a:r>
-          </a:p>
-        </p:txBody>
-      </p:sp>
-      <p:sp>
-        <p:nvSpPr>
-          <p:cNvPr id="11" name="TextBox 10"/>
-          <p:cNvSpPr txBox="1"/>
-          <p:nvPr/>
-        </p:nvSpPr>
-        <p:spPr>
-          <a:xfrm>
-            <a:off x="6702552" y="4800600"/>
-            <a:ext cx="5029200" cy="929640"/>
-          </a:xfrm>
-          <a:prstGeom prst="rect">
-            <a:avLst/>
-          </a:prstGeom>
-          <a:noFill/>
-        </p:spPr>
-        <p:txBody>
-          <a:bodyPr wrap="square" lIns="0" rIns="0" tIns="0" bIns="0" anchor="t">
-            <a:noAutofit/>
-          </a:bodyPr>
-          <a:lstStyle/>
-          <a:p>
-            <a:pPr algn="l">
-              <a:lnSpc>
-                <a:spcPts val="2176"/>
-              </a:lnSpc>
-            </a:pPr>
-            <a:r>
-              <a:rPr sz="1700" b="0" lang="ja-JP" altLang="en-US">
-                <a:solidFill>
-                  <a:srgbClr val="333333"/>
-                </a:solidFill>
-                <a:latin typeface="Noto Sans JP"/>
-                <a:ea typeface="Noto Sans JP"/>
-              </a:rPr>
-              <a:t>原子の大きさによる制限と水素結合の組合せが、繰り返し現れるヘリックスやシートの形につながる。</a:t>
-            </a:r>
-          </a:p>
-        </p:txBody>
-      </p:sp>
       <p:sp>
         <p:nvSpPr>
           <p:cNvPr id="12" name="TextBox 11"/>
@@ -23667,7 +25613,7 @@
                 <a:latin typeface="Noto Sans JP"/>
                 <a:ea typeface="Noto Sans JP"/>
               </a:rPr>
-              <a:t>図：Kuriyan, Konforti &amp; Wemmer, The Molecules of Life (2012)／昨年度教材より</a:t>
+              <a:t>PDB 1UBQ：鎖Aの残基23–24の主鎖座標。淡色はペプチド平面、破線は回転軸を示す。</a:t>
             </a:r>
           </a:p>
         </p:txBody>
@@ -23773,7 +25719,7 @@
                 <a:latin typeface="Noto Sans JP"/>
                 <a:ea typeface="Noto Sans JP"/>
               </a:rPr>
-              <a:t>電荷は整数だけではない</a:t>
+              <a:t>電子の偏りを部分電荷で表す</a:t>
             </a:r>
           </a:p>
         </p:txBody>
@@ -23861,27 +25807,27 @@
         </p:nvSpPr>
         <p:spPr>
           <a:xfrm>
-            <a:off x="685800" y="1554480"/>
-            <a:ext cx="10808208" cy="441959"/>
-          </a:xfrm>
-          <a:prstGeom prst="rect">
-            <a:avLst/>
-          </a:prstGeom>
-          <a:noFill/>
-        </p:spPr>
-        <p:txBody>
-          <a:bodyPr wrap="square" lIns="0" rIns="0" tIns="0" bIns="0" anchor="t">
-            <a:noAutofit/>
-          </a:bodyPr>
-          <a:lstStyle/>
-          <a:p>
-            <a:pPr algn="l">
-              <a:lnSpc>
-                <a:spcPts val="2688"/>
-              </a:lnSpc>
-            </a:pPr>
-            <a:r>
-              <a:rPr sz="2100" b="0" lang="ja-JP" altLang="en-US">
+            <a:off x="594360" y="1508760"/>
+            <a:ext cx="5760720" cy="685800"/>
+          </a:xfrm>
+          <a:prstGeom prst="rect">
+            <a:avLst/>
+          </a:prstGeom>
+          <a:noFill/>
+        </p:spPr>
+        <p:txBody>
+          <a:bodyPr wrap="square" lIns="0" rIns="0" tIns="0" bIns="0" anchor="t">
+            <a:noAutofit/>
+          </a:bodyPr>
+          <a:lstStyle/>
+          <a:p>
+            <a:pPr algn="l">
+              <a:lnSpc>
+                <a:spcPts val="2304"/>
+              </a:lnSpc>
+            </a:pPr>
+            <a:r>
+              <a:rPr sz="1800" b="0" lang="ja-JP" altLang="en-US">
                 <a:solidFill>
                   <a:srgbClr val="333333"/>
                 </a:solidFill>
@@ -23901,27 +25847,27 @@
         </p:nvSpPr>
         <p:spPr>
           <a:xfrm>
-            <a:off x="685800" y="2097023"/>
-            <a:ext cx="10808208" cy="441959"/>
-          </a:xfrm>
-          <a:prstGeom prst="rect">
-            <a:avLst/>
-          </a:prstGeom>
-          <a:noFill/>
-        </p:spPr>
-        <p:txBody>
-          <a:bodyPr wrap="square" lIns="0" rIns="0" tIns="0" bIns="0" anchor="t">
-            <a:noAutofit/>
-          </a:bodyPr>
-          <a:lstStyle/>
-          <a:p>
-            <a:pPr algn="l">
-              <a:lnSpc>
-                <a:spcPts val="2688"/>
-              </a:lnSpc>
-            </a:pPr>
-            <a:r>
-              <a:rPr sz="2100" b="0" lang="ja-JP" altLang="en-US">
+            <a:off x="594360" y="2295144"/>
+            <a:ext cx="5760720" cy="393192"/>
+          </a:xfrm>
+          <a:prstGeom prst="rect">
+            <a:avLst/>
+          </a:prstGeom>
+          <a:noFill/>
+        </p:spPr>
+        <p:txBody>
+          <a:bodyPr wrap="square" lIns="0" rIns="0" tIns="0" bIns="0" anchor="t">
+            <a:noAutofit/>
+          </a:bodyPr>
+          <a:lstStyle/>
+          <a:p>
+            <a:pPr algn="l">
+              <a:lnSpc>
+                <a:spcPts val="2304"/>
+              </a:lnSpc>
+            </a:pPr>
+            <a:r>
+              <a:rPr sz="1800" b="0" lang="ja-JP" altLang="en-US">
                 <a:solidFill>
                   <a:srgbClr val="333333"/>
                 </a:solidFill>
@@ -23941,27 +25887,27 @@
         </p:nvSpPr>
         <p:spPr>
           <a:xfrm>
-            <a:off x="685800" y="2639567"/>
-            <a:ext cx="10808208" cy="441959"/>
-          </a:xfrm>
-          <a:prstGeom prst="rect">
-            <a:avLst/>
-          </a:prstGeom>
-          <a:noFill/>
-        </p:spPr>
-        <p:txBody>
-          <a:bodyPr wrap="square" lIns="0" rIns="0" tIns="0" bIns="0" anchor="t">
-            <a:noAutofit/>
-          </a:bodyPr>
-          <a:lstStyle/>
-          <a:p>
-            <a:pPr algn="l">
-              <a:lnSpc>
-                <a:spcPts val="2688"/>
-              </a:lnSpc>
-            </a:pPr>
-            <a:r>
-              <a:rPr sz="2100" b="0" lang="ja-JP" altLang="en-US">
+            <a:off x="594360" y="2788920"/>
+            <a:ext cx="5760720" cy="685800"/>
+          </a:xfrm>
+          <a:prstGeom prst="rect">
+            <a:avLst/>
+          </a:prstGeom>
+          <a:noFill/>
+        </p:spPr>
+        <p:txBody>
+          <a:bodyPr wrap="square" lIns="0" rIns="0" tIns="0" bIns="0" anchor="t">
+            <a:noAutofit/>
+          </a:bodyPr>
+          <a:lstStyle/>
+          <a:p>
+            <a:pPr algn="l">
+              <a:lnSpc>
+                <a:spcPts val="2304"/>
+              </a:lnSpc>
+            </a:pPr>
+            <a:r>
+              <a:rPr sz="1800" b="0" lang="ja-JP" altLang="en-US">
                 <a:solidFill>
                   <a:srgbClr val="333333"/>
                 </a:solidFill>
@@ -23981,27 +25927,27 @@
         </p:nvSpPr>
         <p:spPr>
           <a:xfrm>
-            <a:off x="685800" y="3182111"/>
-            <a:ext cx="10808208" cy="783336"/>
-          </a:xfrm>
-          <a:prstGeom prst="rect">
-            <a:avLst/>
-          </a:prstGeom>
-          <a:noFill/>
-        </p:spPr>
-        <p:txBody>
-          <a:bodyPr wrap="square" lIns="0" rIns="0" tIns="0" bIns="0" anchor="t">
-            <a:noAutofit/>
-          </a:bodyPr>
-          <a:lstStyle/>
-          <a:p>
-            <a:pPr algn="l">
-              <a:lnSpc>
-                <a:spcPts val="2688"/>
-              </a:lnSpc>
-            </a:pPr>
-            <a:r>
-              <a:rPr sz="2100" b="0" lang="ja-JP" altLang="en-US">
+            <a:off x="594360" y="3575303"/>
+            <a:ext cx="5760720" cy="978408"/>
+          </a:xfrm>
+          <a:prstGeom prst="rect">
+            <a:avLst/>
+          </a:prstGeom>
+          <a:noFill/>
+        </p:spPr>
+        <p:txBody>
+          <a:bodyPr wrap="square" lIns="0" rIns="0" tIns="0" bIns="0" anchor="t">
+            <a:noAutofit/>
+          </a:bodyPr>
+          <a:lstStyle/>
+          <a:p>
+            <a:pPr algn="l">
+              <a:lnSpc>
+                <a:spcPts val="2304"/>
+              </a:lnSpc>
+            </a:pPr>
+            <a:r>
+              <a:rPr sz="1800" b="0" lang="ja-JP" altLang="en-US">
                 <a:solidFill>
                   <a:srgbClr val="333333"/>
                 </a:solidFill>
@@ -24021,27 +25967,27 @@
         </p:nvSpPr>
         <p:spPr>
           <a:xfrm>
-            <a:off x="685800" y="4066031"/>
-            <a:ext cx="10808208" cy="783336"/>
-          </a:xfrm>
-          <a:prstGeom prst="rect">
-            <a:avLst/>
-          </a:prstGeom>
-          <a:noFill/>
-        </p:spPr>
-        <p:txBody>
-          <a:bodyPr wrap="square" lIns="0" rIns="0" tIns="0" bIns="0" anchor="t">
-            <a:noAutofit/>
-          </a:bodyPr>
-          <a:lstStyle/>
-          <a:p>
-            <a:pPr algn="l">
-              <a:lnSpc>
-                <a:spcPts val="2688"/>
-              </a:lnSpc>
-            </a:pPr>
-            <a:r>
-              <a:rPr sz="2100" b="0" lang="ja-JP" altLang="en-US">
+            <a:off x="594360" y="4654296"/>
+            <a:ext cx="5760720" cy="978408"/>
+          </a:xfrm>
+          <a:prstGeom prst="rect">
+            <a:avLst/>
+          </a:prstGeom>
+          <a:noFill/>
+        </p:spPr>
+        <p:txBody>
+          <a:bodyPr wrap="square" lIns="0" rIns="0" tIns="0" bIns="0" anchor="t">
+            <a:noAutofit/>
+          </a:bodyPr>
+          <a:lstStyle/>
+          <a:p>
+            <a:pPr algn="l">
+              <a:lnSpc>
+                <a:spcPts val="2304"/>
+              </a:lnSpc>
+            </a:pPr>
+            <a:r>
+              <a:rPr sz="1800" b="0" lang="ja-JP" altLang="en-US">
                 <a:solidFill>
                   <a:srgbClr val="333333"/>
                 </a:solidFill>
@@ -24049,6 +25995,71 @@
                 <a:ea typeface="Noto Sans JP"/>
               </a:rPr>
               <a:t>形式電荷は結合の電子を規則に従って割り当てた整数。部分電荷は電子密度の偏りをモデル化する量で、割り当て方によって値が変わる。</a:t>
+            </a:r>
+          </a:p>
+        </p:txBody>
+      </p:sp>
+      <p:pic>
+        <p:nvPicPr>
+          <p:cNvPr id="11" name="Picture 10" descr="review_charge.png"/>
+          <p:cNvPicPr>
+            <a:picLocks noChangeAspect="1"/>
+          </p:cNvPicPr>
+          <p:nvPr/>
+        </p:nvPicPr>
+        <p:blipFill>
+          <a:blip r:embed="rId3"/>
+          <a:srcRect/>
+          <a:stretch>
+            <a:fillRect/>
+          </a:stretch>
+        </p:blipFill>
+        <p:spPr>
+          <a:xfrm>
+            <a:off x="6611112" y="2069592"/>
+            <a:ext cx="4956048" cy="3304032"/>
+          </a:xfrm>
+          <a:prstGeom prst="rect">
+            <a:avLst/>
+          </a:prstGeom>
+        </p:spPr>
+      </p:pic>
+      <p:sp>
+        <p:nvSpPr>
+          <p:cNvPr id="12" name="TextBox 11"/>
+          <p:cNvSpPr txBox="1"/>
+          <p:nvPr/>
+        </p:nvSpPr>
+        <p:spPr>
+          <a:xfrm>
+            <a:off x="502920" y="6217920"/>
+            <a:ext cx="11064240" cy="182880"/>
+          </a:xfrm>
+          <a:prstGeom prst="rect">
+            <a:avLst/>
+          </a:prstGeom>
+          <a:noFill/>
+        </p:spPr>
+        <p:txBody>
+          <a:bodyPr wrap="square" lIns="0" rIns="0" tIns="0" bIns="0" anchor="t">
+            <a:noAutofit/>
+          </a:bodyPr>
+          <a:lstStyle/>
+          <a:p>
+            <a:pPr algn="l">
+              <a:lnSpc>
+                <a:spcPct val="100000"/>
+              </a:lnSpc>
+            </a:pPr>
+            <a:r>
+              <a:rPr sz="919" b="0" lang="ja-JP" altLang="en-US">
+                <a:solidFill>
+                  <a:srgbClr val="666666"/>
+                </a:solidFill>
+                <a:latin typeface="Noto Sans JP"/>
+                <a:ea typeface="Noto Sans JP"/>
+              </a:rPr>
+              <a:t>説明用の模式図。原子の大きさや距離は縮尺どおりではない。</a:t>
             </a:r>
           </a:p>
         </p:txBody>
@@ -24600,7 +26611,7 @@
                 <a:latin typeface="Noto Sans JP"/>
                 <a:ea typeface="Noto Sans JP"/>
               </a:rPr>
-              <a:t>側鎖の性質を水との関係で読む</a:t>
+              <a:t>側鎖の性質と水との相互作用</a:t>
             </a:r>
           </a:p>
         </p:txBody>
@@ -24688,27 +26699,27 @@
         </p:nvSpPr>
         <p:spPr>
           <a:xfrm>
-            <a:off x="685800" y="1554480"/>
-            <a:ext cx="10808208" cy="441959"/>
-          </a:xfrm>
-          <a:prstGeom prst="rect">
-            <a:avLst/>
-          </a:prstGeom>
-          <a:noFill/>
-        </p:spPr>
-        <p:txBody>
-          <a:bodyPr wrap="square" lIns="0" rIns="0" tIns="0" bIns="0" anchor="t">
-            <a:noAutofit/>
-          </a:bodyPr>
-          <a:lstStyle/>
-          <a:p>
-            <a:pPr algn="l">
-              <a:lnSpc>
-                <a:spcPts val="2688"/>
-              </a:lnSpc>
-            </a:pPr>
-            <a:r>
-              <a:rPr sz="2100" b="0" lang="ja-JP" altLang="en-US">
+            <a:off x="594360" y="1508760"/>
+            <a:ext cx="5760720" cy="685800"/>
+          </a:xfrm>
+          <a:prstGeom prst="rect">
+            <a:avLst/>
+          </a:prstGeom>
+          <a:noFill/>
+        </p:spPr>
+        <p:txBody>
+          <a:bodyPr wrap="square" lIns="0" rIns="0" tIns="0" bIns="0" anchor="t">
+            <a:noAutofit/>
+          </a:bodyPr>
+          <a:lstStyle/>
+          <a:p>
+            <a:pPr algn="l">
+              <a:lnSpc>
+                <a:spcPts val="2304"/>
+              </a:lnSpc>
+            </a:pPr>
+            <a:r>
+              <a:rPr sz="1800" b="0" lang="ja-JP" altLang="en-US">
                 <a:solidFill>
                   <a:srgbClr val="333333"/>
                 </a:solidFill>
@@ -24728,27 +26739,27 @@
         </p:nvSpPr>
         <p:spPr>
           <a:xfrm>
-            <a:off x="685800" y="2097023"/>
-            <a:ext cx="10808208" cy="441959"/>
-          </a:xfrm>
-          <a:prstGeom prst="rect">
-            <a:avLst/>
-          </a:prstGeom>
-          <a:noFill/>
-        </p:spPr>
-        <p:txBody>
-          <a:bodyPr wrap="square" lIns="0" rIns="0" tIns="0" bIns="0" anchor="t">
-            <a:noAutofit/>
-          </a:bodyPr>
-          <a:lstStyle/>
-          <a:p>
-            <a:pPr algn="l">
-              <a:lnSpc>
-                <a:spcPts val="2688"/>
-              </a:lnSpc>
-            </a:pPr>
-            <a:r>
-              <a:rPr sz="2100" b="0" lang="ja-JP" altLang="en-US">
+            <a:off x="594360" y="2295144"/>
+            <a:ext cx="5760720" cy="685800"/>
+          </a:xfrm>
+          <a:prstGeom prst="rect">
+            <a:avLst/>
+          </a:prstGeom>
+          <a:noFill/>
+        </p:spPr>
+        <p:txBody>
+          <a:bodyPr wrap="square" lIns="0" rIns="0" tIns="0" bIns="0" anchor="t">
+            <a:noAutofit/>
+          </a:bodyPr>
+          <a:lstStyle/>
+          <a:p>
+            <a:pPr algn="l">
+              <a:lnSpc>
+                <a:spcPts val="2304"/>
+              </a:lnSpc>
+            </a:pPr>
+            <a:r>
+              <a:rPr sz="1800" b="0" lang="ja-JP" altLang="en-US">
                 <a:solidFill>
                   <a:srgbClr val="333333"/>
                 </a:solidFill>
@@ -24768,27 +26779,27 @@
         </p:nvSpPr>
         <p:spPr>
           <a:xfrm>
-            <a:off x="685800" y="2639567"/>
-            <a:ext cx="10808208" cy="441959"/>
-          </a:xfrm>
-          <a:prstGeom prst="rect">
-            <a:avLst/>
-          </a:prstGeom>
-          <a:noFill/>
-        </p:spPr>
-        <p:txBody>
-          <a:bodyPr wrap="square" lIns="0" rIns="0" tIns="0" bIns="0" anchor="t">
-            <a:noAutofit/>
-          </a:bodyPr>
-          <a:lstStyle/>
-          <a:p>
-            <a:pPr algn="l">
-              <a:lnSpc>
-                <a:spcPts val="2688"/>
-              </a:lnSpc>
-            </a:pPr>
-            <a:r>
-              <a:rPr sz="2100" b="0" lang="ja-JP" altLang="en-US">
+            <a:off x="594360" y="3081527"/>
+            <a:ext cx="5760720" cy="685800"/>
+          </a:xfrm>
+          <a:prstGeom prst="rect">
+            <a:avLst/>
+          </a:prstGeom>
+          <a:noFill/>
+        </p:spPr>
+        <p:txBody>
+          <a:bodyPr wrap="square" lIns="0" rIns="0" tIns="0" bIns="0" anchor="t">
+            <a:noAutofit/>
+          </a:bodyPr>
+          <a:lstStyle/>
+          <a:p>
+            <a:pPr algn="l">
+              <a:lnSpc>
+                <a:spcPts val="2304"/>
+              </a:lnSpc>
+            </a:pPr>
+            <a:r>
+              <a:rPr sz="1800" b="0" lang="ja-JP" altLang="en-US">
                 <a:solidFill>
                   <a:srgbClr val="333333"/>
                 </a:solidFill>
@@ -24808,27 +26819,27 @@
         </p:nvSpPr>
         <p:spPr>
           <a:xfrm>
-            <a:off x="685800" y="3182111"/>
-            <a:ext cx="10808208" cy="783336"/>
-          </a:xfrm>
-          <a:prstGeom prst="rect">
-            <a:avLst/>
-          </a:prstGeom>
-          <a:noFill/>
-        </p:spPr>
-        <p:txBody>
-          <a:bodyPr wrap="square" lIns="0" rIns="0" tIns="0" bIns="0" anchor="t">
-            <a:noAutofit/>
-          </a:bodyPr>
-          <a:lstStyle/>
-          <a:p>
-            <a:pPr algn="l">
-              <a:lnSpc>
-                <a:spcPts val="2688"/>
-              </a:lnSpc>
-            </a:pPr>
-            <a:r>
-              <a:rPr sz="2100" b="0" lang="ja-JP" altLang="en-US">
+            <a:off x="594360" y="3867911"/>
+            <a:ext cx="5760720" cy="978408"/>
+          </a:xfrm>
+          <a:prstGeom prst="rect">
+            <a:avLst/>
+          </a:prstGeom>
+          <a:noFill/>
+        </p:spPr>
+        <p:txBody>
+          <a:bodyPr wrap="square" lIns="0" rIns="0" tIns="0" bIns="0" anchor="t">
+            <a:noAutofit/>
+          </a:bodyPr>
+          <a:lstStyle/>
+          <a:p>
+            <a:pPr algn="l">
+              <a:lnSpc>
+                <a:spcPts val="2304"/>
+              </a:lnSpc>
+            </a:pPr>
+            <a:r>
+              <a:rPr sz="1800" b="0" lang="ja-JP" altLang="en-US">
                 <a:solidFill>
                   <a:srgbClr val="333333"/>
                 </a:solidFill>
@@ -24848,27 +26859,27 @@
         </p:nvSpPr>
         <p:spPr>
           <a:xfrm>
-            <a:off x="685800" y="4066031"/>
-            <a:ext cx="10808208" cy="783336"/>
-          </a:xfrm>
-          <a:prstGeom prst="rect">
-            <a:avLst/>
-          </a:prstGeom>
-          <a:noFill/>
-        </p:spPr>
-        <p:txBody>
-          <a:bodyPr wrap="square" lIns="0" rIns="0" tIns="0" bIns="0" anchor="t">
-            <a:noAutofit/>
-          </a:bodyPr>
-          <a:lstStyle/>
-          <a:p>
-            <a:pPr algn="l">
-              <a:lnSpc>
-                <a:spcPts val="2688"/>
-              </a:lnSpc>
-            </a:pPr>
-            <a:r>
-              <a:rPr sz="2100" b="0" lang="ja-JP" altLang="en-US">
+            <a:off x="594360" y="4946904"/>
+            <a:ext cx="5760720" cy="978408"/>
+          </a:xfrm>
+          <a:prstGeom prst="rect">
+            <a:avLst/>
+          </a:prstGeom>
+          <a:noFill/>
+        </p:spPr>
+        <p:txBody>
+          <a:bodyPr wrap="square" lIns="0" rIns="0" tIns="0" bIns="0" anchor="t">
+            <a:noAutofit/>
+          </a:bodyPr>
+          <a:lstStyle/>
+          <a:p>
+            <a:pPr algn="l">
+              <a:lnSpc>
+                <a:spcPts val="2304"/>
+              </a:lnSpc>
+            </a:pPr>
+            <a:r>
+              <a:rPr sz="1800" b="0" lang="ja-JP" altLang="en-US">
                 <a:solidFill>
                   <a:srgbClr val="333333"/>
                 </a:solidFill>
@@ -24876,6 +26887,71 @@
                 <a:ea typeface="Noto Sans JP"/>
               </a:rPr>
               <a:t>疎水性は「水から力で押し返される」という単純な説明ではない。水を含めた系全体で、どの配置が安定かを考える。</a:t>
+            </a:r>
+          </a:p>
+        </p:txBody>
+      </p:sp>
+      <p:pic>
+        <p:nvPicPr>
+          <p:cNvPr id="11" name="Picture 10" descr="review_sidechains.png"/>
+          <p:cNvPicPr>
+            <a:picLocks noChangeAspect="1"/>
+          </p:cNvPicPr>
+          <p:nvPr/>
+        </p:nvPicPr>
+        <p:blipFill>
+          <a:blip r:embed="rId3"/>
+          <a:srcRect/>
+          <a:stretch>
+            <a:fillRect/>
+          </a:stretch>
+        </p:blipFill>
+        <p:spPr>
+          <a:xfrm>
+            <a:off x="6611112" y="2069592"/>
+            <a:ext cx="4956048" cy="3304032"/>
+          </a:xfrm>
+          <a:prstGeom prst="rect">
+            <a:avLst/>
+          </a:prstGeom>
+        </p:spPr>
+      </p:pic>
+      <p:sp>
+        <p:nvSpPr>
+          <p:cNvPr id="12" name="TextBox 11"/>
+          <p:cNvSpPr txBox="1"/>
+          <p:nvPr/>
+        </p:nvSpPr>
+        <p:spPr>
+          <a:xfrm>
+            <a:off x="502920" y="6217920"/>
+            <a:ext cx="11064240" cy="182880"/>
+          </a:xfrm>
+          <a:prstGeom prst="rect">
+            <a:avLst/>
+          </a:prstGeom>
+          <a:noFill/>
+        </p:spPr>
+        <p:txBody>
+          <a:bodyPr wrap="square" lIns="0" rIns="0" tIns="0" bIns="0" anchor="t">
+            <a:noAutofit/>
+          </a:bodyPr>
+          <a:lstStyle/>
+          <a:p>
+            <a:pPr algn="l">
+              <a:lnSpc>
+                <a:spcPct val="100000"/>
+              </a:lnSpc>
+            </a:pPr>
+            <a:r>
+              <a:rPr sz="919" b="0" lang="ja-JP" altLang="en-US">
+                <a:solidFill>
+                  <a:srgbClr val="666666"/>
+                </a:solidFill>
+                <a:latin typeface="Noto Sans JP"/>
+                <a:ea typeface="Noto Sans JP"/>
+              </a:rPr>
+              <a:t>説明用の模式図。原子の大きさや距離は縮尺どおりではない。</a:t>
             </a:r>
           </a:p>
         </p:txBody>
